--- a/DYCI_CLMS_Presentation.pptx
+++ b/DYCI_CLMS_Presentation.pptx
@@ -12,7 +12,6 @@
     <p:sldId id="260" r:id="rId11"/>
     <p:sldId id="261" r:id="rId12"/>
     <p:sldId id="262" r:id="rId13"/>
-    <p:sldId id="263" r:id="rId14"/>
   </p:sldIdLst>
   <p:sldSz cx="12191695" cy="6858000" type="screen4x3"/>
   <p:notesSz cx="6858000" cy="9144000"/>
@@ -3110,7 +3109,7 @@
             <a:avLst/>
           </a:prstGeom>
           <a:solidFill>
-            <a:srgbClr val="0F2A4A"/>
+            <a:srgbClr val="1A1A1A"/>
           </a:solidFill>
           <a:ln>
             <a:noFill/>
@@ -3148,13 +3147,13 @@
         <p:spPr>
           <a:xfrm>
             <a:off x="0" y="4892040"/>
-            <a:ext cx="12191695" cy="109728"/>
+            <a:ext cx="12191695" cy="36576"/>
           </a:xfrm>
           <a:prstGeom prst="rect">
             <a:avLst/>
           </a:prstGeom>
           <a:solidFill>
-            <a:srgbClr val="F5A623"/>
+            <a:srgbClr val="555555"/>
           </a:solidFill>
           <a:ln>
             <a:noFill/>
@@ -3198,7 +3197,7 @@
             <a:avLst/>
           </a:prstGeom>
           <a:solidFill>
-            <a:srgbClr val="2C7BE5"/>
+            <a:srgbClr val="FFFFFF"/>
           </a:solidFill>
           <a:ln>
             <a:noFill/>
@@ -3298,7 +3297,7 @@
             <a:r>
               <a:rPr sz="1700" b="0">
                 <a:solidFill>
-                  <a:srgbClr val="B9D0EE"/>
+                  <a:srgbClr val="C4C4C4"/>
                 </a:solidFill>
                 <a:latin typeface="Segoe UI"/>
               </a:rPr>
@@ -3340,7 +3339,7 @@
             <a:r>
               <a:rPr sz="1300" b="1">
                 <a:solidFill>
-                  <a:srgbClr val="F5A623"/>
+                  <a:srgbClr val="C9C9C9"/>
                 </a:solidFill>
                 <a:latin typeface="Segoe UI"/>
               </a:rPr>
@@ -3359,11 +3358,11 @@
             <a:r>
               <a:rPr sz="1200" b="0">
                 <a:solidFill>
-                  <a:srgbClr val="9DB6D4"/>
-                </a:solidFill>
-                <a:latin typeface="Segoe UI"/>
-              </a:rPr>
-              <a:t>Dr. Yanga's Colleges, Inc.  •  Computer Laboratory</a:t>
+                  <a:srgbClr val="6E6E6E"/>
+                </a:solidFill>
+                <a:latin typeface="Segoe UI"/>
+              </a:rPr>
+              <a:t>Dr. Yanga's Colleges, Inc.  -  Computer Laboratory</a:t>
             </a:r>
           </a:p>
         </p:txBody>
@@ -3401,7 +3400,7 @@
             <a:avLst/>
           </a:prstGeom>
           <a:solidFill>
-            <a:srgbClr val="0F2A4A"/>
+            <a:srgbClr val="1A1A1A"/>
           </a:solidFill>
           <a:ln>
             <a:noFill/>
@@ -3445,7 +3444,7 @@
             <a:avLst/>
           </a:prstGeom>
           <a:solidFill>
-            <a:srgbClr val="F5A623"/>
+            <a:srgbClr val="C9C9C9"/>
           </a:solidFill>
           <a:ln>
             <a:noFill/>
@@ -3507,7 +3506,7 @@
             <a:r>
               <a:rPr sz="1200" b="1">
                 <a:solidFill>
-                  <a:srgbClr val="9DC2F0"/>
+                  <a:srgbClr val="C4C4C4"/>
                 </a:solidFill>
                 <a:latin typeface="Segoe UI"/>
               </a:rPr>
@@ -3568,11 +3567,11 @@
             <a:r>
               <a:rPr sz="1500" b="0">
                 <a:solidFill>
-                  <a:srgbClr val="5B6B7B"/>
-                </a:solidFill>
-                <a:latin typeface="Segoe UI"/>
-              </a:rPr>
-              <a:t>The DYCI Computer Laboratory Management System is a web-based platform that lets administrators and instructors monitor and manage every PC in a computer lab from a single dashboard — turning manual, hands-on lab supervision into one centralized control point.</a:t>
+                  <a:srgbClr val="6E6E6E"/>
+                </a:solidFill>
+                <a:latin typeface="Segoe UI"/>
+              </a:rPr>
+              <a:t>The DYCI Computer Laboratory Management System is a web-based platform that lets administrators and instructors monitor and manage every PC in a computer lab from a single dashboard - turning manual, hands-on lab supervision into one centralized control point.</a:t>
             </a:r>
           </a:p>
         </p:txBody>
@@ -3592,7 +3591,53 @@
             <a:avLst/>
           </a:prstGeom>
           <a:solidFill>
-            <a:srgbClr val="F2F6FC"/>
+            <a:srgbClr val="F7F7F7"/>
+          </a:solidFill>
+          <a:ln w="12700">
+            <a:solidFill>
+              <a:srgbClr val="C9C9C9"/>
+            </a:solidFill>
+          </a:ln>
+          <a:effectLst/>
+        </p:spPr>
+        <p:style>
+          <a:lnRef idx="1">
+            <a:schemeClr val="accent1"/>
+          </a:lnRef>
+          <a:fillRef idx="3">
+            <a:schemeClr val="accent1"/>
+          </a:fillRef>
+          <a:effectRef idx="2">
+            <a:schemeClr val="accent1"/>
+          </a:effectRef>
+          <a:fontRef idx="minor">
+            <a:schemeClr val="lt1"/>
+          </a:fontRef>
+        </p:style>
+        <p:txBody>
+          <a:bodyPr rtlCol="0" anchor="ctr"/>
+          <a:lstStyle/>
+          <a:p>
+            <a:pPr algn="ctr"/>
+          </a:p>
+        </p:txBody>
+      </p:sp>
+      <p:sp>
+        <p:nvSpPr>
+          <p:cNvPr id="7" name="Rectangle 6"/>
+          <p:cNvSpPr/>
+          <p:nvPr/>
+        </p:nvSpPr>
+        <p:spPr>
+          <a:xfrm>
+            <a:off x="502920" y="2971800"/>
+            <a:ext cx="3611880" cy="64008"/>
+          </a:xfrm>
+          <a:prstGeom prst="rect">
+            <a:avLst/>
+          </a:prstGeom>
+          <a:solidFill>
+            <a:srgbClr val="555555"/>
           </a:solidFill>
           <a:ln>
             <a:noFill/>
@@ -3623,20 +3668,153 @@
       </p:sp>
       <p:sp>
         <p:nvSpPr>
-          <p:cNvPr id="7" name="Rectangle 6"/>
+          <p:cNvPr id="8" name="TextBox 7"/>
+          <p:cNvSpPr txBox="1"/>
+          <p:nvPr/>
+        </p:nvSpPr>
+        <p:spPr>
+          <a:xfrm>
+            <a:off x="704088" y="3154680"/>
+            <a:ext cx="3246120" cy="2423160"/>
+          </a:xfrm>
+          <a:prstGeom prst="rect">
+            <a:avLst/>
+          </a:prstGeom>
+          <a:noFill/>
+        </p:spPr>
+        <p:txBody>
+          <a:bodyPr wrap="square">
+            <a:spAutoFit/>
+          </a:bodyPr>
+          <a:lstStyle/>
+          <a:p>
+            <a:pPr>
+              <a:spcAft>
+                <a:spcPts val="600"/>
+              </a:spcAft>
+            </a:pPr>
+            <a:r>
+              <a:rPr sz="1500" b="1">
+                <a:solidFill>
+                  <a:srgbClr val="1A1A1A"/>
+                </a:solidFill>
+                <a:latin typeface="Segoe UI"/>
+              </a:rPr>
+              <a:t>Centralized Control</a:t>
+            </a:r>
+          </a:p>
+          <a:p>
+            <a:pPr>
+              <a:spcAft>
+                <a:spcPts val="300"/>
+              </a:spcAft>
+            </a:pPr>
+            <a:r>
+              <a:rPr sz="1100">
+                <a:solidFill>
+                  <a:srgbClr val="6E6E6E"/>
+                </a:solidFill>
+                <a:latin typeface="Segoe UI"/>
+              </a:rPr>
+              <a:t>—  One dashboard for all lab PCs</a:t>
+            </a:r>
+          </a:p>
+          <a:p>
+            <a:pPr>
+              <a:spcAft>
+                <a:spcPts val="300"/>
+              </a:spcAft>
+            </a:pPr>
+            <a:r>
+              <a:rPr sz="1100">
+                <a:solidFill>
+                  <a:srgbClr val="6E6E6E"/>
+                </a:solidFill>
+                <a:latin typeface="Segoe UI"/>
+              </a:rPr>
+              <a:t>—  Lock, shut down &amp; restrict access</a:t>
+            </a:r>
+          </a:p>
+          <a:p>
+            <a:pPr>
+              <a:spcAft>
+                <a:spcPts val="300"/>
+              </a:spcAft>
+            </a:pPr>
+            <a:r>
+              <a:rPr sz="1100">
+                <a:solidFill>
+                  <a:srgbClr val="6E6E6E"/>
+                </a:solidFill>
+                <a:latin typeface="Segoe UI"/>
+              </a:rPr>
+              <a:t>—  Live online/offline status</a:t>
+            </a:r>
+          </a:p>
+        </p:txBody>
+      </p:sp>
+      <p:sp>
+        <p:nvSpPr>
+          <p:cNvPr id="9" name="Rectangle 8"/>
           <p:cNvSpPr/>
           <p:nvPr/>
         </p:nvSpPr>
         <p:spPr>
           <a:xfrm>
-            <a:off x="502920" y="2971800"/>
+            <a:off x="4343400" y="2971800"/>
+            <a:ext cx="3611880" cy="2743200"/>
+          </a:xfrm>
+          <a:prstGeom prst="rect">
+            <a:avLst/>
+          </a:prstGeom>
+          <a:solidFill>
+            <a:srgbClr val="F7F7F7"/>
+          </a:solidFill>
+          <a:ln w="12700">
+            <a:solidFill>
+              <a:srgbClr val="C9C9C9"/>
+            </a:solidFill>
+          </a:ln>
+          <a:effectLst/>
+        </p:spPr>
+        <p:style>
+          <a:lnRef idx="1">
+            <a:schemeClr val="accent1"/>
+          </a:lnRef>
+          <a:fillRef idx="3">
+            <a:schemeClr val="accent1"/>
+          </a:fillRef>
+          <a:effectRef idx="2">
+            <a:schemeClr val="accent1"/>
+          </a:effectRef>
+          <a:fontRef idx="minor">
+            <a:schemeClr val="lt1"/>
+          </a:fontRef>
+        </p:style>
+        <p:txBody>
+          <a:bodyPr rtlCol="0" anchor="ctr"/>
+          <a:lstStyle/>
+          <a:p>
+            <a:pPr algn="ctr"/>
+          </a:p>
+        </p:txBody>
+      </p:sp>
+      <p:sp>
+        <p:nvSpPr>
+          <p:cNvPr id="10" name="Rectangle 9"/>
+          <p:cNvSpPr/>
+          <p:nvPr/>
+        </p:nvSpPr>
+        <p:spPr>
+          <a:xfrm>
+            <a:off x="4343400" y="2971800"/>
             <a:ext cx="3611880" cy="64008"/>
           </a:xfrm>
           <a:prstGeom prst="rect">
             <a:avLst/>
           </a:prstGeom>
           <a:solidFill>
-            <a:srgbClr val="2C7BE5"/>
+            <a:srgbClr val="555555"/>
           </a:solidFill>
           <a:ln>
             <a:noFill/>
@@ -3667,13 +3845,13 @@
       </p:sp>
       <p:sp>
         <p:nvSpPr>
-          <p:cNvPr id="8" name="TextBox 7"/>
+          <p:cNvPr id="11" name="TextBox 10"/>
           <p:cNvSpPr txBox="1"/>
           <p:nvPr/>
         </p:nvSpPr>
         <p:spPr>
           <a:xfrm>
-            <a:off x="704088" y="3154680"/>
+            <a:off x="4544568" y="3154680"/>
             <a:ext cx="3246120" cy="2423160"/>
           </a:xfrm>
           <a:prstGeom prst="rect">
@@ -3695,11 +3873,11 @@
             <a:r>
               <a:rPr sz="1500" b="1">
                 <a:solidFill>
-                  <a:srgbClr val="0F2A4A"/>
-                </a:solidFill>
-                <a:latin typeface="Segoe UI"/>
-              </a:rPr>
-              <a:t>Centralized Control</a:t>
+                  <a:srgbClr val="1A1A1A"/>
+                </a:solidFill>
+                <a:latin typeface="Segoe UI"/>
+              </a:rPr>
+              <a:t>Real-Time &amp; Connected</a:t>
             </a:r>
           </a:p>
           <a:p>
@@ -3711,11 +3889,11 @@
             <a:r>
               <a:rPr sz="1100">
                 <a:solidFill>
-                  <a:srgbClr val="5B6B7B"/>
-                </a:solidFill>
-                <a:latin typeface="Segoe UI"/>
-              </a:rPr>
-              <a:t>•  One dashboard for all lab PCs</a:t>
+                  <a:srgbClr val="6E6E6E"/>
+                </a:solidFill>
+                <a:latin typeface="Segoe UI"/>
+              </a:rPr>
+              <a:t>—  Live screen monitoring</a:t>
             </a:r>
           </a:p>
           <a:p>
@@ -3727,11 +3905,11 @@
             <a:r>
               <a:rPr sz="1100">
                 <a:solidFill>
-                  <a:srgbClr val="5B6B7B"/>
-                </a:solidFill>
-                <a:latin typeface="Segoe UI"/>
-              </a:rPr>
-              <a:t>•  Lock, shut down &amp; restrict access</a:t>
+                  <a:srgbClr val="6E6E6E"/>
+                </a:solidFill>
+                <a:latin typeface="Segoe UI"/>
+              </a:rPr>
+              <a:t>—  Instant screen projection</a:t>
             </a:r>
           </a:p>
           <a:p>
@@ -3743,31 +3921,77 @@
             <a:r>
               <a:rPr sz="1100">
                 <a:solidFill>
-                  <a:srgbClr val="5B6B7B"/>
-                </a:solidFill>
-                <a:latin typeface="Segoe UI"/>
-              </a:rPr>
-              <a:t>•  Live online/offline status</a:t>
-            </a:r>
-          </a:p>
-        </p:txBody>
-      </p:sp>
-      <p:sp>
-        <p:nvSpPr>
-          <p:cNvPr id="9" name="Rectangle 8"/>
+                  <a:srgbClr val="6E6E6E"/>
+                </a:solidFill>
+                <a:latin typeface="Segoe UI"/>
+              </a:rPr>
+              <a:t>—  Built on Socket.IO updates</a:t>
+            </a:r>
+          </a:p>
+        </p:txBody>
+      </p:sp>
+      <p:sp>
+        <p:nvSpPr>
+          <p:cNvPr id="12" name="Rectangle 11"/>
           <p:cNvSpPr/>
           <p:nvPr/>
         </p:nvSpPr>
         <p:spPr>
           <a:xfrm>
-            <a:off x="4343400" y="2971800"/>
+            <a:off x="8183880" y="2971800"/>
             <a:ext cx="3611880" cy="2743200"/>
           </a:xfrm>
           <a:prstGeom prst="rect">
             <a:avLst/>
           </a:prstGeom>
           <a:solidFill>
-            <a:srgbClr val="F2F6FC"/>
+            <a:srgbClr val="F7F7F7"/>
+          </a:solidFill>
+          <a:ln w="12700">
+            <a:solidFill>
+              <a:srgbClr val="C9C9C9"/>
+            </a:solidFill>
+          </a:ln>
+          <a:effectLst/>
+        </p:spPr>
+        <p:style>
+          <a:lnRef idx="1">
+            <a:schemeClr val="accent1"/>
+          </a:lnRef>
+          <a:fillRef idx="3">
+            <a:schemeClr val="accent1"/>
+          </a:fillRef>
+          <a:effectRef idx="2">
+            <a:schemeClr val="accent1"/>
+          </a:effectRef>
+          <a:fontRef idx="minor">
+            <a:schemeClr val="lt1"/>
+          </a:fontRef>
+        </p:style>
+        <p:txBody>
+          <a:bodyPr rtlCol="0" anchor="ctr"/>
+          <a:lstStyle/>
+          <a:p>
+            <a:pPr algn="ctr"/>
+          </a:p>
+        </p:txBody>
+      </p:sp>
+      <p:sp>
+        <p:nvSpPr>
+          <p:cNvPr id="13" name="Rectangle 12"/>
+          <p:cNvSpPr/>
+          <p:nvPr/>
+        </p:nvSpPr>
+        <p:spPr>
+          <a:xfrm>
+            <a:off x="8183880" y="2971800"/>
+            <a:ext cx="3611880" cy="64008"/>
+          </a:xfrm>
+          <a:prstGeom prst="rect">
+            <a:avLst/>
+          </a:prstGeom>
+          <a:solidFill>
+            <a:srgbClr val="555555"/>
           </a:solidFill>
           <a:ln>
             <a:noFill/>
@@ -3798,57 +4022,13 @@
       </p:sp>
       <p:sp>
         <p:nvSpPr>
-          <p:cNvPr id="10" name="Rectangle 9"/>
-          <p:cNvSpPr/>
-          <p:nvPr/>
-        </p:nvSpPr>
-        <p:spPr>
-          <a:xfrm>
-            <a:off x="4343400" y="2971800"/>
-            <a:ext cx="3611880" cy="64008"/>
-          </a:xfrm>
-          <a:prstGeom prst="rect">
-            <a:avLst/>
-          </a:prstGeom>
-          <a:solidFill>
-            <a:srgbClr val="F5A623"/>
-          </a:solidFill>
-          <a:ln>
-            <a:noFill/>
-          </a:ln>
-          <a:effectLst/>
-        </p:spPr>
-        <p:style>
-          <a:lnRef idx="1">
-            <a:schemeClr val="accent1"/>
-          </a:lnRef>
-          <a:fillRef idx="3">
-            <a:schemeClr val="accent1"/>
-          </a:fillRef>
-          <a:effectRef idx="2">
-            <a:schemeClr val="accent1"/>
-          </a:effectRef>
-          <a:fontRef idx="minor">
-            <a:schemeClr val="lt1"/>
-          </a:fontRef>
-        </p:style>
-        <p:txBody>
-          <a:bodyPr rtlCol="0" anchor="ctr"/>
-          <a:lstStyle/>
-          <a:p>
-            <a:pPr algn="ctr"/>
-          </a:p>
-        </p:txBody>
-      </p:sp>
-      <p:sp>
-        <p:nvSpPr>
-          <p:cNvPr id="11" name="TextBox 10"/>
+          <p:cNvPr id="14" name="TextBox 13"/>
           <p:cNvSpPr txBox="1"/>
           <p:nvPr/>
         </p:nvSpPr>
         <p:spPr>
           <a:xfrm>
-            <a:off x="4544568" y="3154680"/>
+            <a:off x="8385048" y="3154680"/>
             <a:ext cx="3246120" cy="2423160"/>
           </a:xfrm>
           <a:prstGeom prst="rect">
@@ -3870,11 +4050,11 @@
             <a:r>
               <a:rPr sz="1500" b="1">
                 <a:solidFill>
-                  <a:srgbClr val="0F2A4A"/>
-                </a:solidFill>
-                <a:latin typeface="Segoe UI"/>
-              </a:rPr>
-              <a:t>Real-Time &amp; Connected</a:t>
+                  <a:srgbClr val="1A1A1A"/>
+                </a:solidFill>
+                <a:latin typeface="Segoe UI"/>
+              </a:rPr>
+              <a:t>Lab Operations Built-In</a:t>
             </a:r>
           </a:p>
           <a:p>
@@ -3886,11 +4066,11 @@
             <a:r>
               <a:rPr sz="1100">
                 <a:solidFill>
-                  <a:srgbClr val="5B6B7B"/>
-                </a:solidFill>
-                <a:latin typeface="Segoe UI"/>
-              </a:rPr>
-              <a:t>•  Live screen monitoring</a:t>
+                  <a:srgbClr val="6E6E6E"/>
+                </a:solidFill>
+                <a:latin typeface="Segoe UI"/>
+              </a:rPr>
+              <a:t>—  Scheduling &amp; inventory</a:t>
             </a:r>
           </a:p>
           <a:p>
@@ -3902,11 +4082,11 @@
             <a:r>
               <a:rPr sz="1100">
                 <a:solidFill>
-                  <a:srgbClr val="5B6B7B"/>
-                </a:solidFill>
-                <a:latin typeface="Segoe UI"/>
-              </a:rPr>
-              <a:t>•  Instant screen projection</a:t>
+                  <a:srgbClr val="6E6E6E"/>
+                </a:solidFill>
+                <a:latin typeface="Segoe UI"/>
+              </a:rPr>
+              <a:t>—  Messaging &amp; support tickets</a:t>
             </a:r>
           </a:p>
           <a:p>
@@ -3918,186 +4098,11 @@
             <a:r>
               <a:rPr sz="1100">
                 <a:solidFill>
-                  <a:srgbClr val="5B6B7B"/>
-                </a:solidFill>
-                <a:latin typeface="Segoe UI"/>
-              </a:rPr>
-              <a:t>•  Built on Socket.IO updates</a:t>
-            </a:r>
-          </a:p>
-        </p:txBody>
-      </p:sp>
-      <p:sp>
-        <p:nvSpPr>
-          <p:cNvPr id="12" name="Rectangle 11"/>
-          <p:cNvSpPr/>
-          <p:nvPr/>
-        </p:nvSpPr>
-        <p:spPr>
-          <a:xfrm>
-            <a:off x="8183880" y="2971800"/>
-            <a:ext cx="3611880" cy="2743200"/>
-          </a:xfrm>
-          <a:prstGeom prst="rect">
-            <a:avLst/>
-          </a:prstGeom>
-          <a:solidFill>
-            <a:srgbClr val="F2F6FC"/>
-          </a:solidFill>
-          <a:ln>
-            <a:noFill/>
-          </a:ln>
-          <a:effectLst/>
-        </p:spPr>
-        <p:style>
-          <a:lnRef idx="1">
-            <a:schemeClr val="accent1"/>
-          </a:lnRef>
-          <a:fillRef idx="3">
-            <a:schemeClr val="accent1"/>
-          </a:fillRef>
-          <a:effectRef idx="2">
-            <a:schemeClr val="accent1"/>
-          </a:effectRef>
-          <a:fontRef idx="minor">
-            <a:schemeClr val="lt1"/>
-          </a:fontRef>
-        </p:style>
-        <p:txBody>
-          <a:bodyPr rtlCol="0" anchor="ctr"/>
-          <a:lstStyle/>
-          <a:p>
-            <a:pPr algn="ctr"/>
-          </a:p>
-        </p:txBody>
-      </p:sp>
-      <p:sp>
-        <p:nvSpPr>
-          <p:cNvPr id="13" name="Rectangle 12"/>
-          <p:cNvSpPr/>
-          <p:nvPr/>
-        </p:nvSpPr>
-        <p:spPr>
-          <a:xfrm>
-            <a:off x="8183880" y="2971800"/>
-            <a:ext cx="3611880" cy="64008"/>
-          </a:xfrm>
-          <a:prstGeom prst="rect">
-            <a:avLst/>
-          </a:prstGeom>
-          <a:solidFill>
-            <a:srgbClr val="2C7BE5"/>
-          </a:solidFill>
-          <a:ln>
-            <a:noFill/>
-          </a:ln>
-          <a:effectLst/>
-        </p:spPr>
-        <p:style>
-          <a:lnRef idx="1">
-            <a:schemeClr val="accent1"/>
-          </a:lnRef>
-          <a:fillRef idx="3">
-            <a:schemeClr val="accent1"/>
-          </a:fillRef>
-          <a:effectRef idx="2">
-            <a:schemeClr val="accent1"/>
-          </a:effectRef>
-          <a:fontRef idx="minor">
-            <a:schemeClr val="lt1"/>
-          </a:fontRef>
-        </p:style>
-        <p:txBody>
-          <a:bodyPr rtlCol="0" anchor="ctr"/>
-          <a:lstStyle/>
-          <a:p>
-            <a:pPr algn="ctr"/>
-          </a:p>
-        </p:txBody>
-      </p:sp>
-      <p:sp>
-        <p:nvSpPr>
-          <p:cNvPr id="14" name="TextBox 13"/>
-          <p:cNvSpPr txBox="1"/>
-          <p:nvPr/>
-        </p:nvSpPr>
-        <p:spPr>
-          <a:xfrm>
-            <a:off x="8385048" y="3154680"/>
-            <a:ext cx="3246120" cy="2423160"/>
-          </a:xfrm>
-          <a:prstGeom prst="rect">
-            <a:avLst/>
-          </a:prstGeom>
-          <a:noFill/>
-        </p:spPr>
-        <p:txBody>
-          <a:bodyPr wrap="square">
-            <a:spAutoFit/>
-          </a:bodyPr>
-          <a:lstStyle/>
-          <a:p>
-            <a:pPr>
-              <a:spcAft>
-                <a:spcPts val="600"/>
-              </a:spcAft>
-            </a:pPr>
-            <a:r>
-              <a:rPr sz="1500" b="1">
-                <a:solidFill>
-                  <a:srgbClr val="0F2A4A"/>
-                </a:solidFill>
-                <a:latin typeface="Segoe UI"/>
-              </a:rPr>
-              <a:t>Academics Built-In</a:t>
-            </a:r>
-          </a:p>
-          <a:p>
-            <a:pPr>
-              <a:spcAft>
-                <a:spcPts val="300"/>
-              </a:spcAft>
-            </a:pPr>
-            <a:r>
-              <a:rPr sz="1100">
-                <a:solidFill>
-                  <a:srgbClr val="5B6B7B"/>
-                </a:solidFill>
-                <a:latin typeface="Segoe UI"/>
-              </a:rPr>
-              <a:t>•  Grading &amp; gradebook</a:t>
-            </a:r>
-          </a:p>
-          <a:p>
-            <a:pPr>
-              <a:spcAft>
-                <a:spcPts val="300"/>
-              </a:spcAft>
-            </a:pPr>
-            <a:r>
-              <a:rPr sz="1100">
-                <a:solidFill>
-                  <a:srgbClr val="5B6B7B"/>
-                </a:solidFill>
-                <a:latin typeface="Segoe UI"/>
-              </a:rPr>
-              <a:t>•  Messaging &amp; support tickets</a:t>
-            </a:r>
-          </a:p>
-          <a:p>
-            <a:pPr>
-              <a:spcAft>
-                <a:spcPts val="300"/>
-              </a:spcAft>
-            </a:pPr>
-            <a:r>
-              <a:rPr sz="1100">
-                <a:solidFill>
-                  <a:srgbClr val="5B6B7B"/>
-                </a:solidFill>
-                <a:latin typeface="Segoe UI"/>
-              </a:rPr>
-              <a:t>•  Usage &amp; activity reports</a:t>
+                  <a:srgbClr val="6E6E6E"/>
+                </a:solidFill>
+                <a:latin typeface="Segoe UI"/>
+              </a:rPr>
+              <a:t>—  Usage &amp; activity reports</a:t>
             </a:r>
           </a:p>
         </p:txBody>
@@ -4135,7 +4140,7 @@
             <a:avLst/>
           </a:prstGeom>
           <a:solidFill>
-            <a:srgbClr val="0F2A4A"/>
+            <a:srgbClr val="1A1A1A"/>
           </a:solidFill>
           <a:ln>
             <a:noFill/>
@@ -4179,7 +4184,7 @@
             <a:avLst/>
           </a:prstGeom>
           <a:solidFill>
-            <a:srgbClr val="F5A623"/>
+            <a:srgbClr val="C9C9C9"/>
           </a:solidFill>
           <a:ln>
             <a:noFill/>
@@ -4241,11 +4246,11 @@
             <a:r>
               <a:rPr sz="1200" b="1">
                 <a:solidFill>
-                  <a:srgbClr val="9DC2F0"/>
-                </a:solidFill>
-                <a:latin typeface="Segoe UI"/>
-              </a:rPr>
-              <a:t>AT A GLANCE</a:t>
+                  <a:srgbClr val="C4C4C4"/>
+                </a:solidFill>
+                <a:latin typeface="Segoe UI"/>
+              </a:rPr>
+              <a:t>WHO IT'S FOR</a:t>
             </a:r>
           </a:p>
           <a:p>
@@ -4264,7 +4269,7 @@
                 </a:solidFill>
                 <a:latin typeface="Segoe UI"/>
               </a:rPr>
-              <a:t>How the System Works</a:t>
+              <a:t>Target Users</a:t>
             </a:r>
           </a:p>
         </p:txBody>
@@ -4277,8 +4282,8 @@
         </p:nvSpPr>
         <p:spPr>
           <a:xfrm>
-            <a:off x="502920" y="1508760"/>
-            <a:ext cx="11155680" cy="640080"/>
+            <a:off x="502920" y="1463040"/>
+            <a:ext cx="11155680" cy="457200"/>
           </a:xfrm>
           <a:prstGeom prst="rect">
             <a:avLst/>
@@ -4302,11 +4307,11 @@
             <a:r>
               <a:rPr sz="1500" b="0">
                 <a:solidFill>
-                  <a:srgbClr val="5B6B7B"/>
-                </a:solidFill>
-                <a:latin typeface="Segoe UI"/>
-              </a:rPr>
-              <a:t>Two connected sides keep the whole lab in sync over the local network.</a:t>
+                  <a:srgbClr val="6E6E6E"/>
+                </a:solidFill>
+                <a:latin typeface="Segoe UI"/>
+              </a:rPr>
+              <a:t>Three roles, one connected system - each gets the tools that match their job in the lab.</a:t>
             </a:r>
           </a:p>
         </p:txBody>
@@ -4319,14 +4324,60 @@
         </p:nvSpPr>
         <p:spPr>
           <a:xfrm>
-            <a:off x="502920" y="2606040"/>
-            <a:ext cx="3383280" cy="1371600"/>
+            <a:off x="502920" y="2103120"/>
+            <a:ext cx="3611880" cy="3749039"/>
           </a:xfrm>
           <a:prstGeom prst="rect">
             <a:avLst/>
           </a:prstGeom>
           <a:solidFill>
-            <a:srgbClr val="0F2A4A"/>
+            <a:srgbClr val="F7F7F7"/>
+          </a:solidFill>
+          <a:ln w="12700">
+            <a:solidFill>
+              <a:srgbClr val="C9C9C9"/>
+            </a:solidFill>
+          </a:ln>
+          <a:effectLst/>
+        </p:spPr>
+        <p:style>
+          <a:lnRef idx="1">
+            <a:schemeClr val="accent1"/>
+          </a:lnRef>
+          <a:fillRef idx="3">
+            <a:schemeClr val="accent1"/>
+          </a:fillRef>
+          <a:effectRef idx="2">
+            <a:schemeClr val="accent1"/>
+          </a:effectRef>
+          <a:fontRef idx="minor">
+            <a:schemeClr val="lt1"/>
+          </a:fontRef>
+        </p:style>
+        <p:txBody>
+          <a:bodyPr rtlCol="0" anchor="ctr"/>
+          <a:lstStyle/>
+          <a:p>
+            <a:pPr algn="ctr"/>
+          </a:p>
+        </p:txBody>
+      </p:sp>
+      <p:sp>
+        <p:nvSpPr>
+          <p:cNvPr id="7" name="Rectangle 6"/>
+          <p:cNvSpPr/>
+          <p:nvPr/>
+        </p:nvSpPr>
+        <p:spPr>
+          <a:xfrm>
+            <a:off x="502920" y="2103120"/>
+            <a:ext cx="3611880" cy="822960"/>
+          </a:xfrm>
+          <a:prstGeom prst="rect">
+            <a:avLst/>
+          </a:prstGeom>
+          <a:solidFill>
+            <a:srgbClr val="1A1A1A"/>
           </a:solidFill>
           <a:ln>
             <a:noFill/>
@@ -4357,14 +4408,14 @@
       </p:sp>
       <p:sp>
         <p:nvSpPr>
-          <p:cNvPr id="7" name="TextBox 6"/>
+          <p:cNvPr id="8" name="TextBox 7"/>
           <p:cNvSpPr txBox="1"/>
           <p:nvPr/>
         </p:nvSpPr>
         <p:spPr>
           <a:xfrm>
-            <a:off x="685800" y="2770632"/>
-            <a:ext cx="3017520" cy="1097280"/>
+            <a:off x="731520" y="2249424"/>
+            <a:ext cx="3154680" cy="640080"/>
           </a:xfrm>
           <a:prstGeom prst="rect">
             <a:avLst/>
@@ -4372,7 +4423,7 @@
           <a:noFill/>
         </p:spPr>
         <p:txBody>
-          <a:bodyPr wrap="square" anchor="ctr" lIns="0" rIns="0" tIns="0" bIns="0">
+          <a:bodyPr wrap="square" anchor="t" lIns="0" rIns="0" tIns="0" bIns="0">
             <a:spAutoFit/>
           </a:bodyPr>
           <a:lstStyle/>
@@ -4382,17 +4433,17 @@
                 <a:spcPts val="0"/>
               </a:spcBef>
               <a:spcAft>
-                <a:spcPts val="300"/>
-              </a:spcAft>
-            </a:pPr>
-            <a:r>
-              <a:rPr sz="1600" b="1">
+                <a:spcPts val="100"/>
+              </a:spcAft>
+            </a:pPr>
+            <a:r>
+              <a:rPr sz="1800" b="1">
                 <a:solidFill>
                   <a:srgbClr val="FFFFFF"/>
                 </a:solidFill>
                 <a:latin typeface="Segoe UI"/>
               </a:rPr>
-              <a:t>Host Dashboard</a:t>
+              <a:t>Administrator</a:t>
             </a:r>
           </a:p>
           <a:p>
@@ -4407,31 +4458,31 @@
             <a:r>
               <a:rPr sz="1100" b="0">
                 <a:solidFill>
-                  <a:srgbClr val="DDE9F7"/>
-                </a:solidFill>
-                <a:latin typeface="Segoe UI"/>
-              </a:rPr>
-              <a:t>Admin / Instructor controls the lab from the browser</a:t>
-            </a:r>
-          </a:p>
-        </p:txBody>
-      </p:sp>
-      <p:sp>
-        <p:nvSpPr>
-          <p:cNvPr id="8" name="Rectangle 7"/>
+                  <a:srgbClr val="C4C4C4"/>
+                </a:solidFill>
+                <a:latin typeface="Segoe UI"/>
+              </a:rPr>
+              <a:t>Manages the whole system</a:t>
+            </a:r>
+          </a:p>
+        </p:txBody>
+      </p:sp>
+      <p:sp>
+        <p:nvSpPr>
+          <p:cNvPr id="9" name="Rectangle 8"/>
           <p:cNvSpPr/>
           <p:nvPr/>
         </p:nvSpPr>
         <p:spPr>
           <a:xfrm>
-            <a:off x="4434840" y="2606040"/>
-            <a:ext cx="3383280" cy="1371600"/>
+            <a:off x="502920" y="2926080"/>
+            <a:ext cx="3611880" cy="54864"/>
           </a:xfrm>
           <a:prstGeom prst="rect">
             <a:avLst/>
           </a:prstGeom>
           <a:solidFill>
-            <a:srgbClr val="2C7BE5"/>
+            <a:srgbClr val="555555"/>
           </a:solidFill>
           <a:ln>
             <a:noFill/>
@@ -4462,14 +4513,14 @@
       </p:sp>
       <p:sp>
         <p:nvSpPr>
-          <p:cNvPr id="9" name="TextBox 8"/>
+          <p:cNvPr id="10" name="TextBox 9"/>
           <p:cNvSpPr txBox="1"/>
           <p:nvPr/>
         </p:nvSpPr>
         <p:spPr>
           <a:xfrm>
-            <a:off x="4617720" y="2770632"/>
-            <a:ext cx="3017520" cy="1097280"/>
+            <a:off x="731520" y="3200400"/>
+            <a:ext cx="3154680" cy="2468879"/>
           </a:xfrm>
           <a:prstGeom prst="rect">
             <a:avLst/>
@@ -4477,66 +4528,122 @@
           <a:noFill/>
         </p:spPr>
         <p:txBody>
-          <a:bodyPr wrap="square" anchor="ctr" lIns="0" rIns="0" tIns="0" bIns="0">
+          <a:bodyPr wrap="square">
             <a:spAutoFit/>
           </a:bodyPr>
           <a:lstStyle/>
           <a:p>
-            <a:pPr algn="l">
-              <a:spcBef>
-                <a:spcPts val="0"/>
-              </a:spcBef>
-              <a:spcAft>
-                <a:spcPts val="300"/>
-              </a:spcAft>
-            </a:pPr>
-            <a:r>
-              <a:rPr sz="1600" b="1">
-                <a:solidFill>
-                  <a:srgbClr val="FFFFFF"/>
-                </a:solidFill>
-                <a:latin typeface="Segoe UI"/>
-              </a:rPr>
-              <a:t>Host Server</a:t>
-            </a:r>
-          </a:p>
-          <a:p>
-            <a:pPr algn="l">
-              <a:spcBef>
-                <a:spcPts val="0"/>
-              </a:spcBef>
-              <a:spcAft>
-                <a:spcPts val="0"/>
-              </a:spcAft>
-            </a:pPr>
-            <a:r>
-              <a:rPr sz="1100" b="0">
-                <a:solidFill>
-                  <a:srgbClr val="DDE9F7"/>
-                </a:solidFill>
-                <a:latin typeface="Segoe UI"/>
-              </a:rPr>
-              <a:t>Relays commands &amp; screen frames securely</a:t>
-            </a:r>
-          </a:p>
-        </p:txBody>
-      </p:sp>
-      <p:sp>
-        <p:nvSpPr>
-          <p:cNvPr id="10" name="Rectangle 9"/>
+            <a:pPr>
+              <a:spcAft>
+                <a:spcPts val="1000"/>
+              </a:spcAft>
+            </a:pPr>
+            <a:r>
+              <a:rPr sz="1300">
+                <a:solidFill>
+                  <a:srgbClr val="6E6E6E"/>
+                </a:solidFill>
+                <a:latin typeface="Segoe UI"/>
+              </a:rPr>
+              <a:t>—  Users, labs &amp; computers</a:t>
+            </a:r>
+          </a:p>
+          <a:p>
+            <a:pPr>
+              <a:spcAft>
+                <a:spcPts val="1000"/>
+              </a:spcAft>
+            </a:pPr>
+            <a:r>
+              <a:rPr sz="1300">
+                <a:solidFill>
+                  <a:srgbClr val="6E6E6E"/>
+                </a:solidFill>
+                <a:latin typeface="Segoe UI"/>
+              </a:rPr>
+              <a:t>—  Network &amp; security control</a:t>
+            </a:r>
+          </a:p>
+          <a:p>
+            <a:pPr>
+              <a:spcAft>
+                <a:spcPts val="1000"/>
+              </a:spcAft>
+            </a:pPr>
+            <a:r>
+              <a:rPr sz="1300">
+                <a:solidFill>
+                  <a:srgbClr val="6E6E6E"/>
+                </a:solidFill>
+                <a:latin typeface="Segoe UI"/>
+              </a:rPr>
+              <a:t>—  Reports, logs &amp; inventory</a:t>
+            </a:r>
+          </a:p>
+        </p:txBody>
+      </p:sp>
+      <p:sp>
+        <p:nvSpPr>
+          <p:cNvPr id="11" name="Rectangle 10"/>
           <p:cNvSpPr/>
           <p:nvPr/>
         </p:nvSpPr>
         <p:spPr>
           <a:xfrm>
-            <a:off x="8366760" y="2606040"/>
-            <a:ext cx="3291840" cy="1371600"/>
+            <a:off x="4343400" y="2103120"/>
+            <a:ext cx="3611880" cy="3749039"/>
           </a:xfrm>
           <a:prstGeom prst="rect">
             <a:avLst/>
           </a:prstGeom>
           <a:solidFill>
-            <a:srgbClr val="0F2A4A"/>
+            <a:srgbClr val="F7F7F7"/>
+          </a:solidFill>
+          <a:ln w="12700">
+            <a:solidFill>
+              <a:srgbClr val="C9C9C9"/>
+            </a:solidFill>
+          </a:ln>
+          <a:effectLst/>
+        </p:spPr>
+        <p:style>
+          <a:lnRef idx="1">
+            <a:schemeClr val="accent1"/>
+          </a:lnRef>
+          <a:fillRef idx="3">
+            <a:schemeClr val="accent1"/>
+          </a:fillRef>
+          <a:effectRef idx="2">
+            <a:schemeClr val="accent1"/>
+          </a:effectRef>
+          <a:fontRef idx="minor">
+            <a:schemeClr val="lt1"/>
+          </a:fontRef>
+        </p:style>
+        <p:txBody>
+          <a:bodyPr rtlCol="0" anchor="ctr"/>
+          <a:lstStyle/>
+          <a:p>
+            <a:pPr algn="ctr"/>
+          </a:p>
+        </p:txBody>
+      </p:sp>
+      <p:sp>
+        <p:nvSpPr>
+          <p:cNvPr id="12" name="Rectangle 11"/>
+          <p:cNvSpPr/>
+          <p:nvPr/>
+        </p:nvSpPr>
+        <p:spPr>
+          <a:xfrm>
+            <a:off x="4343400" y="2103120"/>
+            <a:ext cx="3611880" cy="822960"/>
+          </a:xfrm>
+          <a:prstGeom prst="rect">
+            <a:avLst/>
+          </a:prstGeom>
+          <a:solidFill>
+            <a:srgbClr val="1A1A1A"/>
           </a:solidFill>
           <a:ln>
             <a:noFill/>
@@ -4567,14 +4674,14 @@
       </p:sp>
       <p:sp>
         <p:nvSpPr>
-          <p:cNvPr id="11" name="TextBox 10"/>
+          <p:cNvPr id="13" name="TextBox 12"/>
           <p:cNvSpPr txBox="1"/>
           <p:nvPr/>
         </p:nvSpPr>
         <p:spPr>
           <a:xfrm>
-            <a:off x="8549640" y="2770632"/>
-            <a:ext cx="2926080" cy="1097280"/>
+            <a:off x="4572000" y="2249424"/>
+            <a:ext cx="3154680" cy="640080"/>
           </a:xfrm>
           <a:prstGeom prst="rect">
             <a:avLst/>
@@ -4582,7 +4689,7 @@
           <a:noFill/>
         </p:spPr>
         <p:txBody>
-          <a:bodyPr wrap="square" anchor="ctr" lIns="0" rIns="0" tIns="0" bIns="0">
+          <a:bodyPr wrap="square" anchor="t" lIns="0" rIns="0" tIns="0" bIns="0">
             <a:spAutoFit/>
           </a:bodyPr>
           <a:lstStyle/>
@@ -4592,17 +4699,17 @@
                 <a:spcPts val="0"/>
               </a:spcBef>
               <a:spcAft>
-                <a:spcPts val="300"/>
-              </a:spcAft>
-            </a:pPr>
-            <a:r>
-              <a:rPr sz="1600" b="1">
+                <a:spcPts val="100"/>
+              </a:spcAft>
+            </a:pPr>
+            <a:r>
+              <a:rPr sz="1800" b="1">
                 <a:solidFill>
                   <a:srgbClr val="FFFFFF"/>
                 </a:solidFill>
                 <a:latin typeface="Segoe UI"/>
               </a:rPr>
-              <a:t>Lab PC Agents</a:t>
+              <a:t>Instructor</a:t>
             </a:r>
           </a:p>
           <a:p>
@@ -4617,31 +4724,31 @@
             <a:r>
               <a:rPr sz="1100" b="0">
                 <a:solidFill>
-                  <a:srgbClr val="DDE9F7"/>
-                </a:solidFill>
-                <a:latin typeface="Segoe UI"/>
-              </a:rPr>
-              <a:t>Each PC reports status &amp; runs locked overlay</a:t>
-            </a:r>
-          </a:p>
-        </p:txBody>
-      </p:sp>
-      <p:sp>
-        <p:nvSpPr>
-          <p:cNvPr id="12" name="Right Arrow 11"/>
+                  <a:srgbClr val="C4C4C4"/>
+                </a:solidFill>
+                <a:latin typeface="Segoe UI"/>
+              </a:rPr>
+              <a:t>Runs the classroom</a:t>
+            </a:r>
+          </a:p>
+        </p:txBody>
+      </p:sp>
+      <p:sp>
+        <p:nvSpPr>
+          <p:cNvPr id="14" name="Rectangle 13"/>
           <p:cNvSpPr/>
           <p:nvPr/>
         </p:nvSpPr>
         <p:spPr>
           <a:xfrm>
-            <a:off x="3950208" y="3108960"/>
-            <a:ext cx="411480" cy="365760"/>
-          </a:xfrm>
-          <a:prstGeom prst="rightArrow">
+            <a:off x="4343400" y="2926080"/>
+            <a:ext cx="3611880" cy="54864"/>
+          </a:xfrm>
+          <a:prstGeom prst="rect">
             <a:avLst/>
           </a:prstGeom>
           <a:solidFill>
-            <a:srgbClr val="F5A623"/>
+            <a:srgbClr val="555555"/>
           </a:solidFill>
           <a:ln>
             <a:noFill/>
@@ -4672,20 +4779,137 @@
       </p:sp>
       <p:sp>
         <p:nvSpPr>
-          <p:cNvPr id="13" name="Right Arrow 12"/>
+          <p:cNvPr id="15" name="TextBox 14"/>
+          <p:cNvSpPr txBox="1"/>
+          <p:nvPr/>
+        </p:nvSpPr>
+        <p:spPr>
+          <a:xfrm>
+            <a:off x="4572000" y="3200400"/>
+            <a:ext cx="3154680" cy="2468879"/>
+          </a:xfrm>
+          <a:prstGeom prst="rect">
+            <a:avLst/>
+          </a:prstGeom>
+          <a:noFill/>
+        </p:spPr>
+        <p:txBody>
+          <a:bodyPr wrap="square">
+            <a:spAutoFit/>
+          </a:bodyPr>
+          <a:lstStyle/>
+          <a:p>
+            <a:pPr>
+              <a:spcAft>
+                <a:spcPts val="1000"/>
+              </a:spcAft>
+            </a:pPr>
+            <a:r>
+              <a:rPr sz="1300">
+                <a:solidFill>
+                  <a:srgbClr val="6E6E6E"/>
+                </a:solidFill>
+                <a:latin typeface="Segoe UI"/>
+              </a:rPr>
+              <a:t>—  Monitor student screens</a:t>
+            </a:r>
+          </a:p>
+          <a:p>
+            <a:pPr>
+              <a:spcAft>
+                <a:spcPts val="1000"/>
+              </a:spcAft>
+            </a:pPr>
+            <a:r>
+              <a:rPr sz="1300">
+                <a:solidFill>
+                  <a:srgbClr val="6E6E6E"/>
+                </a:solidFill>
+                <a:latin typeface="Segoe UI"/>
+              </a:rPr>
+              <a:t>—  Lock / project / control PCs</a:t>
+            </a:r>
+          </a:p>
+          <a:p>
+            <a:pPr>
+              <a:spcAft>
+                <a:spcPts val="1000"/>
+              </a:spcAft>
+            </a:pPr>
+            <a:r>
+              <a:rPr sz="1300">
+                <a:solidFill>
+                  <a:srgbClr val="6E6E6E"/>
+                </a:solidFill>
+                <a:latin typeface="Segoe UI"/>
+              </a:rPr>
+              <a:t>—  Messaging &amp; approve tickets</a:t>
+            </a:r>
+          </a:p>
+        </p:txBody>
+      </p:sp>
+      <p:sp>
+        <p:nvSpPr>
+          <p:cNvPr id="16" name="Rectangle 15"/>
           <p:cNvSpPr/>
           <p:nvPr/>
         </p:nvSpPr>
         <p:spPr>
           <a:xfrm>
-            <a:off x="7882127" y="3108960"/>
-            <a:ext cx="411480" cy="365760"/>
-          </a:xfrm>
-          <a:prstGeom prst="rightArrow">
+            <a:off x="8183880" y="2103120"/>
+            <a:ext cx="3611880" cy="3749039"/>
+          </a:xfrm>
+          <a:prstGeom prst="rect">
             <a:avLst/>
           </a:prstGeom>
           <a:solidFill>
-            <a:srgbClr val="F5A623"/>
+            <a:srgbClr val="F7F7F7"/>
+          </a:solidFill>
+          <a:ln w="12700">
+            <a:solidFill>
+              <a:srgbClr val="C9C9C9"/>
+            </a:solidFill>
+          </a:ln>
+          <a:effectLst/>
+        </p:spPr>
+        <p:style>
+          <a:lnRef idx="1">
+            <a:schemeClr val="accent1"/>
+          </a:lnRef>
+          <a:fillRef idx="3">
+            <a:schemeClr val="accent1"/>
+          </a:fillRef>
+          <a:effectRef idx="2">
+            <a:schemeClr val="accent1"/>
+          </a:effectRef>
+          <a:fontRef idx="minor">
+            <a:schemeClr val="lt1"/>
+          </a:fontRef>
+        </p:style>
+        <p:txBody>
+          <a:bodyPr rtlCol="0" anchor="ctr"/>
+          <a:lstStyle/>
+          <a:p>
+            <a:pPr algn="ctr"/>
+          </a:p>
+        </p:txBody>
+      </p:sp>
+      <p:sp>
+        <p:nvSpPr>
+          <p:cNvPr id="17" name="Rectangle 16"/>
+          <p:cNvSpPr/>
+          <p:nvPr/>
+        </p:nvSpPr>
+        <p:spPr>
+          <a:xfrm>
+            <a:off x="8183880" y="2103120"/>
+            <a:ext cx="3611880" cy="822960"/>
+          </a:xfrm>
+          <a:prstGeom prst="rect">
+            <a:avLst/>
+          </a:prstGeom>
+          <a:solidFill>
+            <a:srgbClr val="1A1A1A"/>
           </a:solidFill>
           <a:ln>
             <a:noFill/>
@@ -4716,14 +4940,14 @@
       </p:sp>
       <p:sp>
         <p:nvSpPr>
-          <p:cNvPr id="14" name="TextBox 13"/>
+          <p:cNvPr id="18" name="TextBox 17"/>
           <p:cNvSpPr txBox="1"/>
           <p:nvPr/>
         </p:nvSpPr>
         <p:spPr>
           <a:xfrm>
-            <a:off x="502920" y="4572000"/>
-            <a:ext cx="11155680" cy="1645920"/>
+            <a:off x="8412480" y="2249424"/>
+            <a:ext cx="3154680" cy="640080"/>
           </a:xfrm>
           <a:prstGeom prst="rect">
             <a:avLst/>
@@ -4741,17 +4965,17 @@
                 <a:spcPts val="0"/>
               </a:spcBef>
               <a:spcAft>
-                <a:spcPts val="600"/>
-              </a:spcAft>
-            </a:pPr>
-            <a:r>
-              <a:rPr sz="1400" b="1">
-                <a:solidFill>
-                  <a:srgbClr val="0F2A4A"/>
-                </a:solidFill>
-                <a:latin typeface="Segoe UI"/>
-              </a:rPr>
-              <a:t>Key capabilities</a:t>
+                <a:spcPts val="100"/>
+              </a:spcAft>
+            </a:pPr>
+            <a:r>
+              <a:rPr sz="1800" b="1">
+                <a:solidFill>
+                  <a:srgbClr val="FFFFFF"/>
+                </a:solidFill>
+                <a:latin typeface="Segoe UI"/>
+              </a:rPr>
+              <a:t>Student</a:t>
             </a:r>
           </a:p>
           <a:p>
@@ -4760,55 +4984,132 @@
                 <a:spcPts val="0"/>
               </a:spcBef>
               <a:spcAft>
-                <a:spcPts val="400"/>
-              </a:spcAft>
-            </a:pPr>
-            <a:r>
-              <a:rPr sz="1200" b="0">
-                <a:solidFill>
-                  <a:srgbClr val="5B6B7B"/>
-                </a:solidFill>
-                <a:latin typeface="Segoe UI"/>
-              </a:rPr>
-              <a:t>•  Live monitoring of every lab PC — online status, screens &amp; activity</a:t>
-            </a:r>
-          </a:p>
-          <a:p>
-            <a:pPr algn="l">
-              <a:spcBef>
                 <a:spcPts val="0"/>
-              </a:spcBef>
-              <a:spcAft>
-                <a:spcPts val="400"/>
-              </a:spcAft>
-            </a:pPr>
-            <a:r>
-              <a:rPr sz="1200" b="0">
-                <a:solidFill>
-                  <a:srgbClr val="5B6B7B"/>
-                </a:solidFill>
-                <a:latin typeface="Segoe UI"/>
-              </a:rPr>
-              <a:t>•  Locked Demo Mode — project the instructor's screen fullscreen and input-locked on guests</a:t>
-            </a:r>
-          </a:p>
-          <a:p>
-            <a:pPr algn="l">
-              <a:spcBef>
-                <a:spcPts val="0"/>
-              </a:spcBef>
-              <a:spcAft>
-                <a:spcPts val="0"/>
-              </a:spcAft>
-            </a:pPr>
-            <a:r>
-              <a:rPr sz="1200" b="0">
-                <a:solidFill>
-                  <a:srgbClr val="5B6B7B"/>
-                </a:solidFill>
-                <a:latin typeface="Segoe UI"/>
-              </a:rPr>
-              <a:t>•  Remote actions — lock, shut down, network scan &amp; website restriction</a:t>
+              </a:spcAft>
+            </a:pPr>
+            <a:r>
+              <a:rPr sz="1100" b="0">
+                <a:solidFill>
+                  <a:srgbClr val="C4C4C4"/>
+                </a:solidFill>
+                <a:latin typeface="Segoe UI"/>
+              </a:rPr>
+              <a:t>Uses the lab</a:t>
+            </a:r>
+          </a:p>
+        </p:txBody>
+      </p:sp>
+      <p:sp>
+        <p:nvSpPr>
+          <p:cNvPr id="19" name="Rectangle 18"/>
+          <p:cNvSpPr/>
+          <p:nvPr/>
+        </p:nvSpPr>
+        <p:spPr>
+          <a:xfrm>
+            <a:off x="8183880" y="2926080"/>
+            <a:ext cx="3611880" cy="54864"/>
+          </a:xfrm>
+          <a:prstGeom prst="rect">
+            <a:avLst/>
+          </a:prstGeom>
+          <a:solidFill>
+            <a:srgbClr val="555555"/>
+          </a:solidFill>
+          <a:ln>
+            <a:noFill/>
+          </a:ln>
+          <a:effectLst/>
+        </p:spPr>
+        <p:style>
+          <a:lnRef idx="1">
+            <a:schemeClr val="accent1"/>
+          </a:lnRef>
+          <a:fillRef idx="3">
+            <a:schemeClr val="accent1"/>
+          </a:fillRef>
+          <a:effectRef idx="2">
+            <a:schemeClr val="accent1"/>
+          </a:effectRef>
+          <a:fontRef idx="minor">
+            <a:schemeClr val="lt1"/>
+          </a:fontRef>
+        </p:style>
+        <p:txBody>
+          <a:bodyPr rtlCol="0" anchor="ctr"/>
+          <a:lstStyle/>
+          <a:p>
+            <a:pPr algn="ctr"/>
+          </a:p>
+        </p:txBody>
+      </p:sp>
+      <p:sp>
+        <p:nvSpPr>
+          <p:cNvPr id="20" name="TextBox 19"/>
+          <p:cNvSpPr txBox="1"/>
+          <p:nvPr/>
+        </p:nvSpPr>
+        <p:spPr>
+          <a:xfrm>
+            <a:off x="8412480" y="3200400"/>
+            <a:ext cx="3154680" cy="2468879"/>
+          </a:xfrm>
+          <a:prstGeom prst="rect">
+            <a:avLst/>
+          </a:prstGeom>
+          <a:noFill/>
+        </p:spPr>
+        <p:txBody>
+          <a:bodyPr wrap="square">
+            <a:spAutoFit/>
+          </a:bodyPr>
+          <a:lstStyle/>
+          <a:p>
+            <a:pPr>
+              <a:spcAft>
+                <a:spcPts val="1000"/>
+              </a:spcAft>
+            </a:pPr>
+            <a:r>
+              <a:rPr sz="1300">
+                <a:solidFill>
+                  <a:srgbClr val="6E6E6E"/>
+                </a:solidFill>
+                <a:latin typeface="Segoe UI"/>
+              </a:rPr>
+              <a:t>—  View session dashboard</a:t>
+            </a:r>
+          </a:p>
+          <a:p>
+            <a:pPr>
+              <a:spcAft>
+                <a:spcPts val="1000"/>
+              </a:spcAft>
+            </a:pPr>
+            <a:r>
+              <a:rPr sz="1300">
+                <a:solidFill>
+                  <a:srgbClr val="6E6E6E"/>
+                </a:solidFill>
+                <a:latin typeface="Segoe UI"/>
+              </a:rPr>
+              <a:t>—  Message the instructor</a:t>
+            </a:r>
+          </a:p>
+          <a:p>
+            <a:pPr>
+              <a:spcAft>
+                <a:spcPts val="1000"/>
+              </a:spcAft>
+            </a:pPr>
+            <a:r>
+              <a:rPr sz="1300">
+                <a:solidFill>
+                  <a:srgbClr val="6E6E6E"/>
+                </a:solidFill>
+                <a:latin typeface="Segoe UI"/>
+              </a:rPr>
+              <a:t>—  Request &amp; track support</a:t>
             </a:r>
           </a:p>
         </p:txBody>
@@ -4846,7 +5147,7 @@
             <a:avLst/>
           </a:prstGeom>
           <a:solidFill>
-            <a:srgbClr val="0F2A4A"/>
+            <a:srgbClr val="1A1A1A"/>
           </a:solidFill>
           <a:ln>
             <a:noFill/>
@@ -4890,7 +5191,7 @@
             <a:avLst/>
           </a:prstGeom>
           <a:solidFill>
-            <a:srgbClr val="F5A623"/>
+            <a:srgbClr val="C9C9C9"/>
           </a:solidFill>
           <a:ln>
             <a:noFill/>
@@ -4952,11 +5253,11 @@
             <a:r>
               <a:rPr sz="1200" b="1">
                 <a:solidFill>
-                  <a:srgbClr val="9DC2F0"/>
-                </a:solidFill>
-                <a:latin typeface="Segoe UI"/>
-              </a:rPr>
-              <a:t>WHO IT'S FOR</a:t>
+                  <a:srgbClr val="C4C4C4"/>
+                </a:solidFill>
+                <a:latin typeface="Segoe UI"/>
+              </a:rPr>
+              <a:t>MODULES &amp; FEATURES - ADMINISTRATOR</a:t>
             </a:r>
           </a:p>
           <a:p>
@@ -4975,7 +5276,7 @@
                 </a:solidFill>
                 <a:latin typeface="Segoe UI"/>
               </a:rPr>
-              <a:t>Target Users</a:t>
+              <a:t>What It Does for Admins</a:t>
             </a:r>
           </a:p>
         </p:txBody>
@@ -4988,14 +5289,60 @@
         </p:nvSpPr>
         <p:spPr>
           <a:xfrm>
-            <a:off x="502920" y="1828800"/>
-            <a:ext cx="3611880" cy="4023360"/>
+            <a:off x="502920" y="1508760"/>
+            <a:ext cx="3611880" cy="2148840"/>
           </a:xfrm>
           <a:prstGeom prst="rect">
             <a:avLst/>
           </a:prstGeom>
           <a:solidFill>
-            <a:srgbClr val="F2F6FC"/>
+            <a:srgbClr val="F7F7F7"/>
+          </a:solidFill>
+          <a:ln w="12700">
+            <a:solidFill>
+              <a:srgbClr val="C9C9C9"/>
+            </a:solidFill>
+          </a:ln>
+          <a:effectLst/>
+        </p:spPr>
+        <p:style>
+          <a:lnRef idx="1">
+            <a:schemeClr val="accent1"/>
+          </a:lnRef>
+          <a:fillRef idx="3">
+            <a:schemeClr val="accent1"/>
+          </a:fillRef>
+          <a:effectRef idx="2">
+            <a:schemeClr val="accent1"/>
+          </a:effectRef>
+          <a:fontRef idx="minor">
+            <a:schemeClr val="lt1"/>
+          </a:fontRef>
+        </p:style>
+        <p:txBody>
+          <a:bodyPr rtlCol="0" anchor="ctr"/>
+          <a:lstStyle/>
+          <a:p>
+            <a:pPr algn="ctr"/>
+          </a:p>
+        </p:txBody>
+      </p:sp>
+      <p:sp>
+        <p:nvSpPr>
+          <p:cNvPr id="6" name="Rectangle 5"/>
+          <p:cNvSpPr/>
+          <p:nvPr/>
+        </p:nvSpPr>
+        <p:spPr>
+          <a:xfrm>
+            <a:off x="502920" y="1508760"/>
+            <a:ext cx="3611880" cy="64008"/>
+          </a:xfrm>
+          <a:prstGeom prst="rect">
+            <a:avLst/>
+          </a:prstGeom>
+          <a:solidFill>
+            <a:srgbClr val="555555"/>
           </a:solidFill>
           <a:ln>
             <a:noFill/>
@@ -5026,20 +5373,137 @@
       </p:sp>
       <p:sp>
         <p:nvSpPr>
-          <p:cNvPr id="6" name="Rectangle 5"/>
+          <p:cNvPr id="7" name="TextBox 6"/>
+          <p:cNvSpPr txBox="1"/>
+          <p:nvPr/>
+        </p:nvSpPr>
+        <p:spPr>
+          <a:xfrm>
+            <a:off x="704088" y="1691640"/>
+            <a:ext cx="3246120" cy="1828800"/>
+          </a:xfrm>
+          <a:prstGeom prst="rect">
+            <a:avLst/>
+          </a:prstGeom>
+          <a:noFill/>
+        </p:spPr>
+        <p:txBody>
+          <a:bodyPr wrap="square">
+            <a:spAutoFit/>
+          </a:bodyPr>
+          <a:lstStyle/>
+          <a:p>
+            <a:pPr>
+              <a:spcAft>
+                <a:spcPts val="600"/>
+              </a:spcAft>
+            </a:pPr>
+            <a:r>
+              <a:rPr sz="1500" b="1">
+                <a:solidFill>
+                  <a:srgbClr val="1A1A1A"/>
+                </a:solidFill>
+                <a:latin typeface="Segoe UI"/>
+              </a:rPr>
+              <a:t>User &amp; Access Management</a:t>
+            </a:r>
+          </a:p>
+          <a:p>
+            <a:pPr>
+              <a:spcAft>
+                <a:spcPts val="300"/>
+              </a:spcAft>
+            </a:pPr>
+            <a:r>
+              <a:rPr sz="1100">
+                <a:solidFill>
+                  <a:srgbClr val="6E6E6E"/>
+                </a:solidFill>
+                <a:latin typeface="Segoe UI"/>
+              </a:rPr>
+              <a:t>—  Manage admin, instructor &amp; student accounts</a:t>
+            </a:r>
+          </a:p>
+          <a:p>
+            <a:pPr>
+              <a:spcAft>
+                <a:spcPts val="300"/>
+              </a:spcAft>
+            </a:pPr>
+            <a:r>
+              <a:rPr sz="1100">
+                <a:solidFill>
+                  <a:srgbClr val="6E6E6E"/>
+                </a:solidFill>
+                <a:latin typeface="Segoe UI"/>
+              </a:rPr>
+              <a:t>—  Role-based access control</a:t>
+            </a:r>
+          </a:p>
+        </p:txBody>
+      </p:sp>
+      <p:sp>
+        <p:nvSpPr>
+          <p:cNvPr id="8" name="Rectangle 7"/>
           <p:cNvSpPr/>
           <p:nvPr/>
         </p:nvSpPr>
         <p:spPr>
           <a:xfrm>
-            <a:off x="502920" y="1828800"/>
-            <a:ext cx="3611880" cy="822960"/>
+            <a:off x="4343400" y="1508760"/>
+            <a:ext cx="3611880" cy="2148840"/>
           </a:xfrm>
           <a:prstGeom prst="rect">
             <a:avLst/>
           </a:prstGeom>
           <a:solidFill>
-            <a:srgbClr val="0F2A4A"/>
+            <a:srgbClr val="F7F7F7"/>
+          </a:solidFill>
+          <a:ln w="12700">
+            <a:solidFill>
+              <a:srgbClr val="C9C9C9"/>
+            </a:solidFill>
+          </a:ln>
+          <a:effectLst/>
+        </p:spPr>
+        <p:style>
+          <a:lnRef idx="1">
+            <a:schemeClr val="accent1"/>
+          </a:lnRef>
+          <a:fillRef idx="3">
+            <a:schemeClr val="accent1"/>
+          </a:fillRef>
+          <a:effectRef idx="2">
+            <a:schemeClr val="accent1"/>
+          </a:effectRef>
+          <a:fontRef idx="minor">
+            <a:schemeClr val="lt1"/>
+          </a:fontRef>
+        </p:style>
+        <p:txBody>
+          <a:bodyPr rtlCol="0" anchor="ctr"/>
+          <a:lstStyle/>
+          <a:p>
+            <a:pPr algn="ctr"/>
+          </a:p>
+        </p:txBody>
+      </p:sp>
+      <p:sp>
+        <p:nvSpPr>
+          <p:cNvPr id="9" name="Rectangle 8"/>
+          <p:cNvSpPr/>
+          <p:nvPr/>
+        </p:nvSpPr>
+        <p:spPr>
+          <a:xfrm>
+            <a:off x="4343400" y="1508760"/>
+            <a:ext cx="3611880" cy="64008"/>
+          </a:xfrm>
+          <a:prstGeom prst="rect">
+            <a:avLst/>
+          </a:prstGeom>
+          <a:solidFill>
+            <a:srgbClr val="555555"/>
           </a:solidFill>
           <a:ln>
             <a:noFill/>
@@ -5070,14 +5534,14 @@
       </p:sp>
       <p:sp>
         <p:nvSpPr>
-          <p:cNvPr id="7" name="TextBox 6"/>
+          <p:cNvPr id="10" name="TextBox 9"/>
           <p:cNvSpPr txBox="1"/>
           <p:nvPr/>
         </p:nvSpPr>
         <p:spPr>
           <a:xfrm>
-            <a:off x="731520" y="1975104"/>
-            <a:ext cx="3154680" cy="640080"/>
+            <a:off x="4544568" y="1691640"/>
+            <a:ext cx="3246120" cy="1828800"/>
           </a:xfrm>
           <a:prstGeom prst="rect">
             <a:avLst/>
@@ -5085,66 +5549,122 @@
           <a:noFill/>
         </p:spPr>
         <p:txBody>
-          <a:bodyPr wrap="square" anchor="t" lIns="0" rIns="0" tIns="0" bIns="0">
+          <a:bodyPr wrap="square">
             <a:spAutoFit/>
           </a:bodyPr>
           <a:lstStyle/>
           <a:p>
-            <a:pPr algn="l">
-              <a:spcBef>
-                <a:spcPts val="0"/>
-              </a:spcBef>
-              <a:spcAft>
-                <a:spcPts val="100"/>
-              </a:spcAft>
-            </a:pPr>
-            <a:r>
-              <a:rPr sz="1800" b="1">
-                <a:solidFill>
-                  <a:srgbClr val="FFFFFF"/>
-                </a:solidFill>
-                <a:latin typeface="Segoe UI"/>
-              </a:rPr>
-              <a:t>Administrator</a:t>
-            </a:r>
-          </a:p>
-          <a:p>
-            <a:pPr algn="l">
-              <a:spcBef>
-                <a:spcPts val="0"/>
-              </a:spcBef>
-              <a:spcAft>
-                <a:spcPts val="0"/>
-              </a:spcAft>
-            </a:pPr>
-            <a:r>
-              <a:rPr sz="1100" b="0">
-                <a:solidFill>
-                  <a:srgbClr val="B9D0EE"/>
-                </a:solidFill>
-                <a:latin typeface="Segoe UI"/>
-              </a:rPr>
-              <a:t>Manages the whole system</a:t>
-            </a:r>
-          </a:p>
-        </p:txBody>
-      </p:sp>
-      <p:sp>
-        <p:nvSpPr>
-          <p:cNvPr id="8" name="Rectangle 7"/>
+            <a:pPr>
+              <a:spcAft>
+                <a:spcPts val="600"/>
+              </a:spcAft>
+            </a:pPr>
+            <a:r>
+              <a:rPr sz="1500" b="1">
+                <a:solidFill>
+                  <a:srgbClr val="1A1A1A"/>
+                </a:solidFill>
+                <a:latin typeface="Segoe UI"/>
+              </a:rPr>
+              <a:t>Labs &amp; Computers</a:t>
+            </a:r>
+          </a:p>
+          <a:p>
+            <a:pPr>
+              <a:spcAft>
+                <a:spcPts val="300"/>
+              </a:spcAft>
+            </a:pPr>
+            <a:r>
+              <a:rPr sz="1100">
+                <a:solidFill>
+                  <a:srgbClr val="6E6E6E"/>
+                </a:solidFill>
+                <a:latin typeface="Segoe UI"/>
+              </a:rPr>
+              <a:t>—  Register laboratories &amp; computers</a:t>
+            </a:r>
+          </a:p>
+          <a:p>
+            <a:pPr>
+              <a:spcAft>
+                <a:spcPts val="300"/>
+              </a:spcAft>
+            </a:pPr>
+            <a:r>
+              <a:rPr sz="1100">
+                <a:solidFill>
+                  <a:srgbClr val="6E6E6E"/>
+                </a:solidFill>
+                <a:latin typeface="Segoe UI"/>
+              </a:rPr>
+              <a:t>—  Live PC status from one panel</a:t>
+            </a:r>
+          </a:p>
+        </p:txBody>
+      </p:sp>
+      <p:sp>
+        <p:nvSpPr>
+          <p:cNvPr id="11" name="Rectangle 10"/>
           <p:cNvSpPr/>
           <p:nvPr/>
         </p:nvSpPr>
         <p:spPr>
           <a:xfrm>
-            <a:off x="502920" y="2651760"/>
-            <a:ext cx="3611880" cy="54864"/>
+            <a:off x="8183880" y="1508760"/>
+            <a:ext cx="3611880" cy="2148840"/>
           </a:xfrm>
           <a:prstGeom prst="rect">
             <a:avLst/>
           </a:prstGeom>
           <a:solidFill>
-            <a:srgbClr val="2C7BE5"/>
+            <a:srgbClr val="F7F7F7"/>
+          </a:solidFill>
+          <a:ln w="12700">
+            <a:solidFill>
+              <a:srgbClr val="C9C9C9"/>
+            </a:solidFill>
+          </a:ln>
+          <a:effectLst/>
+        </p:spPr>
+        <p:style>
+          <a:lnRef idx="1">
+            <a:schemeClr val="accent1"/>
+          </a:lnRef>
+          <a:fillRef idx="3">
+            <a:schemeClr val="accent1"/>
+          </a:fillRef>
+          <a:effectRef idx="2">
+            <a:schemeClr val="accent1"/>
+          </a:effectRef>
+          <a:fontRef idx="minor">
+            <a:schemeClr val="lt1"/>
+          </a:fontRef>
+        </p:style>
+        <p:txBody>
+          <a:bodyPr rtlCol="0" anchor="ctr"/>
+          <a:lstStyle/>
+          <a:p>
+            <a:pPr algn="ctr"/>
+          </a:p>
+        </p:txBody>
+      </p:sp>
+      <p:sp>
+        <p:nvSpPr>
+          <p:cNvPr id="12" name="Rectangle 11"/>
+          <p:cNvSpPr/>
+          <p:nvPr/>
+        </p:nvSpPr>
+        <p:spPr>
+          <a:xfrm>
+            <a:off x="8183880" y="1508760"/>
+            <a:ext cx="3611880" cy="64008"/>
+          </a:xfrm>
+          <a:prstGeom prst="rect">
+            <a:avLst/>
+          </a:prstGeom>
+          <a:solidFill>
+            <a:srgbClr val="555555"/>
           </a:solidFill>
           <a:ln>
             <a:noFill/>
@@ -5175,14 +5695,14 @@
       </p:sp>
       <p:sp>
         <p:nvSpPr>
-          <p:cNvPr id="9" name="TextBox 8"/>
+          <p:cNvPr id="13" name="TextBox 12"/>
           <p:cNvSpPr txBox="1"/>
           <p:nvPr/>
         </p:nvSpPr>
         <p:spPr>
           <a:xfrm>
-            <a:off x="731520" y="2926080"/>
-            <a:ext cx="3154680" cy="2743200"/>
+            <a:off x="8385048" y="1691640"/>
+            <a:ext cx="3246120" cy="1828800"/>
           </a:xfrm>
           <a:prstGeom prst="rect">
             <a:avLst/>
@@ -5197,69 +5717,115 @@
           <a:p>
             <a:pPr>
               <a:spcAft>
-                <a:spcPts val="1000"/>
-              </a:spcAft>
-            </a:pPr>
-            <a:r>
-              <a:rPr sz="1300">
-                <a:solidFill>
-                  <a:srgbClr val="5B6B7B"/>
-                </a:solidFill>
-                <a:latin typeface="Segoe UI"/>
-              </a:rPr>
-              <a:t>•  Users, labs &amp; computers</a:t>
+                <a:spcPts val="600"/>
+              </a:spcAft>
+            </a:pPr>
+            <a:r>
+              <a:rPr sz="1500" b="1">
+                <a:solidFill>
+                  <a:srgbClr val="1A1A1A"/>
+                </a:solidFill>
+                <a:latin typeface="Segoe UI"/>
+              </a:rPr>
+              <a:t>Schedule Management</a:t>
             </a:r>
           </a:p>
           <a:p>
             <a:pPr>
               <a:spcAft>
-                <a:spcPts val="1000"/>
-              </a:spcAft>
-            </a:pPr>
-            <a:r>
-              <a:rPr sz="1300">
-                <a:solidFill>
-                  <a:srgbClr val="5B6B7B"/>
-                </a:solidFill>
-                <a:latin typeface="Segoe UI"/>
-              </a:rPr>
-              <a:t>•  Network &amp; security control</a:t>
+                <a:spcPts val="300"/>
+              </a:spcAft>
+            </a:pPr>
+            <a:r>
+              <a:rPr sz="1100">
+                <a:solidFill>
+                  <a:srgbClr val="6E6E6E"/>
+                </a:solidFill>
+                <a:latin typeface="Segoe UI"/>
+              </a:rPr>
+              <a:t>—  Assign labs, classes &amp; time slots</a:t>
             </a:r>
           </a:p>
           <a:p>
             <a:pPr>
               <a:spcAft>
-                <a:spcPts val="1000"/>
-              </a:spcAft>
-            </a:pPr>
-            <a:r>
-              <a:rPr sz="1300">
-                <a:solidFill>
-                  <a:srgbClr val="5B6B7B"/>
-                </a:solidFill>
-                <a:latin typeface="Segoe UI"/>
-              </a:rPr>
-              <a:t>•  Reports, logs &amp; inventory</a:t>
-            </a:r>
-          </a:p>
-        </p:txBody>
-      </p:sp>
-      <p:sp>
-        <p:nvSpPr>
-          <p:cNvPr id="10" name="Rectangle 9"/>
+                <a:spcPts val="300"/>
+              </a:spcAft>
+            </a:pPr>
+            <a:r>
+              <a:rPr sz="1100">
+                <a:solidFill>
+                  <a:srgbClr val="6E6E6E"/>
+                </a:solidFill>
+                <a:latin typeface="Segoe UI"/>
+              </a:rPr>
+              <a:t>—  Avoid booking conflicts</a:t>
+            </a:r>
+          </a:p>
+        </p:txBody>
+      </p:sp>
+      <p:sp>
+        <p:nvSpPr>
+          <p:cNvPr id="14" name="Rectangle 13"/>
           <p:cNvSpPr/>
           <p:nvPr/>
         </p:nvSpPr>
         <p:spPr>
           <a:xfrm>
-            <a:off x="4343400" y="1828800"/>
-            <a:ext cx="3611880" cy="4023360"/>
+            <a:off x="502920" y="3886200"/>
+            <a:ext cx="3611880" cy="2148840"/>
           </a:xfrm>
           <a:prstGeom prst="rect">
             <a:avLst/>
           </a:prstGeom>
           <a:solidFill>
-            <a:srgbClr val="F2F6FC"/>
+            <a:srgbClr val="F7F7F7"/>
+          </a:solidFill>
+          <a:ln w="12700">
+            <a:solidFill>
+              <a:srgbClr val="C9C9C9"/>
+            </a:solidFill>
+          </a:ln>
+          <a:effectLst/>
+        </p:spPr>
+        <p:style>
+          <a:lnRef idx="1">
+            <a:schemeClr val="accent1"/>
+          </a:lnRef>
+          <a:fillRef idx="3">
+            <a:schemeClr val="accent1"/>
+          </a:fillRef>
+          <a:effectRef idx="2">
+            <a:schemeClr val="accent1"/>
+          </a:effectRef>
+          <a:fontRef idx="minor">
+            <a:schemeClr val="lt1"/>
+          </a:fontRef>
+        </p:style>
+        <p:txBody>
+          <a:bodyPr rtlCol="0" anchor="ctr"/>
+          <a:lstStyle/>
+          <a:p>
+            <a:pPr algn="ctr"/>
+          </a:p>
+        </p:txBody>
+      </p:sp>
+      <p:sp>
+        <p:nvSpPr>
+          <p:cNvPr id="15" name="Rectangle 14"/>
+          <p:cNvSpPr/>
+          <p:nvPr/>
+        </p:nvSpPr>
+        <p:spPr>
+          <a:xfrm>
+            <a:off x="502920" y="3886200"/>
+            <a:ext cx="3611880" cy="64008"/>
+          </a:xfrm>
+          <a:prstGeom prst="rect">
+            <a:avLst/>
+          </a:prstGeom>
+          <a:solidFill>
+            <a:srgbClr val="555555"/>
           </a:solidFill>
           <a:ln>
             <a:noFill/>
@@ -5290,20 +5856,137 @@
       </p:sp>
       <p:sp>
         <p:nvSpPr>
-          <p:cNvPr id="11" name="Rectangle 10"/>
+          <p:cNvPr id="16" name="TextBox 15"/>
+          <p:cNvSpPr txBox="1"/>
+          <p:nvPr/>
+        </p:nvSpPr>
+        <p:spPr>
+          <a:xfrm>
+            <a:off x="704088" y="4069080"/>
+            <a:ext cx="3246120" cy="1828800"/>
+          </a:xfrm>
+          <a:prstGeom prst="rect">
+            <a:avLst/>
+          </a:prstGeom>
+          <a:noFill/>
+        </p:spPr>
+        <p:txBody>
+          <a:bodyPr wrap="square">
+            <a:spAutoFit/>
+          </a:bodyPr>
+          <a:lstStyle/>
+          <a:p>
+            <a:pPr>
+              <a:spcAft>
+                <a:spcPts val="600"/>
+              </a:spcAft>
+            </a:pPr>
+            <a:r>
+              <a:rPr sz="1500" b="1">
+                <a:solidFill>
+                  <a:srgbClr val="1A1A1A"/>
+                </a:solidFill>
+                <a:latin typeface="Segoe UI"/>
+              </a:rPr>
+              <a:t>Network &amp; Security</a:t>
+            </a:r>
+          </a:p>
+          <a:p>
+            <a:pPr>
+              <a:spcAft>
+                <a:spcPts val="300"/>
+              </a:spcAft>
+            </a:pPr>
+            <a:r>
+              <a:rPr sz="1100">
+                <a:solidFill>
+                  <a:srgbClr val="6E6E6E"/>
+                </a:solidFill>
+                <a:latin typeface="Segoe UI"/>
+              </a:rPr>
+              <a:t>—  Scan the network &amp; block websites</a:t>
+            </a:r>
+          </a:p>
+          <a:p>
+            <a:pPr>
+              <a:spcAft>
+                <a:spcPts val="300"/>
+              </a:spcAft>
+            </a:pPr>
+            <a:r>
+              <a:rPr sz="1100">
+                <a:solidFill>
+                  <a:srgbClr val="6E6E6E"/>
+                </a:solidFill>
+                <a:latin typeface="Segoe UI"/>
+              </a:rPr>
+              <a:t>—  Security settings &amp; policies</a:t>
+            </a:r>
+          </a:p>
+        </p:txBody>
+      </p:sp>
+      <p:sp>
+        <p:nvSpPr>
+          <p:cNvPr id="17" name="Rectangle 16"/>
           <p:cNvSpPr/>
           <p:nvPr/>
         </p:nvSpPr>
         <p:spPr>
           <a:xfrm>
-            <a:off x="4343400" y="1828800"/>
-            <a:ext cx="3611880" cy="822960"/>
+            <a:off x="4343400" y="3886200"/>
+            <a:ext cx="3611880" cy="2148840"/>
           </a:xfrm>
           <a:prstGeom prst="rect">
             <a:avLst/>
           </a:prstGeom>
           <a:solidFill>
-            <a:srgbClr val="0F2A4A"/>
+            <a:srgbClr val="F7F7F7"/>
+          </a:solidFill>
+          <a:ln w="12700">
+            <a:solidFill>
+              <a:srgbClr val="C9C9C9"/>
+            </a:solidFill>
+          </a:ln>
+          <a:effectLst/>
+        </p:spPr>
+        <p:style>
+          <a:lnRef idx="1">
+            <a:schemeClr val="accent1"/>
+          </a:lnRef>
+          <a:fillRef idx="3">
+            <a:schemeClr val="accent1"/>
+          </a:fillRef>
+          <a:effectRef idx="2">
+            <a:schemeClr val="accent1"/>
+          </a:effectRef>
+          <a:fontRef idx="minor">
+            <a:schemeClr val="lt1"/>
+          </a:fontRef>
+        </p:style>
+        <p:txBody>
+          <a:bodyPr rtlCol="0" anchor="ctr"/>
+          <a:lstStyle/>
+          <a:p>
+            <a:pPr algn="ctr"/>
+          </a:p>
+        </p:txBody>
+      </p:sp>
+      <p:sp>
+        <p:nvSpPr>
+          <p:cNvPr id="18" name="Rectangle 17"/>
+          <p:cNvSpPr/>
+          <p:nvPr/>
+        </p:nvSpPr>
+        <p:spPr>
+          <a:xfrm>
+            <a:off x="4343400" y="3886200"/>
+            <a:ext cx="3611880" cy="64008"/>
+          </a:xfrm>
+          <a:prstGeom prst="rect">
+            <a:avLst/>
+          </a:prstGeom>
+          <a:solidFill>
+            <a:srgbClr val="555555"/>
           </a:solidFill>
           <a:ln>
             <a:noFill/>
@@ -5334,14 +6017,14 @@
       </p:sp>
       <p:sp>
         <p:nvSpPr>
-          <p:cNvPr id="12" name="TextBox 11"/>
+          <p:cNvPr id="19" name="TextBox 18"/>
           <p:cNvSpPr txBox="1"/>
           <p:nvPr/>
         </p:nvSpPr>
         <p:spPr>
           <a:xfrm>
-            <a:off x="4572000" y="1975104"/>
-            <a:ext cx="3154680" cy="640080"/>
+            <a:off x="4544568" y="4069080"/>
+            <a:ext cx="3246120" cy="1828800"/>
           </a:xfrm>
           <a:prstGeom prst="rect">
             <a:avLst/>
@@ -5349,66 +6032,122 @@
           <a:noFill/>
         </p:spPr>
         <p:txBody>
-          <a:bodyPr wrap="square" anchor="t" lIns="0" rIns="0" tIns="0" bIns="0">
+          <a:bodyPr wrap="square">
             <a:spAutoFit/>
           </a:bodyPr>
           <a:lstStyle/>
           <a:p>
-            <a:pPr algn="l">
-              <a:spcBef>
-                <a:spcPts val="0"/>
-              </a:spcBef>
-              <a:spcAft>
-                <a:spcPts val="100"/>
-              </a:spcAft>
-            </a:pPr>
-            <a:r>
-              <a:rPr sz="1800" b="1">
-                <a:solidFill>
-                  <a:srgbClr val="FFFFFF"/>
-                </a:solidFill>
-                <a:latin typeface="Segoe UI"/>
-              </a:rPr>
-              <a:t>Instructor</a:t>
-            </a:r>
-          </a:p>
-          <a:p>
-            <a:pPr algn="l">
-              <a:spcBef>
-                <a:spcPts val="0"/>
-              </a:spcBef>
-              <a:spcAft>
-                <a:spcPts val="0"/>
-              </a:spcAft>
-            </a:pPr>
-            <a:r>
-              <a:rPr sz="1100" b="0">
-                <a:solidFill>
-                  <a:srgbClr val="B9D0EE"/>
-                </a:solidFill>
-                <a:latin typeface="Segoe UI"/>
-              </a:rPr>
-              <a:t>Runs the classroom</a:t>
-            </a:r>
-          </a:p>
-        </p:txBody>
-      </p:sp>
-      <p:sp>
-        <p:nvSpPr>
-          <p:cNvPr id="13" name="Rectangle 12"/>
+            <a:pPr>
+              <a:spcAft>
+                <a:spcPts val="600"/>
+              </a:spcAft>
+            </a:pPr>
+            <a:r>
+              <a:rPr sz="1500" b="1">
+                <a:solidFill>
+                  <a:srgbClr val="1A1A1A"/>
+                </a:solidFill>
+                <a:latin typeface="Segoe UI"/>
+              </a:rPr>
+              <a:t>Monitoring &amp; Control</a:t>
+            </a:r>
+          </a:p>
+          <a:p>
+            <a:pPr>
+              <a:spcAft>
+                <a:spcPts val="300"/>
+              </a:spcAft>
+            </a:pPr>
+            <a:r>
+              <a:rPr sz="1100">
+                <a:solidFill>
+                  <a:srgbClr val="6E6E6E"/>
+                </a:solidFill>
+                <a:latin typeface="Segoe UI"/>
+              </a:rPr>
+              <a:t>—  Lock, shut down or project any PC</a:t>
+            </a:r>
+          </a:p>
+          <a:p>
+            <a:pPr>
+              <a:spcAft>
+                <a:spcPts val="300"/>
+              </a:spcAft>
+            </a:pPr>
+            <a:r>
+              <a:rPr sz="1100">
+                <a:solidFill>
+                  <a:srgbClr val="6E6E6E"/>
+                </a:solidFill>
+                <a:latin typeface="Segoe UI"/>
+              </a:rPr>
+              <a:t>—  Keep the lab in sync in real time</a:t>
+            </a:r>
+          </a:p>
+        </p:txBody>
+      </p:sp>
+      <p:sp>
+        <p:nvSpPr>
+          <p:cNvPr id="20" name="Rectangle 19"/>
           <p:cNvSpPr/>
           <p:nvPr/>
         </p:nvSpPr>
         <p:spPr>
           <a:xfrm>
-            <a:off x="4343400" y="2651760"/>
-            <a:ext cx="3611880" cy="54864"/>
+            <a:off x="8183880" y="3886200"/>
+            <a:ext cx="3611880" cy="2148840"/>
           </a:xfrm>
           <a:prstGeom prst="rect">
             <a:avLst/>
           </a:prstGeom>
           <a:solidFill>
-            <a:srgbClr val="F5A623"/>
+            <a:srgbClr val="F7F7F7"/>
+          </a:solidFill>
+          <a:ln w="12700">
+            <a:solidFill>
+              <a:srgbClr val="C9C9C9"/>
+            </a:solidFill>
+          </a:ln>
+          <a:effectLst/>
+        </p:spPr>
+        <p:style>
+          <a:lnRef idx="1">
+            <a:schemeClr val="accent1"/>
+          </a:lnRef>
+          <a:fillRef idx="3">
+            <a:schemeClr val="accent1"/>
+          </a:fillRef>
+          <a:effectRef idx="2">
+            <a:schemeClr val="accent1"/>
+          </a:effectRef>
+          <a:fontRef idx="minor">
+            <a:schemeClr val="lt1"/>
+          </a:fontRef>
+        </p:style>
+        <p:txBody>
+          <a:bodyPr rtlCol="0" anchor="ctr"/>
+          <a:lstStyle/>
+          <a:p>
+            <a:pPr algn="ctr"/>
+          </a:p>
+        </p:txBody>
+      </p:sp>
+      <p:sp>
+        <p:nvSpPr>
+          <p:cNvPr id="21" name="Rectangle 20"/>
+          <p:cNvSpPr/>
+          <p:nvPr/>
+        </p:nvSpPr>
+        <p:spPr>
+          <a:xfrm>
+            <a:off x="8183880" y="3886200"/>
+            <a:ext cx="3611880" cy="64008"/>
+          </a:xfrm>
+          <a:prstGeom prst="rect">
+            <a:avLst/>
+          </a:prstGeom>
+          <a:solidFill>
+            <a:srgbClr val="555555"/>
           </a:solidFill>
           <a:ln>
             <a:noFill/>
@@ -5439,14 +6178,14 @@
       </p:sp>
       <p:sp>
         <p:nvSpPr>
-          <p:cNvPr id="14" name="TextBox 13"/>
+          <p:cNvPr id="22" name="TextBox 21"/>
           <p:cNvSpPr txBox="1"/>
           <p:nvPr/>
         </p:nvSpPr>
         <p:spPr>
           <a:xfrm>
-            <a:off x="4572000" y="2926080"/>
-            <a:ext cx="3154680" cy="2743200"/>
+            <a:off x="8385048" y="4069080"/>
+            <a:ext cx="3246120" cy="1828800"/>
           </a:xfrm>
           <a:prstGeom prst="rect">
             <a:avLst/>
@@ -5461,313 +6200,49 @@
           <a:p>
             <a:pPr>
               <a:spcAft>
-                <a:spcPts val="1000"/>
-              </a:spcAft>
-            </a:pPr>
-            <a:r>
-              <a:rPr sz="1300">
-                <a:solidFill>
-                  <a:srgbClr val="5B6B7B"/>
-                </a:solidFill>
-                <a:latin typeface="Segoe UI"/>
-              </a:rPr>
-              <a:t>•  Monitor student screens</a:t>
+                <a:spcPts val="600"/>
+              </a:spcAft>
+            </a:pPr>
+            <a:r>
+              <a:rPr sz="1500" b="1">
+                <a:solidFill>
+                  <a:srgbClr val="1A1A1A"/>
+                </a:solidFill>
+                <a:latin typeface="Segoe UI"/>
+              </a:rPr>
+              <a:t>Logs, Reports &amp; Inventory</a:t>
             </a:r>
           </a:p>
           <a:p>
             <a:pPr>
               <a:spcAft>
-                <a:spcPts val="1000"/>
-              </a:spcAft>
-            </a:pPr>
-            <a:r>
-              <a:rPr sz="1300">
-                <a:solidFill>
-                  <a:srgbClr val="5B6B7B"/>
-                </a:solidFill>
-                <a:latin typeface="Segoe UI"/>
-              </a:rPr>
-              <a:t>•  Lock / project / control PCs</a:t>
+                <a:spcPts val="300"/>
+              </a:spcAft>
+            </a:pPr>
+            <a:r>
+              <a:rPr sz="1100">
+                <a:solidFill>
+                  <a:srgbClr val="6E6E6E"/>
+                </a:solidFill>
+                <a:latin typeface="Segoe UI"/>
+              </a:rPr>
+              <a:t>—  Usage reports &amp; full audit trail</a:t>
             </a:r>
           </a:p>
           <a:p>
             <a:pPr>
               <a:spcAft>
-                <a:spcPts val="1000"/>
-              </a:spcAft>
-            </a:pPr>
-            <a:r>
-              <a:rPr sz="1300">
-                <a:solidFill>
-                  <a:srgbClr val="5B6B7B"/>
-                </a:solidFill>
-                <a:latin typeface="Segoe UI"/>
-              </a:rPr>
-              <a:t>•  Grade students &amp; approve tickets</a:t>
-            </a:r>
-          </a:p>
-        </p:txBody>
-      </p:sp>
-      <p:sp>
-        <p:nvSpPr>
-          <p:cNvPr id="15" name="Rectangle 14"/>
-          <p:cNvSpPr/>
-          <p:nvPr/>
-        </p:nvSpPr>
-        <p:spPr>
-          <a:xfrm>
-            <a:off x="8183880" y="1828800"/>
-            <a:ext cx="3611880" cy="4023360"/>
-          </a:xfrm>
-          <a:prstGeom prst="rect">
-            <a:avLst/>
-          </a:prstGeom>
-          <a:solidFill>
-            <a:srgbClr val="F2F6FC"/>
-          </a:solidFill>
-          <a:ln>
-            <a:noFill/>
-          </a:ln>
-          <a:effectLst/>
-        </p:spPr>
-        <p:style>
-          <a:lnRef idx="1">
-            <a:schemeClr val="accent1"/>
-          </a:lnRef>
-          <a:fillRef idx="3">
-            <a:schemeClr val="accent1"/>
-          </a:fillRef>
-          <a:effectRef idx="2">
-            <a:schemeClr val="accent1"/>
-          </a:effectRef>
-          <a:fontRef idx="minor">
-            <a:schemeClr val="lt1"/>
-          </a:fontRef>
-        </p:style>
-        <p:txBody>
-          <a:bodyPr rtlCol="0" anchor="ctr"/>
-          <a:lstStyle/>
-          <a:p>
-            <a:pPr algn="ctr"/>
-          </a:p>
-        </p:txBody>
-      </p:sp>
-      <p:sp>
-        <p:nvSpPr>
-          <p:cNvPr id="16" name="Rectangle 15"/>
-          <p:cNvSpPr/>
-          <p:nvPr/>
-        </p:nvSpPr>
-        <p:spPr>
-          <a:xfrm>
-            <a:off x="8183880" y="1828800"/>
-            <a:ext cx="3611880" cy="822960"/>
-          </a:xfrm>
-          <a:prstGeom prst="rect">
-            <a:avLst/>
-          </a:prstGeom>
-          <a:solidFill>
-            <a:srgbClr val="0F2A4A"/>
-          </a:solidFill>
-          <a:ln>
-            <a:noFill/>
-          </a:ln>
-          <a:effectLst/>
-        </p:spPr>
-        <p:style>
-          <a:lnRef idx="1">
-            <a:schemeClr val="accent1"/>
-          </a:lnRef>
-          <a:fillRef idx="3">
-            <a:schemeClr val="accent1"/>
-          </a:fillRef>
-          <a:effectRef idx="2">
-            <a:schemeClr val="accent1"/>
-          </a:effectRef>
-          <a:fontRef idx="minor">
-            <a:schemeClr val="lt1"/>
-          </a:fontRef>
-        </p:style>
-        <p:txBody>
-          <a:bodyPr rtlCol="0" anchor="ctr"/>
-          <a:lstStyle/>
-          <a:p>
-            <a:pPr algn="ctr"/>
-          </a:p>
-        </p:txBody>
-      </p:sp>
-      <p:sp>
-        <p:nvSpPr>
-          <p:cNvPr id="17" name="TextBox 16"/>
-          <p:cNvSpPr txBox="1"/>
-          <p:nvPr/>
-        </p:nvSpPr>
-        <p:spPr>
-          <a:xfrm>
-            <a:off x="8412480" y="1975104"/>
-            <a:ext cx="3154680" cy="640080"/>
-          </a:xfrm>
-          <a:prstGeom prst="rect">
-            <a:avLst/>
-          </a:prstGeom>
-          <a:noFill/>
-        </p:spPr>
-        <p:txBody>
-          <a:bodyPr wrap="square" anchor="t" lIns="0" rIns="0" tIns="0" bIns="0">
-            <a:spAutoFit/>
-          </a:bodyPr>
-          <a:lstStyle/>
-          <a:p>
-            <a:pPr algn="l">
-              <a:spcBef>
-                <a:spcPts val="0"/>
-              </a:spcBef>
-              <a:spcAft>
-                <a:spcPts val="100"/>
-              </a:spcAft>
-            </a:pPr>
-            <a:r>
-              <a:rPr sz="1800" b="1">
-                <a:solidFill>
-                  <a:srgbClr val="FFFFFF"/>
-                </a:solidFill>
-                <a:latin typeface="Segoe UI"/>
-              </a:rPr>
-              <a:t>Student</a:t>
-            </a:r>
-          </a:p>
-          <a:p>
-            <a:pPr algn="l">
-              <a:spcBef>
-                <a:spcPts val="0"/>
-              </a:spcBef>
-              <a:spcAft>
-                <a:spcPts val="0"/>
-              </a:spcAft>
-            </a:pPr>
-            <a:r>
-              <a:rPr sz="1100" b="0">
-                <a:solidFill>
-                  <a:srgbClr val="B9D0EE"/>
-                </a:solidFill>
-                <a:latin typeface="Segoe UI"/>
-              </a:rPr>
-              <a:t>Uses the lab</a:t>
-            </a:r>
-          </a:p>
-        </p:txBody>
-      </p:sp>
-      <p:sp>
-        <p:nvSpPr>
-          <p:cNvPr id="18" name="Rectangle 17"/>
-          <p:cNvSpPr/>
-          <p:nvPr/>
-        </p:nvSpPr>
-        <p:spPr>
-          <a:xfrm>
-            <a:off x="8183880" y="2651760"/>
-            <a:ext cx="3611880" cy="54864"/>
-          </a:xfrm>
-          <a:prstGeom prst="rect">
-            <a:avLst/>
-          </a:prstGeom>
-          <a:solidFill>
-            <a:srgbClr val="2C7BE5"/>
-          </a:solidFill>
-          <a:ln>
-            <a:noFill/>
-          </a:ln>
-          <a:effectLst/>
-        </p:spPr>
-        <p:style>
-          <a:lnRef idx="1">
-            <a:schemeClr val="accent1"/>
-          </a:lnRef>
-          <a:fillRef idx="3">
-            <a:schemeClr val="accent1"/>
-          </a:fillRef>
-          <a:effectRef idx="2">
-            <a:schemeClr val="accent1"/>
-          </a:effectRef>
-          <a:fontRef idx="minor">
-            <a:schemeClr val="lt1"/>
-          </a:fontRef>
-        </p:style>
-        <p:txBody>
-          <a:bodyPr rtlCol="0" anchor="ctr"/>
-          <a:lstStyle/>
-          <a:p>
-            <a:pPr algn="ctr"/>
-          </a:p>
-        </p:txBody>
-      </p:sp>
-      <p:sp>
-        <p:nvSpPr>
-          <p:cNvPr id="19" name="TextBox 18"/>
-          <p:cNvSpPr txBox="1"/>
-          <p:nvPr/>
-        </p:nvSpPr>
-        <p:spPr>
-          <a:xfrm>
-            <a:off x="8412480" y="2926080"/>
-            <a:ext cx="3154680" cy="2743200"/>
-          </a:xfrm>
-          <a:prstGeom prst="rect">
-            <a:avLst/>
-          </a:prstGeom>
-          <a:noFill/>
-        </p:spPr>
-        <p:txBody>
-          <a:bodyPr wrap="square">
-            <a:spAutoFit/>
-          </a:bodyPr>
-          <a:lstStyle/>
-          <a:p>
-            <a:pPr>
-              <a:spcAft>
-                <a:spcPts val="1000"/>
-              </a:spcAft>
-            </a:pPr>
-            <a:r>
-              <a:rPr sz="1300">
-                <a:solidFill>
-                  <a:srgbClr val="5B6B7B"/>
-                </a:solidFill>
-                <a:latin typeface="Segoe UI"/>
-              </a:rPr>
-              <a:t>•  View session dashboard</a:t>
-            </a:r>
-          </a:p>
-          <a:p>
-            <a:pPr>
-              <a:spcAft>
-                <a:spcPts val="1000"/>
-              </a:spcAft>
-            </a:pPr>
-            <a:r>
-              <a:rPr sz="1300">
-                <a:solidFill>
-                  <a:srgbClr val="5B6B7B"/>
-                </a:solidFill>
-                <a:latin typeface="Segoe UI"/>
-              </a:rPr>
-              <a:t>•  Message &amp; request support</a:t>
-            </a:r>
-          </a:p>
-          <a:p>
-            <a:pPr>
-              <a:spcAft>
-                <a:spcPts val="1000"/>
-              </a:spcAft>
-            </a:pPr>
-            <a:r>
-              <a:rPr sz="1300">
-                <a:solidFill>
-                  <a:srgbClr val="5B6B7B"/>
-                </a:solidFill>
-                <a:latin typeface="Segoe UI"/>
-              </a:rPr>
-              <a:t>•  Check personal grades</a:t>
+                <a:spcPts val="300"/>
+              </a:spcAft>
+            </a:pPr>
+            <a:r>
+              <a:rPr sz="1100">
+                <a:solidFill>
+                  <a:srgbClr val="6E6E6E"/>
+                </a:solidFill>
+                <a:latin typeface="Segoe UI"/>
+              </a:rPr>
+              <a:t>—  Hardware inventory &amp; support tickets</a:t>
             </a:r>
           </a:p>
         </p:txBody>
@@ -5805,7 +6280,7 @@
             <a:avLst/>
           </a:prstGeom>
           <a:solidFill>
-            <a:srgbClr val="0F2A4A"/>
+            <a:srgbClr val="1A1A1A"/>
           </a:solidFill>
           <a:ln>
             <a:noFill/>
@@ -5849,7 +6324,7 @@
             <a:avLst/>
           </a:prstGeom>
           <a:solidFill>
-            <a:srgbClr val="F5A623"/>
+            <a:srgbClr val="C9C9C9"/>
           </a:solidFill>
           <a:ln>
             <a:noFill/>
@@ -5911,11 +6386,11 @@
             <a:r>
               <a:rPr sz="1200" b="1">
                 <a:solidFill>
-                  <a:srgbClr val="9DC2F0"/>
-                </a:solidFill>
-                <a:latin typeface="Segoe UI"/>
-              </a:rPr>
-              <a:t>MODULES &amp; FEATURES — ADMINISTRATOR</a:t>
+                  <a:srgbClr val="C4C4C4"/>
+                </a:solidFill>
+                <a:latin typeface="Segoe UI"/>
+              </a:rPr>
+              <a:t>MODULES &amp; FEATURES - INSTRUCTOR</a:t>
             </a:r>
           </a:p>
           <a:p>
@@ -5934,7 +6409,7 @@
                 </a:solidFill>
                 <a:latin typeface="Segoe UI"/>
               </a:rPr>
-              <a:t>What It Does for Admins</a:t>
+              <a:t>What It Does for Instructors</a:t>
             </a:r>
           </a:p>
         </p:txBody>
@@ -5954,7 +6429,53 @@
             <a:avLst/>
           </a:prstGeom>
           <a:solidFill>
-            <a:srgbClr val="F2F6FC"/>
+            <a:srgbClr val="F7F7F7"/>
+          </a:solidFill>
+          <a:ln w="12700">
+            <a:solidFill>
+              <a:srgbClr val="C9C9C9"/>
+            </a:solidFill>
+          </a:ln>
+          <a:effectLst/>
+        </p:spPr>
+        <p:style>
+          <a:lnRef idx="1">
+            <a:schemeClr val="accent1"/>
+          </a:lnRef>
+          <a:fillRef idx="3">
+            <a:schemeClr val="accent1"/>
+          </a:fillRef>
+          <a:effectRef idx="2">
+            <a:schemeClr val="accent1"/>
+          </a:effectRef>
+          <a:fontRef idx="minor">
+            <a:schemeClr val="lt1"/>
+          </a:fontRef>
+        </p:style>
+        <p:txBody>
+          <a:bodyPr rtlCol="0" anchor="ctr"/>
+          <a:lstStyle/>
+          <a:p>
+            <a:pPr algn="ctr"/>
+          </a:p>
+        </p:txBody>
+      </p:sp>
+      <p:sp>
+        <p:nvSpPr>
+          <p:cNvPr id="6" name="Rectangle 5"/>
+          <p:cNvSpPr/>
+          <p:nvPr/>
+        </p:nvSpPr>
+        <p:spPr>
+          <a:xfrm>
+            <a:off x="502920" y="1508760"/>
+            <a:ext cx="3611880" cy="64008"/>
+          </a:xfrm>
+          <a:prstGeom prst="rect">
+            <a:avLst/>
+          </a:prstGeom>
+          <a:solidFill>
+            <a:srgbClr val="333333"/>
           </a:solidFill>
           <a:ln>
             <a:noFill/>
@@ -5985,20 +6506,137 @@
       </p:sp>
       <p:sp>
         <p:nvSpPr>
-          <p:cNvPr id="6" name="Rectangle 5"/>
+          <p:cNvPr id="7" name="TextBox 6"/>
+          <p:cNvSpPr txBox="1"/>
+          <p:nvPr/>
+        </p:nvSpPr>
+        <p:spPr>
+          <a:xfrm>
+            <a:off x="704088" y="1691640"/>
+            <a:ext cx="3246120" cy="1828800"/>
+          </a:xfrm>
+          <a:prstGeom prst="rect">
+            <a:avLst/>
+          </a:prstGeom>
+          <a:noFill/>
+        </p:spPr>
+        <p:txBody>
+          <a:bodyPr wrap="square">
+            <a:spAutoFit/>
+          </a:bodyPr>
+          <a:lstStyle/>
+          <a:p>
+            <a:pPr>
+              <a:spcAft>
+                <a:spcPts val="600"/>
+              </a:spcAft>
+            </a:pPr>
+            <a:r>
+              <a:rPr sz="1500" b="1">
+                <a:solidFill>
+                  <a:srgbClr val="1A1A1A"/>
+                </a:solidFill>
+                <a:latin typeface="Segoe UI"/>
+              </a:rPr>
+              <a:t>Classroom Dashboard</a:t>
+            </a:r>
+          </a:p>
+          <a:p>
+            <a:pPr>
+              <a:spcAft>
+                <a:spcPts val="300"/>
+              </a:spcAft>
+            </a:pPr>
+            <a:r>
+              <a:rPr sz="1100">
+                <a:solidFill>
+                  <a:srgbClr val="6E6E6E"/>
+                </a:solidFill>
+                <a:latin typeface="Segoe UI"/>
+              </a:rPr>
+              <a:t>—  See the whole class at a glance</a:t>
+            </a:r>
+          </a:p>
+          <a:p>
+            <a:pPr>
+              <a:spcAft>
+                <a:spcPts val="300"/>
+              </a:spcAft>
+            </a:pPr>
+            <a:r>
+              <a:rPr sz="1100">
+                <a:solidFill>
+                  <a:srgbClr val="6E6E6E"/>
+                </a:solidFill>
+                <a:latin typeface="Segoe UI"/>
+              </a:rPr>
+              <a:t>—  Live student status</a:t>
+            </a:r>
+          </a:p>
+        </p:txBody>
+      </p:sp>
+      <p:sp>
+        <p:nvSpPr>
+          <p:cNvPr id="8" name="Rectangle 7"/>
           <p:cNvSpPr/>
           <p:nvPr/>
         </p:nvSpPr>
         <p:spPr>
           <a:xfrm>
-            <a:off x="502920" y="1508760"/>
+            <a:off x="4343400" y="1508760"/>
+            <a:ext cx="3611880" cy="2148840"/>
+          </a:xfrm>
+          <a:prstGeom prst="rect">
+            <a:avLst/>
+          </a:prstGeom>
+          <a:solidFill>
+            <a:srgbClr val="F7F7F7"/>
+          </a:solidFill>
+          <a:ln w="12700">
+            <a:solidFill>
+              <a:srgbClr val="C9C9C9"/>
+            </a:solidFill>
+          </a:ln>
+          <a:effectLst/>
+        </p:spPr>
+        <p:style>
+          <a:lnRef idx="1">
+            <a:schemeClr val="accent1"/>
+          </a:lnRef>
+          <a:fillRef idx="3">
+            <a:schemeClr val="accent1"/>
+          </a:fillRef>
+          <a:effectRef idx="2">
+            <a:schemeClr val="accent1"/>
+          </a:effectRef>
+          <a:fontRef idx="minor">
+            <a:schemeClr val="lt1"/>
+          </a:fontRef>
+        </p:style>
+        <p:txBody>
+          <a:bodyPr rtlCol="0" anchor="ctr"/>
+          <a:lstStyle/>
+          <a:p>
+            <a:pPr algn="ctr"/>
+          </a:p>
+        </p:txBody>
+      </p:sp>
+      <p:sp>
+        <p:nvSpPr>
+          <p:cNvPr id="9" name="Rectangle 8"/>
+          <p:cNvSpPr/>
+          <p:nvPr/>
+        </p:nvSpPr>
+        <p:spPr>
+          <a:xfrm>
+            <a:off x="4343400" y="1508760"/>
             <a:ext cx="3611880" cy="64008"/>
           </a:xfrm>
           <a:prstGeom prst="rect">
             <a:avLst/>
           </a:prstGeom>
           <a:solidFill>
-            <a:srgbClr val="2C7BE5"/>
+            <a:srgbClr val="333333"/>
           </a:solidFill>
           <a:ln>
             <a:noFill/>
@@ -6029,13 +6667,13 @@
       </p:sp>
       <p:sp>
         <p:nvSpPr>
-          <p:cNvPr id="7" name="TextBox 6"/>
+          <p:cNvPr id="10" name="TextBox 9"/>
           <p:cNvSpPr txBox="1"/>
           <p:nvPr/>
         </p:nvSpPr>
         <p:spPr>
           <a:xfrm>
-            <a:off x="704088" y="1691640"/>
+            <a:off x="4544568" y="1691640"/>
             <a:ext cx="3246120" cy="1828800"/>
           </a:xfrm>
           <a:prstGeom prst="rect">
@@ -6057,11 +6695,11 @@
             <a:r>
               <a:rPr sz="1500" b="1">
                 <a:solidFill>
-                  <a:srgbClr val="0F2A4A"/>
-                </a:solidFill>
-                <a:latin typeface="Segoe UI"/>
-              </a:rPr>
-              <a:t>User &amp; Access Management</a:t>
+                  <a:srgbClr val="1A1A1A"/>
+                </a:solidFill>
+                <a:latin typeface="Segoe UI"/>
+              </a:rPr>
+              <a:t>Student Screen Monitoring</a:t>
             </a:r>
           </a:p>
           <a:p>
@@ -6073,11 +6711,11 @@
             <a:r>
               <a:rPr sz="1100">
                 <a:solidFill>
-                  <a:srgbClr val="5B6B7B"/>
-                </a:solidFill>
-                <a:latin typeface="Segoe UI"/>
-              </a:rPr>
-              <a:t>•  Manage admin, instructor &amp; student accounts</a:t>
+                  <a:srgbClr val="6E6E6E"/>
+                </a:solidFill>
+                <a:latin typeface="Segoe UI"/>
+              </a:rPr>
+              <a:t>—  View student screens in real time</a:t>
             </a:r>
           </a:p>
           <a:p>
@@ -6089,31 +6727,77 @@
             <a:r>
               <a:rPr sz="1100">
                 <a:solidFill>
-                  <a:srgbClr val="5B6B7B"/>
-                </a:solidFill>
-                <a:latin typeface="Segoe UI"/>
-              </a:rPr>
-              <a:t>•  Role-based access control</a:t>
-            </a:r>
-          </a:p>
-        </p:txBody>
-      </p:sp>
-      <p:sp>
-        <p:nvSpPr>
-          <p:cNvPr id="8" name="Rectangle 7"/>
+                  <a:srgbClr val="6E6E6E"/>
+                </a:solidFill>
+                <a:latin typeface="Segoe UI"/>
+              </a:rPr>
+              <a:t>—  Spot off-task activity</a:t>
+            </a:r>
+          </a:p>
+        </p:txBody>
+      </p:sp>
+      <p:sp>
+        <p:nvSpPr>
+          <p:cNvPr id="11" name="Rectangle 10"/>
           <p:cNvSpPr/>
           <p:nvPr/>
         </p:nvSpPr>
         <p:spPr>
           <a:xfrm>
-            <a:off x="4343400" y="1508760"/>
+            <a:off x="8183880" y="1508760"/>
             <a:ext cx="3611880" cy="2148840"/>
           </a:xfrm>
           <a:prstGeom prst="rect">
             <a:avLst/>
           </a:prstGeom>
           <a:solidFill>
-            <a:srgbClr val="F2F6FC"/>
+            <a:srgbClr val="F7F7F7"/>
+          </a:solidFill>
+          <a:ln w="12700">
+            <a:solidFill>
+              <a:srgbClr val="C9C9C9"/>
+            </a:solidFill>
+          </a:ln>
+          <a:effectLst/>
+        </p:spPr>
+        <p:style>
+          <a:lnRef idx="1">
+            <a:schemeClr val="accent1"/>
+          </a:lnRef>
+          <a:fillRef idx="3">
+            <a:schemeClr val="accent1"/>
+          </a:fillRef>
+          <a:effectRef idx="2">
+            <a:schemeClr val="accent1"/>
+          </a:effectRef>
+          <a:fontRef idx="minor">
+            <a:schemeClr val="lt1"/>
+          </a:fontRef>
+        </p:style>
+        <p:txBody>
+          <a:bodyPr rtlCol="0" anchor="ctr"/>
+          <a:lstStyle/>
+          <a:p>
+            <a:pPr algn="ctr"/>
+          </a:p>
+        </p:txBody>
+      </p:sp>
+      <p:sp>
+        <p:nvSpPr>
+          <p:cNvPr id="12" name="Rectangle 11"/>
+          <p:cNvSpPr/>
+          <p:nvPr/>
+        </p:nvSpPr>
+        <p:spPr>
+          <a:xfrm>
+            <a:off x="8183880" y="1508760"/>
+            <a:ext cx="3611880" cy="64008"/>
+          </a:xfrm>
+          <a:prstGeom prst="rect">
+            <a:avLst/>
+          </a:prstGeom>
+          <a:solidFill>
+            <a:srgbClr val="333333"/>
           </a:solidFill>
           <a:ln>
             <a:noFill/>
@@ -6144,20 +6828,137 @@
       </p:sp>
       <p:sp>
         <p:nvSpPr>
-          <p:cNvPr id="9" name="Rectangle 8"/>
+          <p:cNvPr id="13" name="TextBox 12"/>
+          <p:cNvSpPr txBox="1"/>
+          <p:nvPr/>
+        </p:nvSpPr>
+        <p:spPr>
+          <a:xfrm>
+            <a:off x="8385048" y="1691640"/>
+            <a:ext cx="3246120" cy="1828800"/>
+          </a:xfrm>
+          <a:prstGeom prst="rect">
+            <a:avLst/>
+          </a:prstGeom>
+          <a:noFill/>
+        </p:spPr>
+        <p:txBody>
+          <a:bodyPr wrap="square">
+            <a:spAutoFit/>
+          </a:bodyPr>
+          <a:lstStyle/>
+          <a:p>
+            <a:pPr>
+              <a:spcAft>
+                <a:spcPts val="600"/>
+              </a:spcAft>
+            </a:pPr>
+            <a:r>
+              <a:rPr sz="1500" b="1">
+                <a:solidFill>
+                  <a:srgbClr val="1A1A1A"/>
+                </a:solidFill>
+                <a:latin typeface="Segoe UI"/>
+              </a:rPr>
+              <a:t>Control Actions</a:t>
+            </a:r>
+          </a:p>
+          <a:p>
+            <a:pPr>
+              <a:spcAft>
+                <a:spcPts val="300"/>
+              </a:spcAft>
+            </a:pPr>
+            <a:r>
+              <a:rPr sz="1100">
+                <a:solidFill>
+                  <a:srgbClr val="6E6E6E"/>
+                </a:solidFill>
+                <a:latin typeface="Segoe UI"/>
+              </a:rPr>
+              <a:t>—  Lock, shut down &amp; project screen</a:t>
+            </a:r>
+          </a:p>
+          <a:p>
+            <a:pPr>
+              <a:spcAft>
+                <a:spcPts val="300"/>
+              </a:spcAft>
+            </a:pPr>
+            <a:r>
+              <a:rPr sz="1100">
+                <a:solidFill>
+                  <a:srgbClr val="6E6E6E"/>
+                </a:solidFill>
+                <a:latin typeface="Segoe UI"/>
+              </a:rPr>
+              <a:t>—  Internet controls to keep focus</a:t>
+            </a:r>
+          </a:p>
+        </p:txBody>
+      </p:sp>
+      <p:sp>
+        <p:nvSpPr>
+          <p:cNvPr id="14" name="Rectangle 13"/>
           <p:cNvSpPr/>
           <p:nvPr/>
         </p:nvSpPr>
         <p:spPr>
           <a:xfrm>
-            <a:off x="4343400" y="1508760"/>
+            <a:off x="502920" y="3886200"/>
+            <a:ext cx="3611880" cy="2148840"/>
+          </a:xfrm>
+          <a:prstGeom prst="rect">
+            <a:avLst/>
+          </a:prstGeom>
+          <a:solidFill>
+            <a:srgbClr val="F7F7F7"/>
+          </a:solidFill>
+          <a:ln w="12700">
+            <a:solidFill>
+              <a:srgbClr val="C9C9C9"/>
+            </a:solidFill>
+          </a:ln>
+          <a:effectLst/>
+        </p:spPr>
+        <p:style>
+          <a:lnRef idx="1">
+            <a:schemeClr val="accent1"/>
+          </a:lnRef>
+          <a:fillRef idx="3">
+            <a:schemeClr val="accent1"/>
+          </a:fillRef>
+          <a:effectRef idx="2">
+            <a:schemeClr val="accent1"/>
+          </a:effectRef>
+          <a:fontRef idx="minor">
+            <a:schemeClr val="lt1"/>
+          </a:fontRef>
+        </p:style>
+        <p:txBody>
+          <a:bodyPr rtlCol="0" anchor="ctr"/>
+          <a:lstStyle/>
+          <a:p>
+            <a:pPr algn="ctr"/>
+          </a:p>
+        </p:txBody>
+      </p:sp>
+      <p:sp>
+        <p:nvSpPr>
+          <p:cNvPr id="15" name="Rectangle 14"/>
+          <p:cNvSpPr/>
+          <p:nvPr/>
+        </p:nvSpPr>
+        <p:spPr>
+          <a:xfrm>
+            <a:off x="502920" y="3886200"/>
             <a:ext cx="3611880" cy="64008"/>
           </a:xfrm>
           <a:prstGeom prst="rect">
             <a:avLst/>
           </a:prstGeom>
           <a:solidFill>
-            <a:srgbClr val="2C7BE5"/>
+            <a:srgbClr val="333333"/>
           </a:solidFill>
           <a:ln>
             <a:noFill/>
@@ -6188,13 +6989,13 @@
       </p:sp>
       <p:sp>
         <p:nvSpPr>
-          <p:cNvPr id="10" name="TextBox 9"/>
+          <p:cNvPr id="16" name="TextBox 15"/>
           <p:cNvSpPr txBox="1"/>
           <p:nvPr/>
         </p:nvSpPr>
         <p:spPr>
           <a:xfrm>
-            <a:off x="4544568" y="1691640"/>
+            <a:off x="704088" y="4069080"/>
             <a:ext cx="3246120" cy="1828800"/>
           </a:xfrm>
           <a:prstGeom prst="rect">
@@ -6216,11 +7017,11 @@
             <a:r>
               <a:rPr sz="1500" b="1">
                 <a:solidFill>
-                  <a:srgbClr val="0F2A4A"/>
-                </a:solidFill>
-                <a:latin typeface="Segoe UI"/>
-              </a:rPr>
-              <a:t>Lab &amp; Computer Management</a:t>
+                  <a:srgbClr val="1A1A1A"/>
+                </a:solidFill>
+                <a:latin typeface="Segoe UI"/>
+              </a:rPr>
+              <a:t>Messaging</a:t>
             </a:r>
           </a:p>
           <a:p>
@@ -6232,11 +7033,11 @@
             <a:r>
               <a:rPr sz="1100">
                 <a:solidFill>
-                  <a:srgbClr val="5B6B7B"/>
-                </a:solidFill>
-                <a:latin typeface="Segoe UI"/>
-              </a:rPr>
-              <a:t>•  Register laboratories &amp; computers</a:t>
+                  <a:srgbClr val="6E6E6E"/>
+                </a:solidFill>
+                <a:latin typeface="Segoe UI"/>
+              </a:rPr>
+              <a:t>—  Send announcements to students</a:t>
             </a:r>
           </a:p>
           <a:p>
@@ -6248,31 +7049,77 @@
             <a:r>
               <a:rPr sz="1100">
                 <a:solidFill>
-                  <a:srgbClr val="5B6B7B"/>
-                </a:solidFill>
-                <a:latin typeface="Segoe UI"/>
-              </a:rPr>
-              <a:t>•  Hardware inventory tracking</a:t>
-            </a:r>
-          </a:p>
-        </p:txBody>
-      </p:sp>
-      <p:sp>
-        <p:nvSpPr>
-          <p:cNvPr id="11" name="Rectangle 10"/>
+                  <a:srgbClr val="6E6E6E"/>
+                </a:solidFill>
+                <a:latin typeface="Segoe UI"/>
+              </a:rPr>
+              <a:t>—  One-to-one chat support</a:t>
+            </a:r>
+          </a:p>
+        </p:txBody>
+      </p:sp>
+      <p:sp>
+        <p:nvSpPr>
+          <p:cNvPr id="17" name="Rectangle 16"/>
           <p:cNvSpPr/>
           <p:nvPr/>
         </p:nvSpPr>
         <p:spPr>
           <a:xfrm>
-            <a:off x="8183880" y="1508760"/>
+            <a:off x="4343400" y="3886200"/>
             <a:ext cx="3611880" cy="2148840"/>
           </a:xfrm>
           <a:prstGeom prst="rect">
             <a:avLst/>
           </a:prstGeom>
           <a:solidFill>
-            <a:srgbClr val="F2F6FC"/>
+            <a:srgbClr val="F7F7F7"/>
+          </a:solidFill>
+          <a:ln w="12700">
+            <a:solidFill>
+              <a:srgbClr val="C9C9C9"/>
+            </a:solidFill>
+          </a:ln>
+          <a:effectLst/>
+        </p:spPr>
+        <p:style>
+          <a:lnRef idx="1">
+            <a:schemeClr val="accent1"/>
+          </a:lnRef>
+          <a:fillRef idx="3">
+            <a:schemeClr val="accent1"/>
+          </a:fillRef>
+          <a:effectRef idx="2">
+            <a:schemeClr val="accent1"/>
+          </a:effectRef>
+          <a:fontRef idx="minor">
+            <a:schemeClr val="lt1"/>
+          </a:fontRef>
+        </p:style>
+        <p:txBody>
+          <a:bodyPr rtlCol="0" anchor="ctr"/>
+          <a:lstStyle/>
+          <a:p>
+            <a:pPr algn="ctr"/>
+          </a:p>
+        </p:txBody>
+      </p:sp>
+      <p:sp>
+        <p:nvSpPr>
+          <p:cNvPr id="18" name="Rectangle 17"/>
+          <p:cNvSpPr/>
+          <p:nvPr/>
+        </p:nvSpPr>
+        <p:spPr>
+          <a:xfrm>
+            <a:off x="4343400" y="3886200"/>
+            <a:ext cx="3611880" cy="64008"/>
+          </a:xfrm>
+          <a:prstGeom prst="rect">
+            <a:avLst/>
+          </a:prstGeom>
+          <a:solidFill>
+            <a:srgbClr val="333333"/>
           </a:solidFill>
           <a:ln>
             <a:noFill/>
@@ -6303,20 +7150,137 @@
       </p:sp>
       <p:sp>
         <p:nvSpPr>
-          <p:cNvPr id="12" name="Rectangle 11"/>
+          <p:cNvPr id="19" name="TextBox 18"/>
+          <p:cNvSpPr txBox="1"/>
+          <p:nvPr/>
+        </p:nvSpPr>
+        <p:spPr>
+          <a:xfrm>
+            <a:off x="4544568" y="4069080"/>
+            <a:ext cx="3246120" cy="1828800"/>
+          </a:xfrm>
+          <a:prstGeom prst="rect">
+            <a:avLst/>
+          </a:prstGeom>
+          <a:noFill/>
+        </p:spPr>
+        <p:txBody>
+          <a:bodyPr wrap="square">
+            <a:spAutoFit/>
+          </a:bodyPr>
+          <a:lstStyle/>
+          <a:p>
+            <a:pPr>
+              <a:spcAft>
+                <a:spcPts val="600"/>
+              </a:spcAft>
+            </a:pPr>
+            <a:r>
+              <a:rPr sz="1500" b="1">
+                <a:solidFill>
+                  <a:srgbClr val="1A1A1A"/>
+                </a:solidFill>
+                <a:latin typeface="Segoe UI"/>
+              </a:rPr>
+              <a:t>Ticket Approval</a:t>
+            </a:r>
+          </a:p>
+          <a:p>
+            <a:pPr>
+              <a:spcAft>
+                <a:spcPts val="300"/>
+              </a:spcAft>
+            </a:pPr>
+            <a:r>
+              <a:rPr sz="1100">
+                <a:solidFill>
+                  <a:srgbClr val="6E6E6E"/>
+                </a:solidFill>
+                <a:latin typeface="Segoe UI"/>
+              </a:rPr>
+              <a:t>—  Review student support requests</a:t>
+            </a:r>
+          </a:p>
+          <a:p>
+            <a:pPr>
+              <a:spcAft>
+                <a:spcPts val="300"/>
+              </a:spcAft>
+            </a:pPr>
+            <a:r>
+              <a:rPr sz="1100">
+                <a:solidFill>
+                  <a:srgbClr val="6E6E6E"/>
+                </a:solidFill>
+                <a:latin typeface="Segoe UI"/>
+              </a:rPr>
+              <a:t>—  Approve or resolve quickly</a:t>
+            </a:r>
+          </a:p>
+        </p:txBody>
+      </p:sp>
+      <p:sp>
+        <p:nvSpPr>
+          <p:cNvPr id="20" name="Rectangle 19"/>
           <p:cNvSpPr/>
           <p:nvPr/>
         </p:nvSpPr>
         <p:spPr>
           <a:xfrm>
-            <a:off x="8183880" y="1508760"/>
+            <a:off x="8183880" y="3886200"/>
+            <a:ext cx="3611880" cy="2148840"/>
+          </a:xfrm>
+          <a:prstGeom prst="rect">
+            <a:avLst/>
+          </a:prstGeom>
+          <a:solidFill>
+            <a:srgbClr val="F7F7F7"/>
+          </a:solidFill>
+          <a:ln w="12700">
+            <a:solidFill>
+              <a:srgbClr val="C9C9C9"/>
+            </a:solidFill>
+          </a:ln>
+          <a:effectLst/>
+        </p:spPr>
+        <p:style>
+          <a:lnRef idx="1">
+            <a:schemeClr val="accent1"/>
+          </a:lnRef>
+          <a:fillRef idx="3">
+            <a:schemeClr val="accent1"/>
+          </a:fillRef>
+          <a:effectRef idx="2">
+            <a:schemeClr val="accent1"/>
+          </a:effectRef>
+          <a:fontRef idx="minor">
+            <a:schemeClr val="lt1"/>
+          </a:fontRef>
+        </p:style>
+        <p:txBody>
+          <a:bodyPr rtlCol="0" anchor="ctr"/>
+          <a:lstStyle/>
+          <a:p>
+            <a:pPr algn="ctr"/>
+          </a:p>
+        </p:txBody>
+      </p:sp>
+      <p:sp>
+        <p:nvSpPr>
+          <p:cNvPr id="21" name="Rectangle 20"/>
+          <p:cNvSpPr/>
+          <p:nvPr/>
+        </p:nvSpPr>
+        <p:spPr>
+          <a:xfrm>
+            <a:off x="8183880" y="3886200"/>
             <a:ext cx="3611880" cy="64008"/>
           </a:xfrm>
           <a:prstGeom prst="rect">
             <a:avLst/>
           </a:prstGeom>
           <a:solidFill>
-            <a:srgbClr val="2C7BE5"/>
+            <a:srgbClr val="333333"/>
           </a:solidFill>
           <a:ln>
             <a:noFill/>
@@ -6347,13 +7311,13 @@
       </p:sp>
       <p:sp>
         <p:nvSpPr>
-          <p:cNvPr id="13" name="TextBox 12"/>
+          <p:cNvPr id="22" name="TextBox 21"/>
           <p:cNvSpPr txBox="1"/>
           <p:nvPr/>
         </p:nvSpPr>
         <p:spPr>
           <a:xfrm>
-            <a:off x="8385048" y="1691640"/>
+            <a:off x="8385048" y="4069080"/>
             <a:ext cx="3246120" cy="1828800"/>
           </a:xfrm>
           <a:prstGeom prst="rect">
@@ -6375,11 +7339,11 @@
             <a:r>
               <a:rPr sz="1500" b="1">
                 <a:solidFill>
-                  <a:srgbClr val="0F2A4A"/>
-                </a:solidFill>
-                <a:latin typeface="Segoe UI"/>
-              </a:rPr>
-              <a:t>Scheduling</a:t>
+                  <a:srgbClr val="1A1A1A"/>
+                </a:solidFill>
+                <a:latin typeface="Segoe UI"/>
+              </a:rPr>
+              <a:t>Reports</a:t>
             </a:r>
           </a:p>
           <a:p>
@@ -6391,11 +7355,11 @@
             <a:r>
               <a:rPr sz="1100">
                 <a:solidFill>
-                  <a:srgbClr val="5B6B7B"/>
-                </a:solidFill>
-                <a:latin typeface="Segoe UI"/>
-              </a:rPr>
-              <a:t>•  Assign labs, classes &amp; time slots</a:t>
+                  <a:srgbClr val="6E6E6E"/>
+                </a:solidFill>
+                <a:latin typeface="Segoe UI"/>
+              </a:rPr>
+              <a:t>—  Attendance &amp; usage reports</a:t>
             </a:r>
           </a:p>
           <a:p>
@@ -6407,488 +7371,11 @@
             <a:r>
               <a:rPr sz="1100">
                 <a:solidFill>
-                  <a:srgbClr val="5B6B7B"/>
-                </a:solidFill>
-                <a:latin typeface="Segoe UI"/>
-              </a:rPr>
-              <a:t>•  Avoid booking conflicts</a:t>
-            </a:r>
-          </a:p>
-        </p:txBody>
-      </p:sp>
-      <p:sp>
-        <p:nvSpPr>
-          <p:cNvPr id="14" name="Rectangle 13"/>
-          <p:cNvSpPr/>
-          <p:nvPr/>
-        </p:nvSpPr>
-        <p:spPr>
-          <a:xfrm>
-            <a:off x="502920" y="3886200"/>
-            <a:ext cx="3611880" cy="2148840"/>
-          </a:xfrm>
-          <a:prstGeom prst="rect">
-            <a:avLst/>
-          </a:prstGeom>
-          <a:solidFill>
-            <a:srgbClr val="F2F6FC"/>
-          </a:solidFill>
-          <a:ln>
-            <a:noFill/>
-          </a:ln>
-          <a:effectLst/>
-        </p:spPr>
-        <p:style>
-          <a:lnRef idx="1">
-            <a:schemeClr val="accent1"/>
-          </a:lnRef>
-          <a:fillRef idx="3">
-            <a:schemeClr val="accent1"/>
-          </a:fillRef>
-          <a:effectRef idx="2">
-            <a:schemeClr val="accent1"/>
-          </a:effectRef>
-          <a:fontRef idx="minor">
-            <a:schemeClr val="lt1"/>
-          </a:fontRef>
-        </p:style>
-        <p:txBody>
-          <a:bodyPr rtlCol="0" anchor="ctr"/>
-          <a:lstStyle/>
-          <a:p>
-            <a:pPr algn="ctr"/>
-          </a:p>
-        </p:txBody>
-      </p:sp>
-      <p:sp>
-        <p:nvSpPr>
-          <p:cNvPr id="15" name="Rectangle 14"/>
-          <p:cNvSpPr/>
-          <p:nvPr/>
-        </p:nvSpPr>
-        <p:spPr>
-          <a:xfrm>
-            <a:off x="502920" y="3886200"/>
-            <a:ext cx="3611880" cy="64008"/>
-          </a:xfrm>
-          <a:prstGeom prst="rect">
-            <a:avLst/>
-          </a:prstGeom>
-          <a:solidFill>
-            <a:srgbClr val="2C7BE5"/>
-          </a:solidFill>
-          <a:ln>
-            <a:noFill/>
-          </a:ln>
-          <a:effectLst/>
-        </p:spPr>
-        <p:style>
-          <a:lnRef idx="1">
-            <a:schemeClr val="accent1"/>
-          </a:lnRef>
-          <a:fillRef idx="3">
-            <a:schemeClr val="accent1"/>
-          </a:fillRef>
-          <a:effectRef idx="2">
-            <a:schemeClr val="accent1"/>
-          </a:effectRef>
-          <a:fontRef idx="minor">
-            <a:schemeClr val="lt1"/>
-          </a:fontRef>
-        </p:style>
-        <p:txBody>
-          <a:bodyPr rtlCol="0" anchor="ctr"/>
-          <a:lstStyle/>
-          <a:p>
-            <a:pPr algn="ctr"/>
-          </a:p>
-        </p:txBody>
-      </p:sp>
-      <p:sp>
-        <p:nvSpPr>
-          <p:cNvPr id="16" name="TextBox 15"/>
-          <p:cNvSpPr txBox="1"/>
-          <p:nvPr/>
-        </p:nvSpPr>
-        <p:spPr>
-          <a:xfrm>
-            <a:off x="704088" y="4069080"/>
-            <a:ext cx="3246120" cy="1828800"/>
-          </a:xfrm>
-          <a:prstGeom prst="rect">
-            <a:avLst/>
-          </a:prstGeom>
-          <a:noFill/>
-        </p:spPr>
-        <p:txBody>
-          <a:bodyPr wrap="square">
-            <a:spAutoFit/>
-          </a:bodyPr>
-          <a:lstStyle/>
-          <a:p>
-            <a:pPr>
-              <a:spcAft>
-                <a:spcPts val="600"/>
-              </a:spcAft>
-            </a:pPr>
-            <a:r>
-              <a:rPr sz="1500" b="1">
-                <a:solidFill>
-                  <a:srgbClr val="0F2A4A"/>
-                </a:solidFill>
-                <a:latin typeface="Segoe UI"/>
-              </a:rPr>
-              <a:t>Network &amp; Security</a:t>
-            </a:r>
-          </a:p>
-          <a:p>
-            <a:pPr>
-              <a:spcAft>
-                <a:spcPts val="300"/>
-              </a:spcAft>
-            </a:pPr>
-            <a:r>
-              <a:rPr sz="1100">
-                <a:solidFill>
-                  <a:srgbClr val="5B6B7B"/>
-                </a:solidFill>
-                <a:latin typeface="Segoe UI"/>
-              </a:rPr>
-              <a:t>•  Scan the network &amp; restrict websites</a:t>
-            </a:r>
-          </a:p>
-          <a:p>
-            <a:pPr>
-              <a:spcAft>
-                <a:spcPts val="300"/>
-              </a:spcAft>
-            </a:pPr>
-            <a:r>
-              <a:rPr sz="1100">
-                <a:solidFill>
-                  <a:srgbClr val="5B6B7B"/>
-                </a:solidFill>
-                <a:latin typeface="Segoe UI"/>
-              </a:rPr>
-              <a:t>•  Security settings &amp; policies</a:t>
-            </a:r>
-          </a:p>
-        </p:txBody>
-      </p:sp>
-      <p:sp>
-        <p:nvSpPr>
-          <p:cNvPr id="17" name="Rectangle 16"/>
-          <p:cNvSpPr/>
-          <p:nvPr/>
-        </p:nvSpPr>
-        <p:spPr>
-          <a:xfrm>
-            <a:off x="4343400" y="3886200"/>
-            <a:ext cx="3611880" cy="2148840"/>
-          </a:xfrm>
-          <a:prstGeom prst="rect">
-            <a:avLst/>
-          </a:prstGeom>
-          <a:solidFill>
-            <a:srgbClr val="F2F6FC"/>
-          </a:solidFill>
-          <a:ln>
-            <a:noFill/>
-          </a:ln>
-          <a:effectLst/>
-        </p:spPr>
-        <p:style>
-          <a:lnRef idx="1">
-            <a:schemeClr val="accent1"/>
-          </a:lnRef>
-          <a:fillRef idx="3">
-            <a:schemeClr val="accent1"/>
-          </a:fillRef>
-          <a:effectRef idx="2">
-            <a:schemeClr val="accent1"/>
-          </a:effectRef>
-          <a:fontRef idx="minor">
-            <a:schemeClr val="lt1"/>
-          </a:fontRef>
-        </p:style>
-        <p:txBody>
-          <a:bodyPr rtlCol="0" anchor="ctr"/>
-          <a:lstStyle/>
-          <a:p>
-            <a:pPr algn="ctr"/>
-          </a:p>
-        </p:txBody>
-      </p:sp>
-      <p:sp>
-        <p:nvSpPr>
-          <p:cNvPr id="18" name="Rectangle 17"/>
-          <p:cNvSpPr/>
-          <p:nvPr/>
-        </p:nvSpPr>
-        <p:spPr>
-          <a:xfrm>
-            <a:off x="4343400" y="3886200"/>
-            <a:ext cx="3611880" cy="64008"/>
-          </a:xfrm>
-          <a:prstGeom prst="rect">
-            <a:avLst/>
-          </a:prstGeom>
-          <a:solidFill>
-            <a:srgbClr val="2C7BE5"/>
-          </a:solidFill>
-          <a:ln>
-            <a:noFill/>
-          </a:ln>
-          <a:effectLst/>
-        </p:spPr>
-        <p:style>
-          <a:lnRef idx="1">
-            <a:schemeClr val="accent1"/>
-          </a:lnRef>
-          <a:fillRef idx="3">
-            <a:schemeClr val="accent1"/>
-          </a:fillRef>
-          <a:effectRef idx="2">
-            <a:schemeClr val="accent1"/>
-          </a:effectRef>
-          <a:fontRef idx="minor">
-            <a:schemeClr val="lt1"/>
-          </a:fontRef>
-        </p:style>
-        <p:txBody>
-          <a:bodyPr rtlCol="0" anchor="ctr"/>
-          <a:lstStyle/>
-          <a:p>
-            <a:pPr algn="ctr"/>
-          </a:p>
-        </p:txBody>
-      </p:sp>
-      <p:sp>
-        <p:nvSpPr>
-          <p:cNvPr id="19" name="TextBox 18"/>
-          <p:cNvSpPr txBox="1"/>
-          <p:nvPr/>
-        </p:nvSpPr>
-        <p:spPr>
-          <a:xfrm>
-            <a:off x="4544568" y="4069080"/>
-            <a:ext cx="3246120" cy="1828800"/>
-          </a:xfrm>
-          <a:prstGeom prst="rect">
-            <a:avLst/>
-          </a:prstGeom>
-          <a:noFill/>
-        </p:spPr>
-        <p:txBody>
-          <a:bodyPr wrap="square">
-            <a:spAutoFit/>
-          </a:bodyPr>
-          <a:lstStyle/>
-          <a:p>
-            <a:pPr>
-              <a:spcAft>
-                <a:spcPts val="600"/>
-              </a:spcAft>
-            </a:pPr>
-            <a:r>
-              <a:rPr sz="1500" b="1">
-                <a:solidFill>
-                  <a:srgbClr val="0F2A4A"/>
-                </a:solidFill>
-                <a:latin typeface="Segoe UI"/>
-              </a:rPr>
-              <a:t>Monitoring &amp; Projection</a:t>
-            </a:r>
-          </a:p>
-          <a:p>
-            <a:pPr>
-              <a:spcAft>
-                <a:spcPts val="300"/>
-              </a:spcAft>
-            </a:pPr>
-            <a:r>
-              <a:rPr sz="1100">
-                <a:solidFill>
-                  <a:srgbClr val="5B6B7B"/>
-                </a:solidFill>
-                <a:latin typeface="Segoe UI"/>
-              </a:rPr>
-              <a:t>•  Live PC status &amp; screen projection</a:t>
-            </a:r>
-          </a:p>
-          <a:p>
-            <a:pPr>
-              <a:spcAft>
-                <a:spcPts val="300"/>
-              </a:spcAft>
-            </a:pPr>
-            <a:r>
-              <a:rPr sz="1100">
-                <a:solidFill>
-                  <a:srgbClr val="5B6B7B"/>
-                </a:solidFill>
-                <a:latin typeface="Segoe UI"/>
-              </a:rPr>
-              <a:t>•  Lock / shut down any PC</a:t>
-            </a:r>
-          </a:p>
-        </p:txBody>
-      </p:sp>
-      <p:sp>
-        <p:nvSpPr>
-          <p:cNvPr id="20" name="Rectangle 19"/>
-          <p:cNvSpPr/>
-          <p:nvPr/>
-        </p:nvSpPr>
-        <p:spPr>
-          <a:xfrm>
-            <a:off x="8183880" y="3886200"/>
-            <a:ext cx="3611880" cy="2148840"/>
-          </a:xfrm>
-          <a:prstGeom prst="rect">
-            <a:avLst/>
-          </a:prstGeom>
-          <a:solidFill>
-            <a:srgbClr val="F2F6FC"/>
-          </a:solidFill>
-          <a:ln>
-            <a:noFill/>
-          </a:ln>
-          <a:effectLst/>
-        </p:spPr>
-        <p:style>
-          <a:lnRef idx="1">
-            <a:schemeClr val="accent1"/>
-          </a:lnRef>
-          <a:fillRef idx="3">
-            <a:schemeClr val="accent1"/>
-          </a:fillRef>
-          <a:effectRef idx="2">
-            <a:schemeClr val="accent1"/>
-          </a:effectRef>
-          <a:fontRef idx="minor">
-            <a:schemeClr val="lt1"/>
-          </a:fontRef>
-        </p:style>
-        <p:txBody>
-          <a:bodyPr rtlCol="0" anchor="ctr"/>
-          <a:lstStyle/>
-          <a:p>
-            <a:pPr algn="ctr"/>
-          </a:p>
-        </p:txBody>
-      </p:sp>
-      <p:sp>
-        <p:nvSpPr>
-          <p:cNvPr id="21" name="Rectangle 20"/>
-          <p:cNvSpPr/>
-          <p:nvPr/>
-        </p:nvSpPr>
-        <p:spPr>
-          <a:xfrm>
-            <a:off x="8183880" y="3886200"/>
-            <a:ext cx="3611880" cy="64008"/>
-          </a:xfrm>
-          <a:prstGeom prst="rect">
-            <a:avLst/>
-          </a:prstGeom>
-          <a:solidFill>
-            <a:srgbClr val="2C7BE5"/>
-          </a:solidFill>
-          <a:ln>
-            <a:noFill/>
-          </a:ln>
-          <a:effectLst/>
-        </p:spPr>
-        <p:style>
-          <a:lnRef idx="1">
-            <a:schemeClr val="accent1"/>
-          </a:lnRef>
-          <a:fillRef idx="3">
-            <a:schemeClr val="accent1"/>
-          </a:fillRef>
-          <a:effectRef idx="2">
-            <a:schemeClr val="accent1"/>
-          </a:effectRef>
-          <a:fontRef idx="minor">
-            <a:schemeClr val="lt1"/>
-          </a:fontRef>
-        </p:style>
-        <p:txBody>
-          <a:bodyPr rtlCol="0" anchor="ctr"/>
-          <a:lstStyle/>
-          <a:p>
-            <a:pPr algn="ctr"/>
-          </a:p>
-        </p:txBody>
-      </p:sp>
-      <p:sp>
-        <p:nvSpPr>
-          <p:cNvPr id="22" name="TextBox 21"/>
-          <p:cNvSpPr txBox="1"/>
-          <p:nvPr/>
-        </p:nvSpPr>
-        <p:spPr>
-          <a:xfrm>
-            <a:off x="8385048" y="4069080"/>
-            <a:ext cx="3246120" cy="1828800"/>
-          </a:xfrm>
-          <a:prstGeom prst="rect">
-            <a:avLst/>
-          </a:prstGeom>
-          <a:noFill/>
-        </p:spPr>
-        <p:txBody>
-          <a:bodyPr wrap="square">
-            <a:spAutoFit/>
-          </a:bodyPr>
-          <a:lstStyle/>
-          <a:p>
-            <a:pPr>
-              <a:spcAft>
-                <a:spcPts val="600"/>
-              </a:spcAft>
-            </a:pPr>
-            <a:r>
-              <a:rPr sz="1500" b="1">
-                <a:solidFill>
-                  <a:srgbClr val="0F2A4A"/>
-                </a:solidFill>
-                <a:latin typeface="Segoe UI"/>
-              </a:rPr>
-              <a:t>Reports &amp; System Logs</a:t>
-            </a:r>
-          </a:p>
-          <a:p>
-            <a:pPr>
-              <a:spcAft>
-                <a:spcPts val="300"/>
-              </a:spcAft>
-            </a:pPr>
-            <a:r>
-              <a:rPr sz="1100">
-                <a:solidFill>
-                  <a:srgbClr val="5B6B7B"/>
-                </a:solidFill>
-                <a:latin typeface="Segoe UI"/>
-              </a:rPr>
-              <a:t>•  Usage &amp; activity reports</a:t>
-            </a:r>
-          </a:p>
-          <a:p>
-            <a:pPr>
-              <a:spcAft>
-                <a:spcPts val="300"/>
-              </a:spcAft>
-            </a:pPr>
-            <a:r>
-              <a:rPr sz="1100">
-                <a:solidFill>
-                  <a:srgbClr val="5B6B7B"/>
-                </a:solidFill>
-                <a:latin typeface="Segoe UI"/>
-              </a:rPr>
-              <a:t>•  Full audit trail of actions</a:t>
+                  <a:srgbClr val="6E6E6E"/>
+                </a:solidFill>
+                <a:latin typeface="Segoe UI"/>
+              </a:rPr>
+              <a:t>—  Class activity at a glance</a:t>
             </a:r>
           </a:p>
         </p:txBody>
@@ -6926,7 +7413,7 @@
             <a:avLst/>
           </a:prstGeom>
           <a:solidFill>
-            <a:srgbClr val="0F2A4A"/>
+            <a:srgbClr val="1A1A1A"/>
           </a:solidFill>
           <a:ln>
             <a:noFill/>
@@ -6970,7 +7457,7 @@
             <a:avLst/>
           </a:prstGeom>
           <a:solidFill>
-            <a:srgbClr val="F5A623"/>
+            <a:srgbClr val="C9C9C9"/>
           </a:solidFill>
           <a:ln>
             <a:noFill/>
@@ -7032,11 +7519,11 @@
             <a:r>
               <a:rPr sz="1200" b="1">
                 <a:solidFill>
-                  <a:srgbClr val="9DC2F0"/>
-                </a:solidFill>
-                <a:latin typeface="Segoe UI"/>
-              </a:rPr>
-              <a:t>MODULES &amp; FEATURES — INSTRUCTOR</a:t>
+                  <a:srgbClr val="C4C4C4"/>
+                </a:solidFill>
+                <a:latin typeface="Segoe UI"/>
+              </a:rPr>
+              <a:t>MODULES &amp; FEATURES - STUDENT</a:t>
             </a:r>
           </a:p>
           <a:p>
@@ -7055,27 +7542,115 @@
                 </a:solidFill>
                 <a:latin typeface="Segoe UI"/>
               </a:rPr>
-              <a:t>What It Does for Instructors</a:t>
-            </a:r>
-          </a:p>
-        </p:txBody>
-      </p:sp>
-      <p:sp>
-        <p:nvSpPr>
-          <p:cNvPr id="5" name="Rectangle 4"/>
+              <a:t>What It Does for Students</a:t>
+            </a:r>
+          </a:p>
+        </p:txBody>
+      </p:sp>
+      <p:sp>
+        <p:nvSpPr>
+          <p:cNvPr id="5" name="TextBox 4"/>
+          <p:cNvSpPr txBox="1"/>
+          <p:nvPr/>
+        </p:nvSpPr>
+        <p:spPr>
+          <a:xfrm>
+            <a:off x="502920" y="1463040"/>
+            <a:ext cx="11155680" cy="457200"/>
+          </a:xfrm>
+          <a:prstGeom prst="rect">
+            <a:avLst/>
+          </a:prstGeom>
+          <a:noFill/>
+        </p:spPr>
+        <p:txBody>
+          <a:bodyPr wrap="square" anchor="t" lIns="0" rIns="0" tIns="0" bIns="0">
+            <a:spAutoFit/>
+          </a:bodyPr>
+          <a:lstStyle/>
+          <a:p>
+            <a:pPr algn="l">
+              <a:spcBef>
+                <a:spcPts val="0"/>
+              </a:spcBef>
+              <a:spcAft>
+                <a:spcPts val="0"/>
+              </a:spcAft>
+            </a:pPr>
+            <a:r>
+              <a:rPr sz="1500" b="0">
+                <a:solidFill>
+                  <a:srgbClr val="6E6E6E"/>
+                </a:solidFill>
+                <a:latin typeface="Segoe UI"/>
+              </a:rPr>
+              <a:t>A simple, focused workspace so students can stay on task and get help fast.</a:t>
+            </a:r>
+          </a:p>
+        </p:txBody>
+      </p:sp>
+      <p:sp>
+        <p:nvSpPr>
+          <p:cNvPr id="6" name="Rectangle 5"/>
           <p:cNvSpPr/>
           <p:nvPr/>
         </p:nvSpPr>
         <p:spPr>
           <a:xfrm>
-            <a:off x="502920" y="1508760"/>
-            <a:ext cx="3611880" cy="2148840"/>
+            <a:off x="502920" y="2286000"/>
+            <a:ext cx="3611880" cy="3108960"/>
           </a:xfrm>
           <a:prstGeom prst="rect">
             <a:avLst/>
           </a:prstGeom>
           <a:solidFill>
-            <a:srgbClr val="F2F6FC"/>
+            <a:srgbClr val="F7F7F7"/>
+          </a:solidFill>
+          <a:ln w="12700">
+            <a:solidFill>
+              <a:srgbClr val="C9C9C9"/>
+            </a:solidFill>
+          </a:ln>
+          <a:effectLst/>
+        </p:spPr>
+        <p:style>
+          <a:lnRef idx="1">
+            <a:schemeClr val="accent1"/>
+          </a:lnRef>
+          <a:fillRef idx="3">
+            <a:schemeClr val="accent1"/>
+          </a:fillRef>
+          <a:effectRef idx="2">
+            <a:schemeClr val="accent1"/>
+          </a:effectRef>
+          <a:fontRef idx="minor">
+            <a:schemeClr val="lt1"/>
+          </a:fontRef>
+        </p:style>
+        <p:txBody>
+          <a:bodyPr rtlCol="0" anchor="ctr"/>
+          <a:lstStyle/>
+          <a:p>
+            <a:pPr algn="ctr"/>
+          </a:p>
+        </p:txBody>
+      </p:sp>
+      <p:sp>
+        <p:nvSpPr>
+          <p:cNvPr id="7" name="Rectangle 6"/>
+          <p:cNvSpPr/>
+          <p:nvPr/>
+        </p:nvSpPr>
+        <p:spPr>
+          <a:xfrm>
+            <a:off x="502920" y="2286000"/>
+            <a:ext cx="3611880" cy="64008"/>
+          </a:xfrm>
+          <a:prstGeom prst="rect">
+            <a:avLst/>
+          </a:prstGeom>
+          <a:solidFill>
+            <a:srgbClr val="555555"/>
           </a:solidFill>
           <a:ln>
             <a:noFill/>
@@ -7106,20 +7681,137 @@
       </p:sp>
       <p:sp>
         <p:nvSpPr>
-          <p:cNvPr id="6" name="Rectangle 5"/>
+          <p:cNvPr id="8" name="TextBox 7"/>
+          <p:cNvSpPr txBox="1"/>
+          <p:nvPr/>
+        </p:nvSpPr>
+        <p:spPr>
+          <a:xfrm>
+            <a:off x="704088" y="2468880"/>
+            <a:ext cx="3246120" cy="2788920"/>
+          </a:xfrm>
+          <a:prstGeom prst="rect">
+            <a:avLst/>
+          </a:prstGeom>
+          <a:noFill/>
+        </p:spPr>
+        <p:txBody>
+          <a:bodyPr wrap="square">
+            <a:spAutoFit/>
+          </a:bodyPr>
+          <a:lstStyle/>
+          <a:p>
+            <a:pPr>
+              <a:spcAft>
+                <a:spcPts val="600"/>
+              </a:spcAft>
+            </a:pPr>
+            <a:r>
+              <a:rPr sz="1500" b="1">
+                <a:solidFill>
+                  <a:srgbClr val="1A1A1A"/>
+                </a:solidFill>
+                <a:latin typeface="Segoe UI"/>
+              </a:rPr>
+              <a:t>Session Dashboard</a:t>
+            </a:r>
+          </a:p>
+          <a:p>
+            <a:pPr>
+              <a:spcAft>
+                <a:spcPts val="300"/>
+              </a:spcAft>
+            </a:pPr>
+            <a:r>
+              <a:rPr sz="1100">
+                <a:solidFill>
+                  <a:srgbClr val="6E6E6E"/>
+                </a:solidFill>
+                <a:latin typeface="Segoe UI"/>
+              </a:rPr>
+              <a:t>—  See current class &amp; session info</a:t>
+            </a:r>
+          </a:p>
+          <a:p>
+            <a:pPr>
+              <a:spcAft>
+                <a:spcPts val="300"/>
+              </a:spcAft>
+            </a:pPr>
+            <a:r>
+              <a:rPr sz="1100">
+                <a:solidFill>
+                  <a:srgbClr val="6E6E6E"/>
+                </a:solidFill>
+                <a:latin typeface="Segoe UI"/>
+              </a:rPr>
+              <a:t>—  Stay aware of lab activity</a:t>
+            </a:r>
+          </a:p>
+        </p:txBody>
+      </p:sp>
+      <p:sp>
+        <p:nvSpPr>
+          <p:cNvPr id="9" name="Rectangle 8"/>
           <p:cNvSpPr/>
           <p:nvPr/>
         </p:nvSpPr>
         <p:spPr>
           <a:xfrm>
-            <a:off x="502920" y="1508760"/>
+            <a:off x="4343400" y="2286000"/>
+            <a:ext cx="3611880" cy="3108960"/>
+          </a:xfrm>
+          <a:prstGeom prst="rect">
+            <a:avLst/>
+          </a:prstGeom>
+          <a:solidFill>
+            <a:srgbClr val="F7F7F7"/>
+          </a:solidFill>
+          <a:ln w="12700">
+            <a:solidFill>
+              <a:srgbClr val="C9C9C9"/>
+            </a:solidFill>
+          </a:ln>
+          <a:effectLst/>
+        </p:spPr>
+        <p:style>
+          <a:lnRef idx="1">
+            <a:schemeClr val="accent1"/>
+          </a:lnRef>
+          <a:fillRef idx="3">
+            <a:schemeClr val="accent1"/>
+          </a:fillRef>
+          <a:effectRef idx="2">
+            <a:schemeClr val="accent1"/>
+          </a:effectRef>
+          <a:fontRef idx="minor">
+            <a:schemeClr val="lt1"/>
+          </a:fontRef>
+        </p:style>
+        <p:txBody>
+          <a:bodyPr rtlCol="0" anchor="ctr"/>
+          <a:lstStyle/>
+          <a:p>
+            <a:pPr algn="ctr"/>
+          </a:p>
+        </p:txBody>
+      </p:sp>
+      <p:sp>
+        <p:nvSpPr>
+          <p:cNvPr id="10" name="Rectangle 9"/>
+          <p:cNvSpPr/>
+          <p:nvPr/>
+        </p:nvSpPr>
+        <p:spPr>
+          <a:xfrm>
+            <a:off x="4343400" y="2286000"/>
             <a:ext cx="3611880" cy="64008"/>
           </a:xfrm>
           <a:prstGeom prst="rect">
             <a:avLst/>
           </a:prstGeom>
           <a:solidFill>
-            <a:srgbClr val="F5A623"/>
+            <a:srgbClr val="555555"/>
           </a:solidFill>
           <a:ln>
             <a:noFill/>
@@ -7150,14 +7842,14 @@
       </p:sp>
       <p:sp>
         <p:nvSpPr>
-          <p:cNvPr id="7" name="TextBox 6"/>
+          <p:cNvPr id="11" name="TextBox 10"/>
           <p:cNvSpPr txBox="1"/>
           <p:nvPr/>
         </p:nvSpPr>
         <p:spPr>
           <a:xfrm>
-            <a:off x="704088" y="1691640"/>
-            <a:ext cx="3246120" cy="1828800"/>
+            <a:off x="4544568" y="2468880"/>
+            <a:ext cx="3246120" cy="2788920"/>
           </a:xfrm>
           <a:prstGeom prst="rect">
             <a:avLst/>
@@ -7178,11 +7870,11 @@
             <a:r>
               <a:rPr sz="1500" b="1">
                 <a:solidFill>
-                  <a:srgbClr val="0F2A4A"/>
-                </a:solidFill>
-                <a:latin typeface="Segoe UI"/>
-              </a:rPr>
-              <a:t>Classroom Dashboard</a:t>
+                  <a:srgbClr val="1A1A1A"/>
+                </a:solidFill>
+                <a:latin typeface="Segoe UI"/>
+              </a:rPr>
+              <a:t>Support Tickets</a:t>
             </a:r>
           </a:p>
           <a:p>
@@ -7194,11 +7886,11 @@
             <a:r>
               <a:rPr sz="1100">
                 <a:solidFill>
-                  <a:srgbClr val="5B6B7B"/>
-                </a:solidFill>
-                <a:latin typeface="Segoe UI"/>
-              </a:rPr>
-              <a:t>•  See the whole class at a glance</a:t>
+                  <a:srgbClr val="6E6E6E"/>
+                </a:solidFill>
+                <a:latin typeface="Segoe UI"/>
+              </a:rPr>
+              <a:t>—  Report PC or software issues</a:t>
             </a:r>
           </a:p>
           <a:p>
@@ -7210,31 +7902,77 @@
             <a:r>
               <a:rPr sz="1100">
                 <a:solidFill>
-                  <a:srgbClr val="5B6B7B"/>
-                </a:solidFill>
-                <a:latin typeface="Segoe UI"/>
-              </a:rPr>
-              <a:t>•  Live student status</a:t>
-            </a:r>
-          </a:p>
-        </p:txBody>
-      </p:sp>
-      <p:sp>
-        <p:nvSpPr>
-          <p:cNvPr id="8" name="Rectangle 7"/>
+                  <a:srgbClr val="6E6E6E"/>
+                </a:solidFill>
+                <a:latin typeface="Segoe UI"/>
+              </a:rPr>
+              <a:t>—  Track request status</a:t>
+            </a:r>
+          </a:p>
+        </p:txBody>
+      </p:sp>
+      <p:sp>
+        <p:nvSpPr>
+          <p:cNvPr id="12" name="Rectangle 11"/>
           <p:cNvSpPr/>
           <p:nvPr/>
         </p:nvSpPr>
         <p:spPr>
           <a:xfrm>
-            <a:off x="4343400" y="1508760"/>
-            <a:ext cx="3611880" cy="2148840"/>
+            <a:off x="8183880" y="2286000"/>
+            <a:ext cx="3611880" cy="3108960"/>
           </a:xfrm>
           <a:prstGeom prst="rect">
             <a:avLst/>
           </a:prstGeom>
           <a:solidFill>
-            <a:srgbClr val="F2F6FC"/>
+            <a:srgbClr val="F7F7F7"/>
+          </a:solidFill>
+          <a:ln w="12700">
+            <a:solidFill>
+              <a:srgbClr val="C9C9C9"/>
+            </a:solidFill>
+          </a:ln>
+          <a:effectLst/>
+        </p:spPr>
+        <p:style>
+          <a:lnRef idx="1">
+            <a:schemeClr val="accent1"/>
+          </a:lnRef>
+          <a:fillRef idx="3">
+            <a:schemeClr val="accent1"/>
+          </a:fillRef>
+          <a:effectRef idx="2">
+            <a:schemeClr val="accent1"/>
+          </a:effectRef>
+          <a:fontRef idx="minor">
+            <a:schemeClr val="lt1"/>
+          </a:fontRef>
+        </p:style>
+        <p:txBody>
+          <a:bodyPr rtlCol="0" anchor="ctr"/>
+          <a:lstStyle/>
+          <a:p>
+            <a:pPr algn="ctr"/>
+          </a:p>
+        </p:txBody>
+      </p:sp>
+      <p:sp>
+        <p:nvSpPr>
+          <p:cNvPr id="13" name="Rectangle 12"/>
+          <p:cNvSpPr/>
+          <p:nvPr/>
+        </p:nvSpPr>
+        <p:spPr>
+          <a:xfrm>
+            <a:off x="8183880" y="2286000"/>
+            <a:ext cx="3611880" cy="64008"/>
+          </a:xfrm>
+          <a:prstGeom prst="rect">
+            <a:avLst/>
+          </a:prstGeom>
+          <a:solidFill>
+            <a:srgbClr val="555555"/>
           </a:solidFill>
           <a:ln>
             <a:noFill/>
@@ -7265,58 +8003,14 @@
       </p:sp>
       <p:sp>
         <p:nvSpPr>
-          <p:cNvPr id="9" name="Rectangle 8"/>
-          <p:cNvSpPr/>
-          <p:nvPr/>
-        </p:nvSpPr>
-        <p:spPr>
-          <a:xfrm>
-            <a:off x="4343400" y="1508760"/>
-            <a:ext cx="3611880" cy="64008"/>
-          </a:xfrm>
-          <a:prstGeom prst="rect">
-            <a:avLst/>
-          </a:prstGeom>
-          <a:solidFill>
-            <a:srgbClr val="F5A623"/>
-          </a:solidFill>
-          <a:ln>
-            <a:noFill/>
-          </a:ln>
-          <a:effectLst/>
-        </p:spPr>
-        <p:style>
-          <a:lnRef idx="1">
-            <a:schemeClr val="accent1"/>
-          </a:lnRef>
-          <a:fillRef idx="3">
-            <a:schemeClr val="accent1"/>
-          </a:fillRef>
-          <a:effectRef idx="2">
-            <a:schemeClr val="accent1"/>
-          </a:effectRef>
-          <a:fontRef idx="minor">
-            <a:schemeClr val="lt1"/>
-          </a:fontRef>
-        </p:style>
-        <p:txBody>
-          <a:bodyPr rtlCol="0" anchor="ctr"/>
-          <a:lstStyle/>
-          <a:p>
-            <a:pPr algn="ctr"/>
-          </a:p>
-        </p:txBody>
-      </p:sp>
-      <p:sp>
-        <p:nvSpPr>
-          <p:cNvPr id="10" name="TextBox 9"/>
+          <p:cNvPr id="14" name="TextBox 13"/>
           <p:cNvSpPr txBox="1"/>
           <p:nvPr/>
         </p:nvSpPr>
         <p:spPr>
           <a:xfrm>
-            <a:off x="4544568" y="1691640"/>
-            <a:ext cx="3246120" cy="1828800"/>
+            <a:off x="8385048" y="2468880"/>
+            <a:ext cx="3246120" cy="2788920"/>
           </a:xfrm>
           <a:prstGeom prst="rect">
             <a:avLst/>
@@ -7337,11 +8031,11 @@
             <a:r>
               <a:rPr sz="1500" b="1">
                 <a:solidFill>
-                  <a:srgbClr val="0F2A4A"/>
-                </a:solidFill>
-                <a:latin typeface="Segoe UI"/>
-              </a:rPr>
-              <a:t>Student Screen Monitoring</a:t>
+                  <a:srgbClr val="1A1A1A"/>
+                </a:solidFill>
+                <a:latin typeface="Segoe UI"/>
+              </a:rPr>
+              <a:t>Messaging</a:t>
             </a:r>
           </a:p>
           <a:p>
@@ -7353,11 +8047,11 @@
             <a:r>
               <a:rPr sz="1100">
                 <a:solidFill>
-                  <a:srgbClr val="5B6B7B"/>
-                </a:solidFill>
-                <a:latin typeface="Segoe UI"/>
-              </a:rPr>
-              <a:t>•  View student screens in real time</a:t>
+                  <a:srgbClr val="6E6E6E"/>
+                </a:solidFill>
+                <a:latin typeface="Segoe UI"/>
+              </a:rPr>
+              <a:t>—  Chat with the instructor</a:t>
             </a:r>
           </a:p>
           <a:p>
@@ -7369,647 +8063,11 @@
             <a:r>
               <a:rPr sz="1100">
                 <a:solidFill>
-                  <a:srgbClr val="5B6B7B"/>
-                </a:solidFill>
-                <a:latin typeface="Segoe UI"/>
-              </a:rPr>
-              <a:t>•  Spot off-task activity</a:t>
-            </a:r>
-          </a:p>
-        </p:txBody>
-      </p:sp>
-      <p:sp>
-        <p:nvSpPr>
-          <p:cNvPr id="11" name="Rectangle 10"/>
-          <p:cNvSpPr/>
-          <p:nvPr/>
-        </p:nvSpPr>
-        <p:spPr>
-          <a:xfrm>
-            <a:off x="8183880" y="1508760"/>
-            <a:ext cx="3611880" cy="2148840"/>
-          </a:xfrm>
-          <a:prstGeom prst="rect">
-            <a:avLst/>
-          </a:prstGeom>
-          <a:solidFill>
-            <a:srgbClr val="F2F6FC"/>
-          </a:solidFill>
-          <a:ln>
-            <a:noFill/>
-          </a:ln>
-          <a:effectLst/>
-        </p:spPr>
-        <p:style>
-          <a:lnRef idx="1">
-            <a:schemeClr val="accent1"/>
-          </a:lnRef>
-          <a:fillRef idx="3">
-            <a:schemeClr val="accent1"/>
-          </a:fillRef>
-          <a:effectRef idx="2">
-            <a:schemeClr val="accent1"/>
-          </a:effectRef>
-          <a:fontRef idx="minor">
-            <a:schemeClr val="lt1"/>
-          </a:fontRef>
-        </p:style>
-        <p:txBody>
-          <a:bodyPr rtlCol="0" anchor="ctr"/>
-          <a:lstStyle/>
-          <a:p>
-            <a:pPr algn="ctr"/>
-          </a:p>
-        </p:txBody>
-      </p:sp>
-      <p:sp>
-        <p:nvSpPr>
-          <p:cNvPr id="12" name="Rectangle 11"/>
-          <p:cNvSpPr/>
-          <p:nvPr/>
-        </p:nvSpPr>
-        <p:spPr>
-          <a:xfrm>
-            <a:off x="8183880" y="1508760"/>
-            <a:ext cx="3611880" cy="64008"/>
-          </a:xfrm>
-          <a:prstGeom prst="rect">
-            <a:avLst/>
-          </a:prstGeom>
-          <a:solidFill>
-            <a:srgbClr val="F5A623"/>
-          </a:solidFill>
-          <a:ln>
-            <a:noFill/>
-          </a:ln>
-          <a:effectLst/>
-        </p:spPr>
-        <p:style>
-          <a:lnRef idx="1">
-            <a:schemeClr val="accent1"/>
-          </a:lnRef>
-          <a:fillRef idx="3">
-            <a:schemeClr val="accent1"/>
-          </a:fillRef>
-          <a:effectRef idx="2">
-            <a:schemeClr val="accent1"/>
-          </a:effectRef>
-          <a:fontRef idx="minor">
-            <a:schemeClr val="lt1"/>
-          </a:fontRef>
-        </p:style>
-        <p:txBody>
-          <a:bodyPr rtlCol="0" anchor="ctr"/>
-          <a:lstStyle/>
-          <a:p>
-            <a:pPr algn="ctr"/>
-          </a:p>
-        </p:txBody>
-      </p:sp>
-      <p:sp>
-        <p:nvSpPr>
-          <p:cNvPr id="13" name="TextBox 12"/>
-          <p:cNvSpPr txBox="1"/>
-          <p:nvPr/>
-        </p:nvSpPr>
-        <p:spPr>
-          <a:xfrm>
-            <a:off x="8385048" y="1691640"/>
-            <a:ext cx="3246120" cy="1828800"/>
-          </a:xfrm>
-          <a:prstGeom prst="rect">
-            <a:avLst/>
-          </a:prstGeom>
-          <a:noFill/>
-        </p:spPr>
-        <p:txBody>
-          <a:bodyPr wrap="square">
-            <a:spAutoFit/>
-          </a:bodyPr>
-          <a:lstStyle/>
-          <a:p>
-            <a:pPr>
-              <a:spcAft>
-                <a:spcPts val="600"/>
-              </a:spcAft>
-            </a:pPr>
-            <a:r>
-              <a:rPr sz="1500" b="1">
-                <a:solidFill>
-                  <a:srgbClr val="0F2A4A"/>
-                </a:solidFill>
-                <a:latin typeface="Segoe UI"/>
-              </a:rPr>
-              <a:t>Control Actions</a:t>
-            </a:r>
-          </a:p>
-          <a:p>
-            <a:pPr>
-              <a:spcAft>
-                <a:spcPts val="300"/>
-              </a:spcAft>
-            </a:pPr>
-            <a:r>
-              <a:rPr sz="1100">
-                <a:solidFill>
-                  <a:srgbClr val="5B6B7B"/>
-                </a:solidFill>
-                <a:latin typeface="Segoe UI"/>
-              </a:rPr>
-              <a:t>•  Lock, shut down &amp; project screen</a:t>
-            </a:r>
-          </a:p>
-          <a:p>
-            <a:pPr>
-              <a:spcAft>
-                <a:spcPts val="300"/>
-              </a:spcAft>
-            </a:pPr>
-            <a:r>
-              <a:rPr sz="1100">
-                <a:solidFill>
-                  <a:srgbClr val="5B6B7B"/>
-                </a:solidFill>
-                <a:latin typeface="Segoe UI"/>
-              </a:rPr>
-              <a:t>•  Keep the class focused</a:t>
-            </a:r>
-          </a:p>
-        </p:txBody>
-      </p:sp>
-      <p:sp>
-        <p:nvSpPr>
-          <p:cNvPr id="14" name="Rectangle 13"/>
-          <p:cNvSpPr/>
-          <p:nvPr/>
-        </p:nvSpPr>
-        <p:spPr>
-          <a:xfrm>
-            <a:off x="502920" y="3886200"/>
-            <a:ext cx="3611880" cy="2148840"/>
-          </a:xfrm>
-          <a:prstGeom prst="rect">
-            <a:avLst/>
-          </a:prstGeom>
-          <a:solidFill>
-            <a:srgbClr val="F2F6FC"/>
-          </a:solidFill>
-          <a:ln>
-            <a:noFill/>
-          </a:ln>
-          <a:effectLst/>
-        </p:spPr>
-        <p:style>
-          <a:lnRef idx="1">
-            <a:schemeClr val="accent1"/>
-          </a:lnRef>
-          <a:fillRef idx="3">
-            <a:schemeClr val="accent1"/>
-          </a:fillRef>
-          <a:effectRef idx="2">
-            <a:schemeClr val="accent1"/>
-          </a:effectRef>
-          <a:fontRef idx="minor">
-            <a:schemeClr val="lt1"/>
-          </a:fontRef>
-        </p:style>
-        <p:txBody>
-          <a:bodyPr rtlCol="0" anchor="ctr"/>
-          <a:lstStyle/>
-          <a:p>
-            <a:pPr algn="ctr"/>
-          </a:p>
-        </p:txBody>
-      </p:sp>
-      <p:sp>
-        <p:nvSpPr>
-          <p:cNvPr id="15" name="Rectangle 14"/>
-          <p:cNvSpPr/>
-          <p:nvPr/>
-        </p:nvSpPr>
-        <p:spPr>
-          <a:xfrm>
-            <a:off x="502920" y="3886200"/>
-            <a:ext cx="3611880" cy="64008"/>
-          </a:xfrm>
-          <a:prstGeom prst="rect">
-            <a:avLst/>
-          </a:prstGeom>
-          <a:solidFill>
-            <a:srgbClr val="F5A623"/>
-          </a:solidFill>
-          <a:ln>
-            <a:noFill/>
-          </a:ln>
-          <a:effectLst/>
-        </p:spPr>
-        <p:style>
-          <a:lnRef idx="1">
-            <a:schemeClr val="accent1"/>
-          </a:lnRef>
-          <a:fillRef idx="3">
-            <a:schemeClr val="accent1"/>
-          </a:fillRef>
-          <a:effectRef idx="2">
-            <a:schemeClr val="accent1"/>
-          </a:effectRef>
-          <a:fontRef idx="minor">
-            <a:schemeClr val="lt1"/>
-          </a:fontRef>
-        </p:style>
-        <p:txBody>
-          <a:bodyPr rtlCol="0" anchor="ctr"/>
-          <a:lstStyle/>
-          <a:p>
-            <a:pPr algn="ctr"/>
-          </a:p>
-        </p:txBody>
-      </p:sp>
-      <p:sp>
-        <p:nvSpPr>
-          <p:cNvPr id="16" name="TextBox 15"/>
-          <p:cNvSpPr txBox="1"/>
-          <p:nvPr/>
-        </p:nvSpPr>
-        <p:spPr>
-          <a:xfrm>
-            <a:off x="704088" y="4069080"/>
-            <a:ext cx="3246120" cy="1828800"/>
-          </a:xfrm>
-          <a:prstGeom prst="rect">
-            <a:avLst/>
-          </a:prstGeom>
-          <a:noFill/>
-        </p:spPr>
-        <p:txBody>
-          <a:bodyPr wrap="square">
-            <a:spAutoFit/>
-          </a:bodyPr>
-          <a:lstStyle/>
-          <a:p>
-            <a:pPr>
-              <a:spcAft>
-                <a:spcPts val="600"/>
-              </a:spcAft>
-            </a:pPr>
-            <a:r>
-              <a:rPr sz="1500" b="1">
-                <a:solidFill>
-                  <a:srgbClr val="0F2A4A"/>
-                </a:solidFill>
-                <a:latin typeface="Segoe UI"/>
-              </a:rPr>
-              <a:t>Messaging</a:t>
-            </a:r>
-          </a:p>
-          <a:p>
-            <a:pPr>
-              <a:spcAft>
-                <a:spcPts val="300"/>
-              </a:spcAft>
-            </a:pPr>
-            <a:r>
-              <a:rPr sz="1100">
-                <a:solidFill>
-                  <a:srgbClr val="5B6B7B"/>
-                </a:solidFill>
-                <a:latin typeface="Segoe UI"/>
-              </a:rPr>
-              <a:t>•  Send announcements to students</a:t>
-            </a:r>
-          </a:p>
-          <a:p>
-            <a:pPr>
-              <a:spcAft>
-                <a:spcPts val="300"/>
-              </a:spcAft>
-            </a:pPr>
-            <a:r>
-              <a:rPr sz="1100">
-                <a:solidFill>
-                  <a:srgbClr val="5B6B7B"/>
-                </a:solidFill>
-                <a:latin typeface="Segoe UI"/>
-              </a:rPr>
-              <a:t>•  One-to-one chat support</a:t>
-            </a:r>
-          </a:p>
-        </p:txBody>
-      </p:sp>
-      <p:sp>
-        <p:nvSpPr>
-          <p:cNvPr id="17" name="Rectangle 16"/>
-          <p:cNvSpPr/>
-          <p:nvPr/>
-        </p:nvSpPr>
-        <p:spPr>
-          <a:xfrm>
-            <a:off x="4343400" y="3886200"/>
-            <a:ext cx="3611880" cy="2148840"/>
-          </a:xfrm>
-          <a:prstGeom prst="rect">
-            <a:avLst/>
-          </a:prstGeom>
-          <a:solidFill>
-            <a:srgbClr val="F2F6FC"/>
-          </a:solidFill>
-          <a:ln>
-            <a:noFill/>
-          </a:ln>
-          <a:effectLst/>
-        </p:spPr>
-        <p:style>
-          <a:lnRef idx="1">
-            <a:schemeClr val="accent1"/>
-          </a:lnRef>
-          <a:fillRef idx="3">
-            <a:schemeClr val="accent1"/>
-          </a:fillRef>
-          <a:effectRef idx="2">
-            <a:schemeClr val="accent1"/>
-          </a:effectRef>
-          <a:fontRef idx="minor">
-            <a:schemeClr val="lt1"/>
-          </a:fontRef>
-        </p:style>
-        <p:txBody>
-          <a:bodyPr rtlCol="0" anchor="ctr"/>
-          <a:lstStyle/>
-          <a:p>
-            <a:pPr algn="ctr"/>
-          </a:p>
-        </p:txBody>
-      </p:sp>
-      <p:sp>
-        <p:nvSpPr>
-          <p:cNvPr id="18" name="Rectangle 17"/>
-          <p:cNvSpPr/>
-          <p:nvPr/>
-        </p:nvSpPr>
-        <p:spPr>
-          <a:xfrm>
-            <a:off x="4343400" y="3886200"/>
-            <a:ext cx="3611880" cy="64008"/>
-          </a:xfrm>
-          <a:prstGeom prst="rect">
-            <a:avLst/>
-          </a:prstGeom>
-          <a:solidFill>
-            <a:srgbClr val="F5A623"/>
-          </a:solidFill>
-          <a:ln>
-            <a:noFill/>
-          </a:ln>
-          <a:effectLst/>
-        </p:spPr>
-        <p:style>
-          <a:lnRef idx="1">
-            <a:schemeClr val="accent1"/>
-          </a:lnRef>
-          <a:fillRef idx="3">
-            <a:schemeClr val="accent1"/>
-          </a:fillRef>
-          <a:effectRef idx="2">
-            <a:schemeClr val="accent1"/>
-          </a:effectRef>
-          <a:fontRef idx="minor">
-            <a:schemeClr val="lt1"/>
-          </a:fontRef>
-        </p:style>
-        <p:txBody>
-          <a:bodyPr rtlCol="0" anchor="ctr"/>
-          <a:lstStyle/>
-          <a:p>
-            <a:pPr algn="ctr"/>
-          </a:p>
-        </p:txBody>
-      </p:sp>
-      <p:sp>
-        <p:nvSpPr>
-          <p:cNvPr id="19" name="TextBox 18"/>
-          <p:cNvSpPr txBox="1"/>
-          <p:nvPr/>
-        </p:nvSpPr>
-        <p:spPr>
-          <a:xfrm>
-            <a:off x="4544568" y="4069080"/>
-            <a:ext cx="3246120" cy="1828800"/>
-          </a:xfrm>
-          <a:prstGeom prst="rect">
-            <a:avLst/>
-          </a:prstGeom>
-          <a:noFill/>
-        </p:spPr>
-        <p:txBody>
-          <a:bodyPr wrap="square">
-            <a:spAutoFit/>
-          </a:bodyPr>
-          <a:lstStyle/>
-          <a:p>
-            <a:pPr>
-              <a:spcAft>
-                <a:spcPts val="600"/>
-              </a:spcAft>
-            </a:pPr>
-            <a:r>
-              <a:rPr sz="1500" b="1">
-                <a:solidFill>
-                  <a:srgbClr val="0F2A4A"/>
-                </a:solidFill>
-                <a:latin typeface="Segoe UI"/>
-              </a:rPr>
-              <a:t>Ticket Approval</a:t>
-            </a:r>
-          </a:p>
-          <a:p>
-            <a:pPr>
-              <a:spcAft>
-                <a:spcPts val="300"/>
-              </a:spcAft>
-            </a:pPr>
-            <a:r>
-              <a:rPr sz="1100">
-                <a:solidFill>
-                  <a:srgbClr val="5B6B7B"/>
-                </a:solidFill>
-                <a:latin typeface="Segoe UI"/>
-              </a:rPr>
-              <a:t>•  Review student support requests</a:t>
-            </a:r>
-          </a:p>
-          <a:p>
-            <a:pPr>
-              <a:spcAft>
-                <a:spcPts val="300"/>
-              </a:spcAft>
-            </a:pPr>
-            <a:r>
-              <a:rPr sz="1100">
-                <a:solidFill>
-                  <a:srgbClr val="5B6B7B"/>
-                </a:solidFill>
-                <a:latin typeface="Segoe UI"/>
-              </a:rPr>
-              <a:t>•  Approve or resolve quickly</a:t>
-            </a:r>
-          </a:p>
-        </p:txBody>
-      </p:sp>
-      <p:sp>
-        <p:nvSpPr>
-          <p:cNvPr id="20" name="Rectangle 19"/>
-          <p:cNvSpPr/>
-          <p:nvPr/>
-        </p:nvSpPr>
-        <p:spPr>
-          <a:xfrm>
-            <a:off x="8183880" y="3886200"/>
-            <a:ext cx="3611880" cy="2148840"/>
-          </a:xfrm>
-          <a:prstGeom prst="rect">
-            <a:avLst/>
-          </a:prstGeom>
-          <a:solidFill>
-            <a:srgbClr val="F2F6FC"/>
-          </a:solidFill>
-          <a:ln>
-            <a:noFill/>
-          </a:ln>
-          <a:effectLst/>
-        </p:spPr>
-        <p:style>
-          <a:lnRef idx="1">
-            <a:schemeClr val="accent1"/>
-          </a:lnRef>
-          <a:fillRef idx="3">
-            <a:schemeClr val="accent1"/>
-          </a:fillRef>
-          <a:effectRef idx="2">
-            <a:schemeClr val="accent1"/>
-          </a:effectRef>
-          <a:fontRef idx="minor">
-            <a:schemeClr val="lt1"/>
-          </a:fontRef>
-        </p:style>
-        <p:txBody>
-          <a:bodyPr rtlCol="0" anchor="ctr"/>
-          <a:lstStyle/>
-          <a:p>
-            <a:pPr algn="ctr"/>
-          </a:p>
-        </p:txBody>
-      </p:sp>
-      <p:sp>
-        <p:nvSpPr>
-          <p:cNvPr id="21" name="Rectangle 20"/>
-          <p:cNvSpPr/>
-          <p:nvPr/>
-        </p:nvSpPr>
-        <p:spPr>
-          <a:xfrm>
-            <a:off x="8183880" y="3886200"/>
-            <a:ext cx="3611880" cy="64008"/>
-          </a:xfrm>
-          <a:prstGeom prst="rect">
-            <a:avLst/>
-          </a:prstGeom>
-          <a:solidFill>
-            <a:srgbClr val="F5A623"/>
-          </a:solidFill>
-          <a:ln>
-            <a:noFill/>
-          </a:ln>
-          <a:effectLst/>
-        </p:spPr>
-        <p:style>
-          <a:lnRef idx="1">
-            <a:schemeClr val="accent1"/>
-          </a:lnRef>
-          <a:fillRef idx="3">
-            <a:schemeClr val="accent1"/>
-          </a:fillRef>
-          <a:effectRef idx="2">
-            <a:schemeClr val="accent1"/>
-          </a:effectRef>
-          <a:fontRef idx="minor">
-            <a:schemeClr val="lt1"/>
-          </a:fontRef>
-        </p:style>
-        <p:txBody>
-          <a:bodyPr rtlCol="0" anchor="ctr"/>
-          <a:lstStyle/>
-          <a:p>
-            <a:pPr algn="ctr"/>
-          </a:p>
-        </p:txBody>
-      </p:sp>
-      <p:sp>
-        <p:nvSpPr>
-          <p:cNvPr id="22" name="TextBox 21"/>
-          <p:cNvSpPr txBox="1"/>
-          <p:nvPr/>
-        </p:nvSpPr>
-        <p:spPr>
-          <a:xfrm>
-            <a:off x="8385048" y="4069080"/>
-            <a:ext cx="3246120" cy="1828800"/>
-          </a:xfrm>
-          <a:prstGeom prst="rect">
-            <a:avLst/>
-          </a:prstGeom>
-          <a:noFill/>
-        </p:spPr>
-        <p:txBody>
-          <a:bodyPr wrap="square">
-            <a:spAutoFit/>
-          </a:bodyPr>
-          <a:lstStyle/>
-          <a:p>
-            <a:pPr>
-              <a:spcAft>
-                <a:spcPts val="600"/>
-              </a:spcAft>
-            </a:pPr>
-            <a:r>
-              <a:rPr sz="1500" b="1">
-                <a:solidFill>
-                  <a:srgbClr val="0F2A4A"/>
-                </a:solidFill>
-                <a:latin typeface="Segoe UI"/>
-              </a:rPr>
-              <a:t>Grading &amp; Reports</a:t>
-            </a:r>
-          </a:p>
-          <a:p>
-            <a:pPr>
-              <a:spcAft>
-                <a:spcPts val="300"/>
-              </a:spcAft>
-            </a:pPr>
-            <a:r>
-              <a:rPr sz="1100">
-                <a:solidFill>
-                  <a:srgbClr val="5B6B7B"/>
-                </a:solidFill>
-                <a:latin typeface="Segoe UI"/>
-              </a:rPr>
-              <a:t>•  Gradebook, grade scales &amp; subjects</a:t>
-            </a:r>
-          </a:p>
-          <a:p>
-            <a:pPr>
-              <a:spcAft>
-                <a:spcPts val="300"/>
-              </a:spcAft>
-            </a:pPr>
-            <a:r>
-              <a:rPr sz="1100">
-                <a:solidFill>
-                  <a:srgbClr val="5B6B7B"/>
-                </a:solidFill>
-                <a:latin typeface="Segoe UI"/>
-              </a:rPr>
-              <a:t>•  Class performance reports</a:t>
+                  <a:srgbClr val="6E6E6E"/>
+                </a:solidFill>
+                <a:latin typeface="Segoe UI"/>
+              </a:rPr>
+              <a:t>—  Receive announcements</a:t>
             </a:r>
           </a:p>
         </p:txBody>
@@ -8041,13 +8099,13 @@
         <p:spPr>
           <a:xfrm>
             <a:off x="0" y="0"/>
-            <a:ext cx="12191695" cy="1234440"/>
+            <a:ext cx="12191695" cy="6858000"/>
           </a:xfrm>
           <a:prstGeom prst="rect">
             <a:avLst/>
           </a:prstGeom>
           <a:solidFill>
-            <a:srgbClr val="0F2A4A"/>
+            <a:srgbClr val="1A1A1A"/>
           </a:solidFill>
           <a:ln>
             <a:noFill/>
@@ -8084,14 +8142,14 @@
         </p:nvSpPr>
         <p:spPr>
           <a:xfrm>
-            <a:off x="0" y="0"/>
-            <a:ext cx="164592" cy="1234440"/>
+            <a:off x="822960" y="777240"/>
+            <a:ext cx="822960" cy="109728"/>
           </a:xfrm>
           <a:prstGeom prst="rect">
             <a:avLst/>
           </a:prstGeom>
           <a:solidFill>
-            <a:srgbClr val="F5A623"/>
+            <a:srgbClr val="FFFFFF"/>
           </a:solidFill>
           <a:ln>
             <a:noFill/>
@@ -8128,8 +8186,8 @@
         </p:nvSpPr>
         <p:spPr>
           <a:xfrm>
-            <a:off x="502920" y="164592"/>
-            <a:ext cx="10972800" cy="914400"/>
+            <a:off x="822960" y="960120"/>
+            <a:ext cx="10515600" cy="914400"/>
           </a:xfrm>
           <a:prstGeom prst="rect">
             <a:avLst/>
@@ -8147,17 +8205,17 @@
                 <a:spcPts val="0"/>
               </a:spcBef>
               <a:spcAft>
-                <a:spcPts val="200"/>
-              </a:spcAft>
-            </a:pPr>
-            <a:r>
-              <a:rPr sz="1200" b="1">
-                <a:solidFill>
-                  <a:srgbClr val="9DC2F0"/>
-                </a:solidFill>
-                <a:latin typeface="Segoe UI"/>
-              </a:rPr>
-              <a:t>MODULES &amp; FEATURES — STUDENT</a:t>
+                <a:spcPts val="300"/>
+              </a:spcAft>
+            </a:pPr>
+            <a:r>
+              <a:rPr sz="1300" b="1">
+                <a:solidFill>
+                  <a:srgbClr val="C9C9C9"/>
+                </a:solidFill>
+                <a:latin typeface="Segoe UI"/>
+              </a:rPr>
+              <a:t>KEY BENEFITS</a:t>
             </a:r>
           </a:p>
           <a:p>
@@ -8170,13 +8228,13 @@
               </a:spcAft>
             </a:pPr>
             <a:r>
-              <a:rPr sz="2800" b="1">
+              <a:rPr sz="3400" b="1">
                 <a:solidFill>
                   <a:srgbClr val="FFFFFF"/>
                 </a:solidFill>
                 <a:latin typeface="Segoe UI"/>
               </a:rPr>
-              <a:t>What It Does for Students</a:t>
+              <a:t>Why It Matters</a:t>
             </a:r>
           </a:p>
         </p:txBody>
@@ -8189,14 +8247,14 @@
         </p:nvSpPr>
         <p:spPr>
           <a:xfrm>
-            <a:off x="502920" y="1508760"/>
-            <a:ext cx="5440680" cy="2286000"/>
+            <a:off x="822960" y="2468880"/>
+            <a:ext cx="64008" cy="1463040"/>
           </a:xfrm>
           <a:prstGeom prst="rect">
             <a:avLst/>
           </a:prstGeom>
           <a:solidFill>
-            <a:srgbClr val="F2F6FC"/>
+            <a:srgbClr val="C9C9C9"/>
           </a:solidFill>
           <a:ln>
             <a:noFill/>
@@ -8227,20 +8285,81 @@
       </p:sp>
       <p:sp>
         <p:nvSpPr>
-          <p:cNvPr id="6" name="Rectangle 5"/>
+          <p:cNvPr id="6" name="TextBox 5"/>
+          <p:cNvSpPr txBox="1"/>
+          <p:nvPr/>
+        </p:nvSpPr>
+        <p:spPr>
+          <a:xfrm>
+            <a:off x="1097280" y="2560320"/>
+            <a:ext cx="4846320" cy="1280160"/>
+          </a:xfrm>
+          <a:prstGeom prst="rect">
+            <a:avLst/>
+          </a:prstGeom>
+          <a:noFill/>
+        </p:spPr>
+        <p:txBody>
+          <a:bodyPr wrap="square" anchor="t" lIns="0" rIns="0" tIns="0" bIns="0">
+            <a:spAutoFit/>
+          </a:bodyPr>
+          <a:lstStyle/>
+          <a:p>
+            <a:pPr algn="l">
+              <a:spcBef>
+                <a:spcPts val="0"/>
+              </a:spcBef>
+              <a:spcAft>
+                <a:spcPts val="400"/>
+              </a:spcAft>
+            </a:pPr>
+            <a:r>
+              <a:rPr sz="1800" b="1">
+                <a:solidFill>
+                  <a:srgbClr val="FFFFFF"/>
+                </a:solidFill>
+                <a:latin typeface="Segoe UI"/>
+              </a:rPr>
+              <a:t>Saves time</a:t>
+            </a:r>
+          </a:p>
+          <a:p>
+            <a:pPr algn="l">
+              <a:spcBef>
+                <a:spcPts val="0"/>
+              </a:spcBef>
+              <a:spcAft>
+                <a:spcPts val="0"/>
+              </a:spcAft>
+            </a:pPr>
+            <a:r>
+              <a:rPr sz="1300" b="0">
+                <a:solidFill>
+                  <a:srgbClr val="C4C4C4"/>
+                </a:solidFill>
+                <a:latin typeface="Segoe UI"/>
+              </a:rPr>
+              <a:t>Manage every PC from one screen - no walking station to station.</a:t>
+            </a:r>
+          </a:p>
+        </p:txBody>
+      </p:sp>
+      <p:sp>
+        <p:nvSpPr>
+          <p:cNvPr id="7" name="Rectangle 6"/>
           <p:cNvSpPr/>
           <p:nvPr/>
         </p:nvSpPr>
         <p:spPr>
           <a:xfrm>
-            <a:off x="502920" y="1508760"/>
-            <a:ext cx="5440680" cy="64008"/>
+            <a:off x="6400800" y="2468880"/>
+            <a:ext cx="64008" cy="1463040"/>
           </a:xfrm>
           <a:prstGeom prst="rect">
             <a:avLst/>
           </a:prstGeom>
           <a:solidFill>
-            <a:srgbClr val="2C7BE5"/>
+            <a:srgbClr val="C9C9C9"/>
           </a:solidFill>
           <a:ln>
             <a:noFill/>
@@ -8271,14 +8390,14 @@
       </p:sp>
       <p:sp>
         <p:nvSpPr>
-          <p:cNvPr id="7" name="TextBox 6"/>
+          <p:cNvPr id="8" name="TextBox 7"/>
           <p:cNvSpPr txBox="1"/>
           <p:nvPr/>
         </p:nvSpPr>
         <p:spPr>
           <a:xfrm>
-            <a:off x="704088" y="1691640"/>
-            <a:ext cx="5074920" cy="1965960"/>
+            <a:off x="6675120" y="2560320"/>
+            <a:ext cx="4846320" cy="1280160"/>
           </a:xfrm>
           <a:prstGeom prst="rect">
             <a:avLst/>
@@ -8286,76 +8405,66 @@
           <a:noFill/>
         </p:spPr>
         <p:txBody>
-          <a:bodyPr wrap="square">
+          <a:bodyPr wrap="square" anchor="t" lIns="0" rIns="0" tIns="0" bIns="0">
             <a:spAutoFit/>
           </a:bodyPr>
           <a:lstStyle/>
           <a:p>
-            <a:pPr>
-              <a:spcAft>
-                <a:spcPts val="600"/>
-              </a:spcAft>
-            </a:pPr>
-            <a:r>
-              <a:rPr sz="1500" b="1">
-                <a:solidFill>
-                  <a:srgbClr val="0F2A4A"/>
-                </a:solidFill>
-                <a:latin typeface="Segoe UI"/>
-              </a:rPr>
-              <a:t>Session Dashboard</a:t>
-            </a:r>
-          </a:p>
-          <a:p>
-            <a:pPr>
-              <a:spcAft>
-                <a:spcPts val="300"/>
-              </a:spcAft>
-            </a:pPr>
-            <a:r>
-              <a:rPr sz="1100">
-                <a:solidFill>
-                  <a:srgbClr val="5B6B7B"/>
-                </a:solidFill>
-                <a:latin typeface="Segoe UI"/>
-              </a:rPr>
-              <a:t>•  See current class &amp; session info</a:t>
-            </a:r>
-          </a:p>
-          <a:p>
-            <a:pPr>
-              <a:spcAft>
-                <a:spcPts val="300"/>
-              </a:spcAft>
-            </a:pPr>
-            <a:r>
-              <a:rPr sz="1100">
-                <a:solidFill>
-                  <a:srgbClr val="5B6B7B"/>
-                </a:solidFill>
-                <a:latin typeface="Segoe UI"/>
-              </a:rPr>
-              <a:t>•  Stay aware of lab activity</a:t>
-            </a:r>
-          </a:p>
-        </p:txBody>
-      </p:sp>
-      <p:sp>
-        <p:nvSpPr>
-          <p:cNvPr id="8" name="Rectangle 7"/>
+            <a:pPr algn="l">
+              <a:spcBef>
+                <a:spcPts val="0"/>
+              </a:spcBef>
+              <a:spcAft>
+                <a:spcPts val="400"/>
+              </a:spcAft>
+            </a:pPr>
+            <a:r>
+              <a:rPr sz="1800" b="1">
+                <a:solidFill>
+                  <a:srgbClr val="FFFFFF"/>
+                </a:solidFill>
+                <a:latin typeface="Segoe UI"/>
+              </a:rPr>
+              <a:t>Better focus</a:t>
+            </a:r>
+          </a:p>
+          <a:p>
+            <a:pPr algn="l">
+              <a:spcBef>
+                <a:spcPts val="0"/>
+              </a:spcBef>
+              <a:spcAft>
+                <a:spcPts val="0"/>
+              </a:spcAft>
+            </a:pPr>
+            <a:r>
+              <a:rPr sz="1300" b="0">
+                <a:solidFill>
+                  <a:srgbClr val="C4C4C4"/>
+                </a:solidFill>
+                <a:latin typeface="Segoe UI"/>
+              </a:rPr>
+              <a:t>Lock screens &amp; project demos to keep students on task.</a:t>
+            </a:r>
+          </a:p>
+        </p:txBody>
+      </p:sp>
+      <p:sp>
+        <p:nvSpPr>
+          <p:cNvPr id="9" name="Rectangle 8"/>
           <p:cNvSpPr/>
           <p:nvPr/>
         </p:nvSpPr>
         <p:spPr>
           <a:xfrm>
-            <a:off x="6263640" y="1508760"/>
-            <a:ext cx="5440680" cy="2286000"/>
+            <a:off x="822960" y="4251960"/>
+            <a:ext cx="64008" cy="1463040"/>
           </a:xfrm>
           <a:prstGeom prst="rect">
             <a:avLst/>
           </a:prstGeom>
           <a:solidFill>
-            <a:srgbClr val="F2F6FC"/>
+            <a:srgbClr val="C9C9C9"/>
           </a:solidFill>
           <a:ln>
             <a:noFill/>
@@ -8386,20 +8495,81 @@
       </p:sp>
       <p:sp>
         <p:nvSpPr>
-          <p:cNvPr id="9" name="Rectangle 8"/>
+          <p:cNvPr id="10" name="TextBox 9"/>
+          <p:cNvSpPr txBox="1"/>
+          <p:nvPr/>
+        </p:nvSpPr>
+        <p:spPr>
+          <a:xfrm>
+            <a:off x="1097280" y="4343400"/>
+            <a:ext cx="4846320" cy="1280160"/>
+          </a:xfrm>
+          <a:prstGeom prst="rect">
+            <a:avLst/>
+          </a:prstGeom>
+          <a:noFill/>
+        </p:spPr>
+        <p:txBody>
+          <a:bodyPr wrap="square" anchor="t" lIns="0" rIns="0" tIns="0" bIns="0">
+            <a:spAutoFit/>
+          </a:bodyPr>
+          <a:lstStyle/>
+          <a:p>
+            <a:pPr algn="l">
+              <a:spcBef>
+                <a:spcPts val="0"/>
+              </a:spcBef>
+              <a:spcAft>
+                <a:spcPts val="400"/>
+              </a:spcAft>
+            </a:pPr>
+            <a:r>
+              <a:rPr sz="1800" b="1">
+                <a:solidFill>
+                  <a:srgbClr val="FFFFFF"/>
+                </a:solidFill>
+                <a:latin typeface="Segoe UI"/>
+              </a:rPr>
+              <a:t>Faster support</a:t>
+            </a:r>
+          </a:p>
+          <a:p>
+            <a:pPr algn="l">
+              <a:spcBef>
+                <a:spcPts val="0"/>
+              </a:spcBef>
+              <a:spcAft>
+                <a:spcPts val="0"/>
+              </a:spcAft>
+            </a:pPr>
+            <a:r>
+              <a:rPr sz="1300" b="0">
+                <a:solidFill>
+                  <a:srgbClr val="C4C4C4"/>
+                </a:solidFill>
+                <a:latin typeface="Segoe UI"/>
+              </a:rPr>
+              <a:t>Tickets &amp; messaging resolve lab issues quickly.</a:t>
+            </a:r>
+          </a:p>
+        </p:txBody>
+      </p:sp>
+      <p:sp>
+        <p:nvSpPr>
+          <p:cNvPr id="11" name="Rectangle 10"/>
           <p:cNvSpPr/>
           <p:nvPr/>
         </p:nvSpPr>
         <p:spPr>
           <a:xfrm>
-            <a:off x="6263640" y="1508760"/>
-            <a:ext cx="5440680" cy="64008"/>
+            <a:off x="6400800" y="4251960"/>
+            <a:ext cx="64008" cy="1463040"/>
           </a:xfrm>
           <a:prstGeom prst="rect">
             <a:avLst/>
           </a:prstGeom>
           <a:solidFill>
-            <a:srgbClr val="2C7BE5"/>
+            <a:srgbClr val="C9C9C9"/>
           </a:solidFill>
           <a:ln>
             <a:noFill/>
@@ -8430,509 +8600,14 @@
       </p:sp>
       <p:sp>
         <p:nvSpPr>
-          <p:cNvPr id="10" name="TextBox 9"/>
+          <p:cNvPr id="12" name="TextBox 11"/>
           <p:cNvSpPr txBox="1"/>
           <p:nvPr/>
         </p:nvSpPr>
         <p:spPr>
           <a:xfrm>
-            <a:off x="6464808" y="1691640"/>
-            <a:ext cx="5074920" cy="1965960"/>
-          </a:xfrm>
-          <a:prstGeom prst="rect">
-            <a:avLst/>
-          </a:prstGeom>
-          <a:noFill/>
-        </p:spPr>
-        <p:txBody>
-          <a:bodyPr wrap="square">
-            <a:spAutoFit/>
-          </a:bodyPr>
-          <a:lstStyle/>
-          <a:p>
-            <a:pPr>
-              <a:spcAft>
-                <a:spcPts val="600"/>
-              </a:spcAft>
-            </a:pPr>
-            <a:r>
-              <a:rPr sz="1500" b="1">
-                <a:solidFill>
-                  <a:srgbClr val="0F2A4A"/>
-                </a:solidFill>
-                <a:latin typeface="Segoe UI"/>
-              </a:rPr>
-              <a:t>Support Tickets</a:t>
-            </a:r>
-          </a:p>
-          <a:p>
-            <a:pPr>
-              <a:spcAft>
-                <a:spcPts val="300"/>
-              </a:spcAft>
-            </a:pPr>
-            <a:r>
-              <a:rPr sz="1100">
-                <a:solidFill>
-                  <a:srgbClr val="5B6B7B"/>
-                </a:solidFill>
-                <a:latin typeface="Segoe UI"/>
-              </a:rPr>
-              <a:t>•  Report PC or software issues</a:t>
-            </a:r>
-          </a:p>
-          <a:p>
-            <a:pPr>
-              <a:spcAft>
-                <a:spcPts val="300"/>
-              </a:spcAft>
-            </a:pPr>
-            <a:r>
-              <a:rPr sz="1100">
-                <a:solidFill>
-                  <a:srgbClr val="5B6B7B"/>
-                </a:solidFill>
-                <a:latin typeface="Segoe UI"/>
-              </a:rPr>
-              <a:t>•  Track request status</a:t>
-            </a:r>
-          </a:p>
-        </p:txBody>
-      </p:sp>
-      <p:sp>
-        <p:nvSpPr>
-          <p:cNvPr id="11" name="Rectangle 10"/>
-          <p:cNvSpPr/>
-          <p:nvPr/>
-        </p:nvSpPr>
-        <p:spPr>
-          <a:xfrm>
-            <a:off x="502920" y="4023360"/>
-            <a:ext cx="5440680" cy="2286000"/>
-          </a:xfrm>
-          <a:prstGeom prst="rect">
-            <a:avLst/>
-          </a:prstGeom>
-          <a:solidFill>
-            <a:srgbClr val="F2F6FC"/>
-          </a:solidFill>
-          <a:ln>
-            <a:noFill/>
-          </a:ln>
-          <a:effectLst/>
-        </p:spPr>
-        <p:style>
-          <a:lnRef idx="1">
-            <a:schemeClr val="accent1"/>
-          </a:lnRef>
-          <a:fillRef idx="3">
-            <a:schemeClr val="accent1"/>
-          </a:fillRef>
-          <a:effectRef idx="2">
-            <a:schemeClr val="accent1"/>
-          </a:effectRef>
-          <a:fontRef idx="minor">
-            <a:schemeClr val="lt1"/>
-          </a:fontRef>
-        </p:style>
-        <p:txBody>
-          <a:bodyPr rtlCol="0" anchor="ctr"/>
-          <a:lstStyle/>
-          <a:p>
-            <a:pPr algn="ctr"/>
-          </a:p>
-        </p:txBody>
-      </p:sp>
-      <p:sp>
-        <p:nvSpPr>
-          <p:cNvPr id="12" name="Rectangle 11"/>
-          <p:cNvSpPr/>
-          <p:nvPr/>
-        </p:nvSpPr>
-        <p:spPr>
-          <a:xfrm>
-            <a:off x="502920" y="4023360"/>
-            <a:ext cx="5440680" cy="64008"/>
-          </a:xfrm>
-          <a:prstGeom prst="rect">
-            <a:avLst/>
-          </a:prstGeom>
-          <a:solidFill>
-            <a:srgbClr val="2C7BE5"/>
-          </a:solidFill>
-          <a:ln>
-            <a:noFill/>
-          </a:ln>
-          <a:effectLst/>
-        </p:spPr>
-        <p:style>
-          <a:lnRef idx="1">
-            <a:schemeClr val="accent1"/>
-          </a:lnRef>
-          <a:fillRef idx="3">
-            <a:schemeClr val="accent1"/>
-          </a:fillRef>
-          <a:effectRef idx="2">
-            <a:schemeClr val="accent1"/>
-          </a:effectRef>
-          <a:fontRef idx="minor">
-            <a:schemeClr val="lt1"/>
-          </a:fontRef>
-        </p:style>
-        <p:txBody>
-          <a:bodyPr rtlCol="0" anchor="ctr"/>
-          <a:lstStyle/>
-          <a:p>
-            <a:pPr algn="ctr"/>
-          </a:p>
-        </p:txBody>
-      </p:sp>
-      <p:sp>
-        <p:nvSpPr>
-          <p:cNvPr id="13" name="TextBox 12"/>
-          <p:cNvSpPr txBox="1"/>
-          <p:nvPr/>
-        </p:nvSpPr>
-        <p:spPr>
-          <a:xfrm>
-            <a:off x="704088" y="4206240"/>
-            <a:ext cx="5074920" cy="1965960"/>
-          </a:xfrm>
-          <a:prstGeom prst="rect">
-            <a:avLst/>
-          </a:prstGeom>
-          <a:noFill/>
-        </p:spPr>
-        <p:txBody>
-          <a:bodyPr wrap="square">
-            <a:spAutoFit/>
-          </a:bodyPr>
-          <a:lstStyle/>
-          <a:p>
-            <a:pPr>
-              <a:spcAft>
-                <a:spcPts val="600"/>
-              </a:spcAft>
-            </a:pPr>
-            <a:r>
-              <a:rPr sz="1500" b="1">
-                <a:solidFill>
-                  <a:srgbClr val="0F2A4A"/>
-                </a:solidFill>
-                <a:latin typeface="Segoe UI"/>
-              </a:rPr>
-              <a:t>Messaging</a:t>
-            </a:r>
-          </a:p>
-          <a:p>
-            <a:pPr>
-              <a:spcAft>
-                <a:spcPts val="300"/>
-              </a:spcAft>
-            </a:pPr>
-            <a:r>
-              <a:rPr sz="1100">
-                <a:solidFill>
-                  <a:srgbClr val="5B6B7B"/>
-                </a:solidFill>
-                <a:latin typeface="Segoe UI"/>
-              </a:rPr>
-              <a:t>•  Chat with the instructor</a:t>
-            </a:r>
-          </a:p>
-          <a:p>
-            <a:pPr>
-              <a:spcAft>
-                <a:spcPts val="300"/>
-              </a:spcAft>
-            </a:pPr>
-            <a:r>
-              <a:rPr sz="1100">
-                <a:solidFill>
-                  <a:srgbClr val="5B6B7B"/>
-                </a:solidFill>
-                <a:latin typeface="Segoe UI"/>
-              </a:rPr>
-              <a:t>•  Receive announcements</a:t>
-            </a:r>
-          </a:p>
-        </p:txBody>
-      </p:sp>
-      <p:sp>
-        <p:nvSpPr>
-          <p:cNvPr id="14" name="Rectangle 13"/>
-          <p:cNvSpPr/>
-          <p:nvPr/>
-        </p:nvSpPr>
-        <p:spPr>
-          <a:xfrm>
-            <a:off x="6263640" y="4023360"/>
-            <a:ext cx="5440680" cy="2286000"/>
-          </a:xfrm>
-          <a:prstGeom prst="rect">
-            <a:avLst/>
-          </a:prstGeom>
-          <a:solidFill>
-            <a:srgbClr val="F2F6FC"/>
-          </a:solidFill>
-          <a:ln>
-            <a:noFill/>
-          </a:ln>
-          <a:effectLst/>
-        </p:spPr>
-        <p:style>
-          <a:lnRef idx="1">
-            <a:schemeClr val="accent1"/>
-          </a:lnRef>
-          <a:fillRef idx="3">
-            <a:schemeClr val="accent1"/>
-          </a:fillRef>
-          <a:effectRef idx="2">
-            <a:schemeClr val="accent1"/>
-          </a:effectRef>
-          <a:fontRef idx="minor">
-            <a:schemeClr val="lt1"/>
-          </a:fontRef>
-        </p:style>
-        <p:txBody>
-          <a:bodyPr rtlCol="0" anchor="ctr"/>
-          <a:lstStyle/>
-          <a:p>
-            <a:pPr algn="ctr"/>
-          </a:p>
-        </p:txBody>
-      </p:sp>
-      <p:sp>
-        <p:nvSpPr>
-          <p:cNvPr id="15" name="Rectangle 14"/>
-          <p:cNvSpPr/>
-          <p:nvPr/>
-        </p:nvSpPr>
-        <p:spPr>
-          <a:xfrm>
-            <a:off x="6263640" y="4023360"/>
-            <a:ext cx="5440680" cy="64008"/>
-          </a:xfrm>
-          <a:prstGeom prst="rect">
-            <a:avLst/>
-          </a:prstGeom>
-          <a:solidFill>
-            <a:srgbClr val="2C7BE5"/>
-          </a:solidFill>
-          <a:ln>
-            <a:noFill/>
-          </a:ln>
-          <a:effectLst/>
-        </p:spPr>
-        <p:style>
-          <a:lnRef idx="1">
-            <a:schemeClr val="accent1"/>
-          </a:lnRef>
-          <a:fillRef idx="3">
-            <a:schemeClr val="accent1"/>
-          </a:fillRef>
-          <a:effectRef idx="2">
-            <a:schemeClr val="accent1"/>
-          </a:effectRef>
-          <a:fontRef idx="minor">
-            <a:schemeClr val="lt1"/>
-          </a:fontRef>
-        </p:style>
-        <p:txBody>
-          <a:bodyPr rtlCol="0" anchor="ctr"/>
-          <a:lstStyle/>
-          <a:p>
-            <a:pPr algn="ctr"/>
-          </a:p>
-        </p:txBody>
-      </p:sp>
-      <p:sp>
-        <p:nvSpPr>
-          <p:cNvPr id="16" name="TextBox 15"/>
-          <p:cNvSpPr txBox="1"/>
-          <p:nvPr/>
-        </p:nvSpPr>
-        <p:spPr>
-          <a:xfrm>
-            <a:off x="6464808" y="4206240"/>
-            <a:ext cx="5074920" cy="1965960"/>
-          </a:xfrm>
-          <a:prstGeom prst="rect">
-            <a:avLst/>
-          </a:prstGeom>
-          <a:noFill/>
-        </p:spPr>
-        <p:txBody>
-          <a:bodyPr wrap="square">
-            <a:spAutoFit/>
-          </a:bodyPr>
-          <a:lstStyle/>
-          <a:p>
-            <a:pPr>
-              <a:spcAft>
-                <a:spcPts val="600"/>
-              </a:spcAft>
-            </a:pPr>
-            <a:r>
-              <a:rPr sz="1500" b="1">
-                <a:solidFill>
-                  <a:srgbClr val="0F2A4A"/>
-                </a:solidFill>
-                <a:latin typeface="Segoe UI"/>
-              </a:rPr>
-              <a:t>My Grades</a:t>
-            </a:r>
-          </a:p>
-          <a:p>
-            <a:pPr>
-              <a:spcAft>
-                <a:spcPts val="300"/>
-              </a:spcAft>
-            </a:pPr>
-            <a:r>
-              <a:rPr sz="1100">
-                <a:solidFill>
-                  <a:srgbClr val="5B6B7B"/>
-                </a:solidFill>
-                <a:latin typeface="Segoe UI"/>
-              </a:rPr>
-              <a:t>•  View personal grades anytime</a:t>
-            </a:r>
-          </a:p>
-          <a:p>
-            <a:pPr>
-              <a:spcAft>
-                <a:spcPts val="300"/>
-              </a:spcAft>
-            </a:pPr>
-            <a:r>
-              <a:rPr sz="1100">
-                <a:solidFill>
-                  <a:srgbClr val="5B6B7B"/>
-                </a:solidFill>
-                <a:latin typeface="Segoe UI"/>
-              </a:rPr>
-              <a:t>•  Transparent grade breakdown</a:t>
-            </a:r>
-          </a:p>
-        </p:txBody>
-      </p:sp>
-    </p:spTree>
-  </p:cSld>
-  <p:clrMapOvr>
-    <a:masterClrMapping/>
-  </p:clrMapOvr>
-</p:sld>
-</file>
-
-<file path=ppt/slides/slide8.xml><?xml version="1.0" encoding="utf-8"?>
-<p:sld xmlns:a="http://schemas.openxmlformats.org/drawingml/2006/main" xmlns:p="http://schemas.openxmlformats.org/presentationml/2006/main" xmlns:r="http://schemas.openxmlformats.org/officeDocument/2006/relationships">
-  <p:cSld>
-    <p:spTree>
-      <p:nvGrpSpPr>
-        <p:cNvPr id="1" name=""/>
-        <p:cNvGrpSpPr/>
-        <p:nvPr/>
-      </p:nvGrpSpPr>
-      <p:grpSpPr/>
-      <p:sp>
-        <p:nvSpPr>
-          <p:cNvPr id="2" name="Rectangle 1"/>
-          <p:cNvSpPr/>
-          <p:nvPr/>
-        </p:nvSpPr>
-        <p:spPr>
-          <a:xfrm>
-            <a:off x="0" y="0"/>
-            <a:ext cx="12191695" cy="6858000"/>
-          </a:xfrm>
-          <a:prstGeom prst="rect">
-            <a:avLst/>
-          </a:prstGeom>
-          <a:solidFill>
-            <a:srgbClr val="0F2A4A"/>
-          </a:solidFill>
-          <a:ln>
-            <a:noFill/>
-          </a:ln>
-          <a:effectLst/>
-        </p:spPr>
-        <p:style>
-          <a:lnRef idx="1">
-            <a:schemeClr val="accent1"/>
-          </a:lnRef>
-          <a:fillRef idx="3">
-            <a:schemeClr val="accent1"/>
-          </a:fillRef>
-          <a:effectRef idx="2">
-            <a:schemeClr val="accent1"/>
-          </a:effectRef>
-          <a:fontRef idx="minor">
-            <a:schemeClr val="lt1"/>
-          </a:fontRef>
-        </p:style>
-        <p:txBody>
-          <a:bodyPr rtlCol="0" anchor="ctr"/>
-          <a:lstStyle/>
-          <a:p>
-            <a:pPr algn="ctr"/>
-          </a:p>
-        </p:txBody>
-      </p:sp>
-      <p:sp>
-        <p:nvSpPr>
-          <p:cNvPr id="3" name="Rectangle 2"/>
-          <p:cNvSpPr/>
-          <p:nvPr/>
-        </p:nvSpPr>
-        <p:spPr>
-          <a:xfrm>
-            <a:off x="822960" y="777240"/>
-            <a:ext cx="822960" cy="109728"/>
-          </a:xfrm>
-          <a:prstGeom prst="rect">
-            <a:avLst/>
-          </a:prstGeom>
-          <a:solidFill>
-            <a:srgbClr val="F5A623"/>
-          </a:solidFill>
-          <a:ln>
-            <a:noFill/>
-          </a:ln>
-          <a:effectLst/>
-        </p:spPr>
-        <p:style>
-          <a:lnRef idx="1">
-            <a:schemeClr val="accent1"/>
-          </a:lnRef>
-          <a:fillRef idx="3">
-            <a:schemeClr val="accent1"/>
-          </a:fillRef>
-          <a:effectRef idx="2">
-            <a:schemeClr val="accent1"/>
-          </a:effectRef>
-          <a:fontRef idx="minor">
-            <a:schemeClr val="lt1"/>
-          </a:fontRef>
-        </p:style>
-        <p:txBody>
-          <a:bodyPr rtlCol="0" anchor="ctr"/>
-          <a:lstStyle/>
-          <a:p>
-            <a:pPr algn="ctr"/>
-          </a:p>
-        </p:txBody>
-      </p:sp>
-      <p:sp>
-        <p:nvSpPr>
-          <p:cNvPr id="4" name="TextBox 3"/>
-          <p:cNvSpPr txBox="1"/>
-          <p:nvPr/>
-        </p:nvSpPr>
-        <p:spPr>
-          <a:xfrm>
-            <a:off x="822960" y="960120"/>
-            <a:ext cx="10515600" cy="914400"/>
+            <a:off x="6675120" y="4343400"/>
+            <a:ext cx="4846320" cy="1280160"/>
           </a:xfrm>
           <a:prstGeom prst="rect">
             <a:avLst/>
@@ -8950,17 +8625,17 @@
                 <a:spcPts val="0"/>
               </a:spcBef>
               <a:spcAft>
-                <a:spcPts val="300"/>
-              </a:spcAft>
-            </a:pPr>
-            <a:r>
-              <a:rPr sz="1300" b="1">
-                <a:solidFill>
-                  <a:srgbClr val="F5A623"/>
-                </a:solidFill>
-                <a:latin typeface="Segoe UI"/>
-              </a:rPr>
-              <a:t>KEY BENEFITS</a:t>
+                <a:spcPts val="400"/>
+              </a:spcAft>
+            </a:pPr>
+            <a:r>
+              <a:rPr sz="1800" b="1">
+                <a:solidFill>
+                  <a:srgbClr val="FFFFFF"/>
+                </a:solidFill>
+                <a:latin typeface="Segoe UI"/>
+              </a:rPr>
+              <a:t>Clear records</a:t>
             </a:r>
           </a:p>
           <a:p>
@@ -8973,71 +8648,27 @@
               </a:spcAft>
             </a:pPr>
             <a:r>
-              <a:rPr sz="3400" b="1">
-                <a:solidFill>
-                  <a:srgbClr val="FFFFFF"/>
-                </a:solidFill>
-                <a:latin typeface="Segoe UI"/>
-              </a:rPr>
-              <a:t>Why It Matters</a:t>
-            </a:r>
-          </a:p>
-        </p:txBody>
-      </p:sp>
-      <p:sp>
-        <p:nvSpPr>
-          <p:cNvPr id="5" name="Rectangle 4"/>
-          <p:cNvSpPr/>
-          <p:nvPr/>
-        </p:nvSpPr>
-        <p:spPr>
-          <a:xfrm>
-            <a:off x="822960" y="2468880"/>
-            <a:ext cx="64008" cy="1463040"/>
-          </a:xfrm>
-          <a:prstGeom prst="rect">
-            <a:avLst/>
-          </a:prstGeom>
-          <a:solidFill>
-            <a:srgbClr val="F5A623"/>
-          </a:solidFill>
-          <a:ln>
-            <a:noFill/>
-          </a:ln>
-          <a:effectLst/>
-        </p:spPr>
-        <p:style>
-          <a:lnRef idx="1">
-            <a:schemeClr val="accent1"/>
-          </a:lnRef>
-          <a:fillRef idx="3">
-            <a:schemeClr val="accent1"/>
-          </a:fillRef>
-          <a:effectRef idx="2">
-            <a:schemeClr val="accent1"/>
-          </a:effectRef>
-          <a:fontRef idx="minor">
-            <a:schemeClr val="lt1"/>
-          </a:fontRef>
-        </p:style>
-        <p:txBody>
-          <a:bodyPr rtlCol="0" anchor="ctr"/>
-          <a:lstStyle/>
-          <a:p>
-            <a:pPr algn="ctr"/>
-          </a:p>
-        </p:txBody>
-      </p:sp>
-      <p:sp>
-        <p:nvSpPr>
-          <p:cNvPr id="6" name="TextBox 5"/>
+              <a:rPr sz="1300" b="0">
+                <a:solidFill>
+                  <a:srgbClr val="C4C4C4"/>
+                </a:solidFill>
+                <a:latin typeface="Segoe UI"/>
+              </a:rPr>
+              <a:t>Reports, logs &amp; inventory keep everything accountable.</a:t>
+            </a:r>
+          </a:p>
+        </p:txBody>
+      </p:sp>
+      <p:sp>
+        <p:nvSpPr>
+          <p:cNvPr id="13" name="TextBox 12"/>
           <p:cNvSpPr txBox="1"/>
           <p:nvPr/>
         </p:nvSpPr>
         <p:spPr>
           <a:xfrm>
-            <a:off x="1097280" y="2560320"/>
-            <a:ext cx="4846320" cy="1280160"/>
+            <a:off x="822960" y="6080760"/>
+            <a:ext cx="10515600" cy="548640"/>
           </a:xfrm>
           <a:prstGeom prst="rect">
             <a:avLst/>
@@ -9055,393 +8686,17 @@
                 <a:spcPts val="0"/>
               </a:spcBef>
               <a:spcAft>
-                <a:spcPts val="400"/>
-              </a:spcAft>
-            </a:pPr>
-            <a:r>
-              <a:rPr sz="1800" b="1">
-                <a:solidFill>
-                  <a:srgbClr val="FFFFFF"/>
-                </a:solidFill>
-                <a:latin typeface="Segoe UI"/>
-              </a:rPr>
-              <a:t>Saves time</a:t>
-            </a:r>
-          </a:p>
-          <a:p>
-            <a:pPr algn="l">
-              <a:spcBef>
                 <a:spcPts val="0"/>
-              </a:spcBef>
-              <a:spcAft>
-                <a:spcPts val="0"/>
-              </a:spcAft>
-            </a:pPr>
-            <a:r>
-              <a:rPr sz="1300" b="0">
-                <a:solidFill>
-                  <a:srgbClr val="B9D0EE"/>
-                </a:solidFill>
-                <a:latin typeface="Segoe UI"/>
-              </a:rPr>
-              <a:t>Manage every PC from one screen — no walking station to station.</a:t>
-            </a:r>
-          </a:p>
-        </p:txBody>
-      </p:sp>
-      <p:sp>
-        <p:nvSpPr>
-          <p:cNvPr id="7" name="Rectangle 6"/>
-          <p:cNvSpPr/>
-          <p:nvPr/>
-        </p:nvSpPr>
-        <p:spPr>
-          <a:xfrm>
-            <a:off x="6400800" y="2468880"/>
-            <a:ext cx="64008" cy="1463040"/>
-          </a:xfrm>
-          <a:prstGeom prst="rect">
-            <a:avLst/>
-          </a:prstGeom>
-          <a:solidFill>
-            <a:srgbClr val="F5A623"/>
-          </a:solidFill>
-          <a:ln>
-            <a:noFill/>
-          </a:ln>
-          <a:effectLst/>
-        </p:spPr>
-        <p:style>
-          <a:lnRef idx="1">
-            <a:schemeClr val="accent1"/>
-          </a:lnRef>
-          <a:fillRef idx="3">
-            <a:schemeClr val="accent1"/>
-          </a:fillRef>
-          <a:effectRef idx="2">
-            <a:schemeClr val="accent1"/>
-          </a:effectRef>
-          <a:fontRef idx="minor">
-            <a:schemeClr val="lt1"/>
-          </a:fontRef>
-        </p:style>
-        <p:txBody>
-          <a:bodyPr rtlCol="0" anchor="ctr"/>
-          <a:lstStyle/>
-          <a:p>
-            <a:pPr algn="ctr"/>
-          </a:p>
-        </p:txBody>
-      </p:sp>
-      <p:sp>
-        <p:nvSpPr>
-          <p:cNvPr id="8" name="TextBox 7"/>
-          <p:cNvSpPr txBox="1"/>
-          <p:nvPr/>
-        </p:nvSpPr>
-        <p:spPr>
-          <a:xfrm>
-            <a:off x="6675120" y="2560320"/>
-            <a:ext cx="4846320" cy="1280160"/>
-          </a:xfrm>
-          <a:prstGeom prst="rect">
-            <a:avLst/>
-          </a:prstGeom>
-          <a:noFill/>
-        </p:spPr>
-        <p:txBody>
-          <a:bodyPr wrap="square" anchor="t" lIns="0" rIns="0" tIns="0" bIns="0">
-            <a:spAutoFit/>
-          </a:bodyPr>
-          <a:lstStyle/>
-          <a:p>
-            <a:pPr algn="l">
-              <a:spcBef>
-                <a:spcPts val="0"/>
-              </a:spcBef>
-              <a:spcAft>
-                <a:spcPts val="400"/>
-              </a:spcAft>
-            </a:pPr>
-            <a:r>
-              <a:rPr sz="1800" b="1">
-                <a:solidFill>
-                  <a:srgbClr val="FFFFFF"/>
-                </a:solidFill>
-                <a:latin typeface="Segoe UI"/>
-              </a:rPr>
-              <a:t>Better focus</a:t>
-            </a:r>
-          </a:p>
-          <a:p>
-            <a:pPr algn="l">
-              <a:spcBef>
-                <a:spcPts val="0"/>
-              </a:spcBef>
-              <a:spcAft>
-                <a:spcPts val="0"/>
-              </a:spcAft>
-            </a:pPr>
-            <a:r>
-              <a:rPr sz="1300" b="0">
-                <a:solidFill>
-                  <a:srgbClr val="B9D0EE"/>
-                </a:solidFill>
-                <a:latin typeface="Segoe UI"/>
-              </a:rPr>
-              <a:t>Lock screens &amp; project demos to keep students on task.</a:t>
-            </a:r>
-          </a:p>
-        </p:txBody>
-      </p:sp>
-      <p:sp>
-        <p:nvSpPr>
-          <p:cNvPr id="9" name="Rectangle 8"/>
-          <p:cNvSpPr/>
-          <p:nvPr/>
-        </p:nvSpPr>
-        <p:spPr>
-          <a:xfrm>
-            <a:off x="822960" y="4251960"/>
-            <a:ext cx="64008" cy="1463040"/>
-          </a:xfrm>
-          <a:prstGeom prst="rect">
-            <a:avLst/>
-          </a:prstGeom>
-          <a:solidFill>
-            <a:srgbClr val="F5A623"/>
-          </a:solidFill>
-          <a:ln>
-            <a:noFill/>
-          </a:ln>
-          <a:effectLst/>
-        </p:spPr>
-        <p:style>
-          <a:lnRef idx="1">
-            <a:schemeClr val="accent1"/>
-          </a:lnRef>
-          <a:fillRef idx="3">
-            <a:schemeClr val="accent1"/>
-          </a:fillRef>
-          <a:effectRef idx="2">
-            <a:schemeClr val="accent1"/>
-          </a:effectRef>
-          <a:fontRef idx="minor">
-            <a:schemeClr val="lt1"/>
-          </a:fontRef>
-        </p:style>
-        <p:txBody>
-          <a:bodyPr rtlCol="0" anchor="ctr"/>
-          <a:lstStyle/>
-          <a:p>
-            <a:pPr algn="ctr"/>
-          </a:p>
-        </p:txBody>
-      </p:sp>
-      <p:sp>
-        <p:nvSpPr>
-          <p:cNvPr id="10" name="TextBox 9"/>
-          <p:cNvSpPr txBox="1"/>
-          <p:nvPr/>
-        </p:nvSpPr>
-        <p:spPr>
-          <a:xfrm>
-            <a:off x="1097280" y="4343400"/>
-            <a:ext cx="4846320" cy="1280160"/>
-          </a:xfrm>
-          <a:prstGeom prst="rect">
-            <a:avLst/>
-          </a:prstGeom>
-          <a:noFill/>
-        </p:spPr>
-        <p:txBody>
-          <a:bodyPr wrap="square" anchor="t" lIns="0" rIns="0" tIns="0" bIns="0">
-            <a:spAutoFit/>
-          </a:bodyPr>
-          <a:lstStyle/>
-          <a:p>
-            <a:pPr algn="l">
-              <a:spcBef>
-                <a:spcPts val="0"/>
-              </a:spcBef>
-              <a:spcAft>
-                <a:spcPts val="400"/>
-              </a:spcAft>
-            </a:pPr>
-            <a:r>
-              <a:rPr sz="1800" b="1">
-                <a:solidFill>
-                  <a:srgbClr val="FFFFFF"/>
-                </a:solidFill>
-                <a:latin typeface="Segoe UI"/>
-              </a:rPr>
-              <a:t>Faster support</a:t>
-            </a:r>
-          </a:p>
-          <a:p>
-            <a:pPr algn="l">
-              <a:spcBef>
-                <a:spcPts val="0"/>
-              </a:spcBef>
-              <a:spcAft>
-                <a:spcPts val="0"/>
-              </a:spcAft>
-            </a:pPr>
-            <a:r>
-              <a:rPr sz="1300" b="0">
-                <a:solidFill>
-                  <a:srgbClr val="B9D0EE"/>
-                </a:solidFill>
-                <a:latin typeface="Segoe UI"/>
-              </a:rPr>
-              <a:t>Tickets &amp; messaging resolve lab issues quickly.</a:t>
-            </a:r>
-          </a:p>
-        </p:txBody>
-      </p:sp>
-      <p:sp>
-        <p:nvSpPr>
-          <p:cNvPr id="11" name="Rectangle 10"/>
-          <p:cNvSpPr/>
-          <p:nvPr/>
-        </p:nvSpPr>
-        <p:spPr>
-          <a:xfrm>
-            <a:off x="6400800" y="4251960"/>
-            <a:ext cx="64008" cy="1463040"/>
-          </a:xfrm>
-          <a:prstGeom prst="rect">
-            <a:avLst/>
-          </a:prstGeom>
-          <a:solidFill>
-            <a:srgbClr val="F5A623"/>
-          </a:solidFill>
-          <a:ln>
-            <a:noFill/>
-          </a:ln>
-          <a:effectLst/>
-        </p:spPr>
-        <p:style>
-          <a:lnRef idx="1">
-            <a:schemeClr val="accent1"/>
-          </a:lnRef>
-          <a:fillRef idx="3">
-            <a:schemeClr val="accent1"/>
-          </a:fillRef>
-          <a:effectRef idx="2">
-            <a:schemeClr val="accent1"/>
-          </a:effectRef>
-          <a:fontRef idx="minor">
-            <a:schemeClr val="lt1"/>
-          </a:fontRef>
-        </p:style>
-        <p:txBody>
-          <a:bodyPr rtlCol="0" anchor="ctr"/>
-          <a:lstStyle/>
-          <a:p>
-            <a:pPr algn="ctr"/>
-          </a:p>
-        </p:txBody>
-      </p:sp>
-      <p:sp>
-        <p:nvSpPr>
-          <p:cNvPr id="12" name="TextBox 11"/>
-          <p:cNvSpPr txBox="1"/>
-          <p:nvPr/>
-        </p:nvSpPr>
-        <p:spPr>
-          <a:xfrm>
-            <a:off x="6675120" y="4343400"/>
-            <a:ext cx="4846320" cy="1280160"/>
-          </a:xfrm>
-          <a:prstGeom prst="rect">
-            <a:avLst/>
-          </a:prstGeom>
-          <a:noFill/>
-        </p:spPr>
-        <p:txBody>
-          <a:bodyPr wrap="square" anchor="t" lIns="0" rIns="0" tIns="0" bIns="0">
-            <a:spAutoFit/>
-          </a:bodyPr>
-          <a:lstStyle/>
-          <a:p>
-            <a:pPr algn="l">
-              <a:spcBef>
-                <a:spcPts val="0"/>
-              </a:spcBef>
-              <a:spcAft>
-                <a:spcPts val="400"/>
-              </a:spcAft>
-            </a:pPr>
-            <a:r>
-              <a:rPr sz="1800" b="1">
-                <a:solidFill>
-                  <a:srgbClr val="FFFFFF"/>
-                </a:solidFill>
-                <a:latin typeface="Segoe UI"/>
-              </a:rPr>
-              <a:t>Clear records</a:t>
-            </a:r>
-          </a:p>
-          <a:p>
-            <a:pPr algn="l">
-              <a:spcBef>
-                <a:spcPts val="0"/>
-              </a:spcBef>
-              <a:spcAft>
-                <a:spcPts val="0"/>
-              </a:spcAft>
-            </a:pPr>
-            <a:r>
-              <a:rPr sz="1300" b="0">
-                <a:solidFill>
-                  <a:srgbClr val="B9D0EE"/>
-                </a:solidFill>
-                <a:latin typeface="Segoe UI"/>
-              </a:rPr>
-              <a:t>Grades, reports &amp; logs keep everything accountable.</a:t>
-            </a:r>
-          </a:p>
-        </p:txBody>
-      </p:sp>
-      <p:sp>
-        <p:nvSpPr>
-          <p:cNvPr id="13" name="TextBox 12"/>
-          <p:cNvSpPr txBox="1"/>
-          <p:nvPr/>
-        </p:nvSpPr>
-        <p:spPr>
-          <a:xfrm>
-            <a:off x="822960" y="6080760"/>
-            <a:ext cx="10515600" cy="548640"/>
-          </a:xfrm>
-          <a:prstGeom prst="rect">
-            <a:avLst/>
-          </a:prstGeom>
-          <a:noFill/>
-        </p:spPr>
-        <p:txBody>
-          <a:bodyPr wrap="square" anchor="t" lIns="0" rIns="0" tIns="0" bIns="0">
-            <a:spAutoFit/>
-          </a:bodyPr>
-          <a:lstStyle/>
-          <a:p>
-            <a:pPr algn="l">
-              <a:spcBef>
-                <a:spcPts val="0"/>
-              </a:spcBef>
-              <a:spcAft>
-                <a:spcPts val="0"/>
               </a:spcAft>
             </a:pPr>
             <a:r>
               <a:rPr sz="1300" b="1">
                 <a:solidFill>
-                  <a:srgbClr val="9DB6D4"/>
-                </a:solidFill>
-                <a:latin typeface="Segoe UI"/>
-              </a:rPr>
-              <a:t>DYCI Computer Laboratory Management System  —  smarter labs, simpler management.</a:t>
+                  <a:srgbClr val="C9C9C9"/>
+                </a:solidFill>
+                <a:latin typeface="Segoe UI"/>
+              </a:rPr>
+              <a:t>DYCI Computer Laboratory Management System  -  smarter labs, simpler management.</a:t>
             </a:r>
           </a:p>
         </p:txBody>
